--- a/docs/slides/pptx/M2-finding.pptx
+++ b/docs/slides/pptx/M2-finding.pptx
@@ -24,6 +24,10 @@
     <p:sldId id="272" r:id="rId24"/>
     <p:sldId id="273" r:id="rId25"/>
     <p:sldId id="274" r:id="rId26"/>
+    <p:sldId id="275" r:id="rId27"/>
+    <p:sldId id="276" r:id="rId28"/>
+    <p:sldId id="277" r:id="rId29"/>
+    <p:sldId id="278" r:id="rId30"/>
   </p:sldIdLst>
   <p:sldSz cx="12191695" cy="6858000" type="screen4x3"/>
   <p:notesSz cx="6858000" cy="9144000"/>
@@ -545,6 +549,321 @@
 </p:notes>
 </file>
 
+<file path=ppt/notesSlides/notesSlide10.xml><?xml version="1.0" encoding="utf-8"?>
+<p:notes xmlns:a="http://schemas.openxmlformats.org/drawingml/2006/main" xmlns:p="http://schemas.openxmlformats.org/presentationml/2006/main" xmlns:r="http://schemas.openxmlformats.org/officeDocument/2006/relationships">
+  <p:cSld>
+    <p:spTree>
+      <p:nvGrpSpPr>
+        <p:cNvPr id="1" name=""/>
+        <p:cNvGrpSpPr/>
+        <p:nvPr/>
+      </p:nvGrpSpPr>
+      <p:grpSpPr>
+        <a:xfrm>
+          <a:off x="0" y="0"/>
+          <a:ext cx="0" cy="0"/>
+          <a:chOff x="0" y="0"/>
+          <a:chExt cx="0" cy="0"/>
+        </a:xfrm>
+      </p:grpSpPr>
+      <p:sp>
+        <p:nvSpPr>
+          <p:cNvPr id="2" name="Slide Image Placeholder 1"/>
+          <p:cNvSpPr>
+            <a:spLocks noGrp="1"/>
+          </p:cNvSpPr>
+          <p:nvPr>
+            <p:ph type="sldImg" idx="2"/>
+          </p:nvPr>
+        </p:nvSpPr>
+        <p:spPr/>
+      </p:sp>
+      <p:sp>
+        <p:nvSpPr>
+          <p:cNvPr id="3" name="Notes Placeholder 2"/>
+          <p:cNvSpPr>
+            <a:spLocks noGrp="1"/>
+          </p:cNvSpPr>
+          <p:nvPr>
+            <p:ph type="body" idx="3" sz="quarter"/>
+          </p:nvPr>
+        </p:nvSpPr>
+        <p:spPr/>
+        <p:txBody>
+          <a:bodyPr/>
+          <a:lstStyle/>
+          <a:p>
+            <a:r>
+              <a:t>One embedding investment keeps paying: search, recommendations, anomaly detection from one piece of infrastructure.</a:t>
+            </a:r>
+          </a:p>
+        </p:txBody>
+      </p:sp>
+      <p:sp>
+        <p:nvSpPr>
+          <p:cNvPr id="4" name="Slide Number Placeholder 3"/>
+          <p:cNvSpPr>
+            <a:spLocks noGrp="1"/>
+          </p:cNvSpPr>
+          <p:nvPr>
+            <p:ph type="sldNum" idx="5" sz="quarter"/>
+          </p:nvPr>
+        </p:nvSpPr>
+        <p:spPr/>
+      </p:sp>
+    </p:spTree>
+  </p:cSld>
+  <p:clrMapOvr>
+    <a:masterClrMapping/>
+  </p:clrMapOvr>
+</p:notes>
+</file>
+
+<file path=ppt/notesSlides/notesSlide11.xml><?xml version="1.0" encoding="utf-8"?>
+<p:notes xmlns:a="http://schemas.openxmlformats.org/drawingml/2006/main" xmlns:p="http://schemas.openxmlformats.org/presentationml/2006/main" xmlns:r="http://schemas.openxmlformats.org/officeDocument/2006/relationships">
+  <p:cSld>
+    <p:spTree>
+      <p:nvGrpSpPr>
+        <p:cNvPr id="1" name=""/>
+        <p:cNvGrpSpPr/>
+        <p:nvPr/>
+      </p:nvGrpSpPr>
+      <p:grpSpPr>
+        <a:xfrm>
+          <a:off x="0" y="0"/>
+          <a:ext cx="0" cy="0"/>
+          <a:chOff x="0" y="0"/>
+          <a:chExt cx="0" cy="0"/>
+        </a:xfrm>
+      </p:grpSpPr>
+      <p:sp>
+        <p:nvSpPr>
+          <p:cNvPr id="2" name="Slide Image Placeholder 1"/>
+          <p:cNvSpPr>
+            <a:spLocks noGrp="1"/>
+          </p:cNvSpPr>
+          <p:nvPr>
+            <p:ph type="sldImg" idx="2"/>
+          </p:nvPr>
+        </p:nvSpPr>
+        <p:spPr/>
+      </p:sp>
+      <p:sp>
+        <p:nvSpPr>
+          <p:cNvPr id="3" name="Notes Placeholder 2"/>
+          <p:cNvSpPr>
+            <a:spLocks noGrp="1"/>
+          </p:cNvSpPr>
+          <p:nvPr>
+            <p:ph type="body" idx="3" sz="quarter"/>
+          </p:nvPr>
+        </p:nvSpPr>
+        <p:spPr/>
+        <p:txBody>
+          <a:bodyPr/>
+          <a:lstStyle/>
+          <a:p>
+            <a:r>
+              <a:t>The gear failure in the demo (65-litre pack recommends the 40-litre pack) is this diagram working exactly as drawn. Description similarity finds the most similar description.</a:t>
+            </a:r>
+          </a:p>
+        </p:txBody>
+      </p:sp>
+      <p:sp>
+        <p:nvSpPr>
+          <p:cNvPr id="4" name="Slide Number Placeholder 3"/>
+          <p:cNvSpPr>
+            <a:spLocks noGrp="1"/>
+          </p:cNvSpPr>
+          <p:nvPr>
+            <p:ph type="sldNum" idx="5" sz="quarter"/>
+          </p:nvPr>
+        </p:nvSpPr>
+        <p:spPr/>
+      </p:sp>
+    </p:spTree>
+  </p:cSld>
+  <p:clrMapOvr>
+    <a:masterClrMapping/>
+  </p:clrMapOvr>
+</p:notes>
+</file>
+
+<file path=ppt/notesSlides/notesSlide12.xml><?xml version="1.0" encoding="utf-8"?>
+<p:notes xmlns:a="http://schemas.openxmlformats.org/drawingml/2006/main" xmlns:p="http://schemas.openxmlformats.org/presentationml/2006/main" xmlns:r="http://schemas.openxmlformats.org/officeDocument/2006/relationships">
+  <p:cSld>
+    <p:spTree>
+      <p:nvGrpSpPr>
+        <p:cNvPr id="1" name=""/>
+        <p:cNvGrpSpPr/>
+        <p:nvPr/>
+      </p:nvGrpSpPr>
+      <p:grpSpPr>
+        <a:xfrm>
+          <a:off x="0" y="0"/>
+          <a:ext cx="0" cy="0"/>
+          <a:chOff x="0" y="0"/>
+          <a:chExt cx="0" cy="0"/>
+        </a:xfrm>
+      </p:grpSpPr>
+      <p:sp>
+        <p:nvSpPr>
+          <p:cNvPr id="2" name="Slide Image Placeholder 1"/>
+          <p:cNvSpPr>
+            <a:spLocks noGrp="1"/>
+          </p:cNvSpPr>
+          <p:nvPr>
+            <p:ph type="sldImg" idx="2"/>
+          </p:nvPr>
+        </p:nvSpPr>
+        <p:spPr/>
+      </p:sp>
+      <p:sp>
+        <p:nvSpPr>
+          <p:cNvPr id="3" name="Notes Placeholder 2"/>
+          <p:cNvSpPr>
+            <a:spLocks noGrp="1"/>
+          </p:cNvSpPr>
+          <p:nvPr>
+            <p:ph type="body" idx="3" sz="quarter"/>
+          </p:nvPr>
+        </p:nvSpPr>
+        <p:spPr/>
+        <p:txBody>
+          <a:bodyPr/>
+          <a:lstStyle/>
+          <a:p>
+            <a:r>
+              <a:t>This gets you candidates; metadata re-ranking gets you recommendations. One target trail in the slice has no real neighbors at all; a shipping product shows nothing rather than five weak guesses.</a:t>
+            </a:r>
+          </a:p>
+          <a:p>
+            <a:r>
+              <a:t>Demo script (the demo outline that used to live in the spec, sized for the 30-minute block: skip the break-it-on-purpose beats first if you are running long):</a:t>
+            </a:r>
+          </a:p>
+          <a:p>
+            <a:r>
+              <a:t>1. Open the Avalanche Lake Trail page and ask the room what should be at the bottom of this screen. Everyone knows the answer, and almost nobody builds it.</a:t>
+            </a:r>
+          </a:p>
+          <a:p>
+            <a:r>
+              <a:t>2. Bring back the embedded trail catalog from feature 04, already sitting in memory; nothing new is created in this step, which is the point.</a:t>
+            </a:r>
+          </a:p>
+          <a:p>
+            <a:r>
+              <a:t>3. Write "more like this": take one trail's vector, rank every other trail by cosine similarity, skip itself, and take five. It's the search code with the query swapped for an item.</a:t>
+            </a:r>
+          </a:p>
+          <a:p>
+            <a:r>
+              <a:t>4. Run it for a few trails and let the room judge the results by reading the names, because they can. The alpine lake hikes do cluster, but they also come back mostly rated hard when the trail you started from is a moderate family walk, and one neighbor is a Smokies hike with no lake at all. Difficulty and park are right there in the catalog, but they are not in the description text, so the embedding cannot see them. One screen carries the lesson: similarity gets you candidates, and metadata re-ranking turns them into recommendations.</a:t>
+            </a:r>
+          </a:p>
+          <a:p>
+            <a:r>
+              <a:t>5. Do the same with gear and let it fail on purpose. The top result for the Cascade 65 Backpack is the Cascade 40 Daypack, the single product that buyer will never need. Content similarity finds substitutes; a store wants complements. Then show the review co-mention counts, where the Summit Bear Canister sits at the top, and name the difference: what a thing is like versus what people actually use with it.</a:t>
+            </a:r>
+          </a:p>
+          <a:p>
+            <a:r>
+              <a:t>6. Close on what this can't do. Cross-category discovery is out of reach for description similarity, one target trail in the slice has no real neighbors at all and a shipping product should show nothing rather than five weak guesses, and behavior data is what fixes both.</a:t>
+            </a:r>
+          </a:p>
+        </p:txBody>
+      </p:sp>
+      <p:sp>
+        <p:nvSpPr>
+          <p:cNvPr id="4" name="Slide Number Placeholder 3"/>
+          <p:cNvSpPr>
+            <a:spLocks noGrp="1"/>
+          </p:cNvSpPr>
+          <p:nvPr>
+            <p:ph type="sldNum" idx="5" sz="quarter"/>
+          </p:nvPr>
+        </p:nvSpPr>
+        <p:spPr/>
+      </p:sp>
+    </p:spTree>
+  </p:cSld>
+  <p:clrMapOvr>
+    <a:masterClrMapping/>
+  </p:clrMapOvr>
+</p:notes>
+</file>
+
+<file path=ppt/notesSlides/notesSlide13.xml><?xml version="1.0" encoding="utf-8"?>
+<p:notes xmlns:a="http://schemas.openxmlformats.org/drawingml/2006/main" xmlns:p="http://schemas.openxmlformats.org/presentationml/2006/main" xmlns:r="http://schemas.openxmlformats.org/officeDocument/2006/relationships">
+  <p:cSld>
+    <p:spTree>
+      <p:nvGrpSpPr>
+        <p:cNvPr id="1" name=""/>
+        <p:cNvGrpSpPr/>
+        <p:nvPr/>
+      </p:nvGrpSpPr>
+      <p:grpSpPr>
+        <a:xfrm>
+          <a:off x="0" y="0"/>
+          <a:ext cx="0" cy="0"/>
+          <a:chOff x="0" y="0"/>
+          <a:chExt cx="0" cy="0"/>
+        </a:xfrm>
+      </p:grpSpPr>
+      <p:sp>
+        <p:nvSpPr>
+          <p:cNvPr id="2" name="Slide Image Placeholder 1"/>
+          <p:cNvSpPr>
+            <a:spLocks noGrp="1"/>
+          </p:cNvSpPr>
+          <p:nvPr>
+            <p:ph type="sldImg" idx="2"/>
+          </p:nvPr>
+        </p:nvSpPr>
+        <p:spPr/>
+      </p:sp>
+      <p:sp>
+        <p:nvSpPr>
+          <p:cNvPr id="3" name="Notes Placeholder 2"/>
+          <p:cNvSpPr>
+            <a:spLocks noGrp="1"/>
+          </p:cNvSpPr>
+          <p:nvPr>
+            <p:ph type="body" idx="3" sz="quarter"/>
+          </p:nvPr>
+        </p:nvSpPr>
+        <p:spPr/>
+        <p:txBody>
+          <a:bodyPr/>
+          <a:lstStyle/>
+          <a:p>
+            <a:r>
+              <a:t>Nobody should leave this room having never built the thing they came for. 05's step 6 says run question 1 twenty times, not once; a wrong answer one run in five is invisible in a single run and is the only defect here that could hurt somebody.</a:t>
+            </a:r>
+          </a:p>
+        </p:txBody>
+      </p:sp>
+      <p:sp>
+        <p:nvSpPr>
+          <p:cNvPr id="4" name="Slide Number Placeholder 3"/>
+          <p:cNvSpPr>
+            <a:spLocks noGrp="1"/>
+          </p:cNvSpPr>
+          <p:nvPr>
+            <p:ph type="sldNum" idx="5" sz="quarter"/>
+          </p:nvPr>
+        </p:nvSpPr>
+        <p:spPr/>
+      </p:sp>
+    </p:spTree>
+  </p:cSld>
+  <p:clrMapOvr>
+    <a:masterClrMapping/>
+  </p:clrMapOvr>
+</p:notes>
+</file>
+
 <file path=ppt/notesSlides/notesSlide2.xml><?xml version="1.0" encoding="utf-8"?>
 <p:notes xmlns:a="http://schemas.openxmlformats.org/drawingml/2006/main" xmlns:p="http://schemas.openxmlformats.org/presentationml/2006/main" xmlns:r="http://schemas.openxmlformats.org/officeDocument/2006/relationships">
   <p:cSld>
@@ -590,7 +909,7 @@
           <a:lstStyle/>
           <a:p>
             <a:r>
-              <a:t>Foundation feature for the rest of the day: 05, 06, and 08 all reuse the idea, and 06 and 08 reuse the actual vectors.</a:t>
+              <a:t>Two minutes. This is the one slide most people photograph. If someone asks "is RAG just search," the honest answer is "search plus a model that reads the results," and this picture shows it.</a:t>
             </a:r>
           </a:p>
         </p:txBody>
@@ -660,42 +979,7 @@
           <a:lstStyle/>
           <a:p>
             <a:r>
-              <a:t>A perfect topical match and terrible advice, because embeddings capture what a text is about and not whether it suits the asker. Note the scores: this query tops out near 0.49 vs 0.77 for query one. That number is what a score floor keys on. The fix is metadata filters and a floor rather than a better model.</a:t>
-            </a:r>
-          </a:p>
-          <a:p>
-            <a:r>
-              <a:t>Demo script (the demo outline that used to live in the spec, sized for the 30-minute block: skip the break-it-on-purpose beats first if you are running long):</a:t>
-            </a:r>
-          </a:p>
-          <a:p>
-            <a:r>
-              <a:t>1. Run the "dog-friendly waterfall hike, not too steep" query against naive keyword search over data/trails-slice.json and get junk results. That's today's baseline.</a:t>
-            </a:r>
-          </a:p>
-          <a:p>
-            <a:r>
-              <a:t>2. Show what an embedding is: embed one sentence via Microsoft.Extensions.AI's IEmbeddingGenerator against Ollama and look at the raw float array on screen for a moment, because it is worth seeing that an embedding is nothing more than a list of numbers.</a:t>
-            </a:r>
-          </a:p>
-          <a:p>
-            <a:r>
-              <a:t>3. Embed the trail catalog in a loop and time it live. The checked-in demo embeds the 30-trail slice in data/trails-slice.json in under two seconds. The point lands: seconds, not minutes, and it happens once at startup rather than per search.</a:t>
-            </a:r>
-          </a:p>
-          <a:p>
-            <a:r>
-              <a:t>4. Write cosine similarity on screen; it fits in one visible method, which surprises people.</a:t>
-            </a:r>
-          </a:p>
-          <a:p>
-            <a:r>
-              <a:t>5. Re-run the same query semantically. The payoff: the gentle shaded waterfall trails rise to the top, with the similarity scores visible next to each hit.</a:t>
-            </a:r>
-          </a:p>
-          <a:p>
-            <a:r>
-              <a:t>6. Show one more query with zero keyword overlap ("somewhere quiet to take my kids"), which proves it isn't a fluke and then hands you the feature's best moment. The top hit is Taft Point, whose own description warns that the ground gives no second chances beside a 3,000-foot drop. It is a perfect topical match and terrible advice. Say what that means: embeddings capture what text is about, not whether it's suitable, and the fix is metadata filters and a score floor, not a better model. Note that everything ran locally, and that the scores for this query top out near 0.49 against 0.77 for query one, which is the number a score floor would key on.</a:t>
+              <a:t>Foundation feature for the rest of the day: 05, 06, and 08 all reuse the idea, and 06 and 08 reuse the actual vectors.</a:t>
             </a:r>
           </a:p>
         </p:txBody>
@@ -765,7 +1049,7 @@
           <a:lstStyle/>
           <a:p>
             <a:r>
-              <a:t>The model becomes a reading assistant for your content rather than an oracle.</a:t>
+              <a:t>Show the raw float array once so the word "vector" stops being magic. Then show the cosine method: it fits on a slide.</a:t>
             </a:r>
           </a:p>
         </p:txBody>
@@ -835,7 +1119,42 @@
           <a:lstStyle/>
           <a:p>
             <a:r>
-              <a:t>Open Section 4 of the Glacier backcountry guide and read 4.1 then 4.2 aloud. Ask the room which one a model answers from. Worth 90 seconds.</a:t>
+              <a:t>A perfect topical match and terrible advice, because embeddings capture what a text is about and not whether it suits the asker. Note the scores: this query tops out near 0.49 vs 0.77 for query one. That number is what a score floor keys on. The fix is metadata filters and a floor rather than a better model.</a:t>
+            </a:r>
+          </a:p>
+          <a:p>
+            <a:r>
+              <a:t>Demo script (the demo outline that used to live in the spec, sized for the 30-minute block: skip the break-it-on-purpose beats first if you are running long):</a:t>
+            </a:r>
+          </a:p>
+          <a:p>
+            <a:r>
+              <a:t>1. Run the "dog-friendly waterfall hike, not too steep" query against naive keyword search over data/trails-slice.json and get junk results. That's today's baseline.</a:t>
+            </a:r>
+          </a:p>
+          <a:p>
+            <a:r>
+              <a:t>2. Show what an embedding is: embed one sentence via Microsoft.Extensions.AI's IEmbeddingGenerator against Ollama and look at the raw float array on screen for a moment, because it is worth seeing that an embedding is nothing more than a list of numbers.</a:t>
+            </a:r>
+          </a:p>
+          <a:p>
+            <a:r>
+              <a:t>3. Embed the trail catalog in a loop and time it live. The checked-in demo embeds the 30-trail slice in data/trails-slice.json in under two seconds. The point lands: seconds, not minutes, and it happens once at startup rather than per search.</a:t>
+            </a:r>
+          </a:p>
+          <a:p>
+            <a:r>
+              <a:t>4. Write cosine similarity on screen; it fits in one visible method, which surprises people.</a:t>
+            </a:r>
+          </a:p>
+          <a:p>
+            <a:r>
+              <a:t>5. Re-run the same query semantically. The payoff: the gentle shaded waterfall trails rise to the top, with the similarity scores visible next to each hit.</a:t>
+            </a:r>
+          </a:p>
+          <a:p>
+            <a:r>
+              <a:t>6. Show one more query with zero keyword overlap ("somewhere quiet to take my kids"), which proves it isn't a fluke and then hands you the feature's best moment. The top hit is Taft Point, whose own description warns that the ground gives no second chances beside a 3,000-foot drop. It is a perfect topical match and terrible advice. Say what that means: embeddings capture what text is about, not whether it's suitable, and the fix is metadata filters and a score floor, not a better model. Note that everything ran locally, and that the scores for this query top out near 0.49 against 0.77 for query one, which is the number a score floor would key on.</a:t>
             </a:r>
           </a:p>
         </p:txBody>
@@ -905,62 +1224,7 @@
           <a:lstStyle/>
           <a:p>
             <a:r>
-              <a:t>The date beat: "CLOSED effective June 20, 2026, until further notice" is unanswerable without a calendar. Without the date the model refused this question 10 runs in 18; with it, 1 in 20. Almost every real knowledge base is a corpus of dated notices. Most transferable thing in the feature.</a:t>
-            </a:r>
-          </a:p>
-          <a:p>
-            <a:r>
-              <a:t>Demo script (the demo outline that used to live in the spec, sized for the 30-minute block: skip the break-it-on-purpose beats first if you are running long):</a:t>
-            </a:r>
-          </a:p>
-          <a:p>
-            <a:r>
-              <a:t>1. Ask the model the Sperry Chalet campfire question with no context. It answers confidently. Then open the actual regulation and show the answer is wrong. Let that sit for a beat; this is the whole reason RAG exists.</a:t>
-            </a:r>
-          </a:p>
-          <a:p>
-            <a:r>
-              <a:t>2. Show the chunked park docs, then open Section 4 of the Glacier backcountry guide in data/park-docs/ and read 4.1 and 4.2 aloud in order. A conditional rule, then the absolute exception that cancels it. Ask the room which one a model answers from. This is the chunking beat and it is worth 90 seconds; the numbers are in expected-output.md under "Chunking".</a:t>
-            </a:r>
-          </a:p>
-          <a:p>
-            <a:r>
-              <a:t>3. Reuse the embedding search from feature 04 against the chunks. Retrieval is literally the previous feature. Show the score table for the Sperry question, then run --top-k 8 --alpha 1.0 and point at ranks 4 through 8: Acadia and Yosemite campfire sections, five of eight chunks from the wrong park.</a:t>
-            </a:r>
-          </a:p>
-          <a:p>
-            <a:r>
-              <a:t>4. Turn on hybrid retrieval. Same cosine score, plus a keyword score weighted by word rarity, combined with a visible alpha. Re-run --top-k 8 at the default alpha: Acadia is gone and the wrong-park chunks are replaced by Glacier documents that name Sperry. The printed table shows both component scores, so you can point at "sperry" doing the work.</a:t>
-            </a:r>
-          </a:p>
-          <a:p>
-            <a:r>
-              <a:t>5. Build the grounded prompt: retrieved chunks + question + "answer only from the context, cite the source, say when you don't know."</a:t>
-            </a:r>
-          </a:p>
-          <a:p>
-            <a:r>
-              <a:t>6. Run it. The payoff: the right answer, with the regulation document cited by name.</a:t>
-            </a:r>
-          </a:p>
-          <a:p>
-            <a:r>
-              <a:t>7. Show the citation check. Parse the ids out of the answer, compare against what was retrieved, print a loud failure on a mismatch. Run the unanswerable question a couple of times until the model appends an invented chunk id to its own refusal, which it does often enough to count on.</a:t>
-            </a:r>
-          </a:p>
-          <a:p>
-            <a:r>
-              <a:t>8. Ask it something the docs don't cover ("Can I bring a drone?" if absent) and get an honest "the provided documents don't say," not a guess.</a:t>
-            </a:r>
-          </a:p>
-          <a:p>
-            <a:r>
-              <a:t>8b. Ask "Is the Avalanche Lake Trail open right now?" and show the date sitting in the prompt. Explain why it is there: without it the same question got refused in 10 runs out of 18, not because retrieval missed but because "effective June 20, 2026, until further notice" is unanswerable without a calendar. Worth 60 seconds; it is the most transferable thing in the feature.</a:t>
-            </a:r>
-          </a:p>
-          <a:p>
-            <a:r>
-              <a:t>9. Swap generation from the local model to gpt-4.1 on Foundry with the one-line Microsoft.Extensions.AI client change, re-run a multi-document question, and compare answer quality side by side.</a:t>
+              <a:t>The model becomes a reading assistant for your content rather than an oracle.</a:t>
             </a:r>
           </a:p>
         </p:txBody>
@@ -1030,7 +1294,7 @@
           <a:lstStyle/>
           <a:p>
             <a:r>
-              <a:t>One embedding investment keeps paying: search, recommendations, anomaly detection from one piece of infrastructure.</a:t>
+              <a:t>Open Section 4 of the Glacier backcountry guide and read 4.1 then 4.2 aloud. Ask the room which one a model answers from. Worth 90 seconds.</a:t>
             </a:r>
           </a:p>
         </p:txBody>
@@ -1100,42 +1364,7 @@
           <a:lstStyle/>
           <a:p>
             <a:r>
-              <a:t>This gets you candidates; metadata re-ranking gets you recommendations. One target trail in the slice has no real neighbors at all; a shipping product shows nothing rather than five weak guesses.</a:t>
-            </a:r>
-          </a:p>
-          <a:p>
-            <a:r>
-              <a:t>Demo script (the demo outline that used to live in the spec, sized for the 30-minute block: skip the break-it-on-purpose beats first if you are running long):</a:t>
-            </a:r>
-          </a:p>
-          <a:p>
-            <a:r>
-              <a:t>1. Open the Avalanche Lake Trail page and ask the room what should be at the bottom of this screen. Everyone knows the answer, and almost nobody builds it.</a:t>
-            </a:r>
-          </a:p>
-          <a:p>
-            <a:r>
-              <a:t>2. Bring back the embedded trail catalog from feature 04, already sitting in memory; nothing new is created in this step, which is the point.</a:t>
-            </a:r>
-          </a:p>
-          <a:p>
-            <a:r>
-              <a:t>3. Write "more like this": take one trail's vector, rank every other trail by cosine similarity, skip itself, and take five. It's the search code with the query swapped for an item.</a:t>
-            </a:r>
-          </a:p>
-          <a:p>
-            <a:r>
-              <a:t>4. Run it for a few trails and let the room judge the results by reading the names, because they can. The alpine lake hikes do cluster, but they also come back mostly rated hard when the trail you started from is a moderate family walk, and one neighbor is a Smokies hike with no lake at all. Difficulty and park are right there in the catalog, but they are not in the description text, so the embedding cannot see them. One screen carries the lesson: similarity gets you candidates, and metadata re-ranking turns them into recommendations.</a:t>
-            </a:r>
-          </a:p>
-          <a:p>
-            <a:r>
-              <a:t>5. Do the same with gear and let it fail on purpose. The top result for the Cascade 65 Backpack is the Cascade 40 Daypack, the single product that buyer will never need. Content similarity finds substitutes; a store wants complements. Then show the review co-mention counts, where the Summit Bear Canister sits at the top, and name the difference: what a thing is like versus what people actually use with it.</a:t>
-            </a:r>
-          </a:p>
-          <a:p>
-            <a:r>
-              <a:t>6. Close on what this can't do. Cross-category discovery is out of reach for description similarity, one target trail in the slice has no real neighbors at all and a shipping product should show nothing rather than five weak guesses, and behavior data is what fixes both.</a:t>
+              <a:t>Point at the second row and say "the top row happened before anyone asked." Then say where the failure in the next slide lives: in the split box, not in the model box.</a:t>
             </a:r>
           </a:p>
         </p:txBody>
@@ -1205,7 +1434,62 @@
           <a:lstStyle/>
           <a:p>
             <a:r>
-              <a:t>Nobody should leave this room having never built the thing they came for. 05's step 6 says run question 1 twenty times, not once; a wrong answer one run in five is invisible in a single run and is the only defect here that could hurt somebody.</a:t>
+              <a:t>The date beat: "CLOSED effective June 20, 2026, until further notice" is unanswerable without a calendar. Without the date the model refused this question 10 runs in 18; with it, 1 in 20. Almost every real knowledge base is a corpus of dated notices. Most transferable thing in the feature.</a:t>
+            </a:r>
+          </a:p>
+          <a:p>
+            <a:r>
+              <a:t>Demo script (the demo outline that used to live in the spec, sized for the 30-minute block: skip the break-it-on-purpose beats first if you are running long):</a:t>
+            </a:r>
+          </a:p>
+          <a:p>
+            <a:r>
+              <a:t>1. Ask the model the Sperry Chalet campfire question with no context. It answers confidently. Then open the actual regulation and show the answer is wrong. Let that sit for a beat; this is the whole reason RAG exists.</a:t>
+            </a:r>
+          </a:p>
+          <a:p>
+            <a:r>
+              <a:t>2. Show the chunked park docs, then open Section 4 of the Glacier backcountry guide in data/park-docs/ and read 4.1 and 4.2 aloud in order. A conditional rule, then the absolute exception that cancels it. Ask the room which one a model answers from. This is the chunking beat and it is worth 90 seconds; the numbers are in expected-output.md under "Chunking".</a:t>
+            </a:r>
+          </a:p>
+          <a:p>
+            <a:r>
+              <a:t>3. Reuse the embedding search from feature 04 against the chunks. Retrieval is literally the previous feature. Show the score table for the Sperry question, then run --top-k 8 --alpha 1.0 and point at ranks 4 through 8: Acadia and Yosemite campfire sections, five of eight chunks from the wrong park.</a:t>
+            </a:r>
+          </a:p>
+          <a:p>
+            <a:r>
+              <a:t>4. Turn on hybrid retrieval. Same cosine score, plus a keyword score weighted by word rarity, combined with a visible alpha. Re-run --top-k 8 at the default alpha: Acadia is gone and the wrong-park chunks are replaced by Glacier documents that name Sperry. The printed table shows both component scores, so you can point at "sperry" doing the work.</a:t>
+            </a:r>
+          </a:p>
+          <a:p>
+            <a:r>
+              <a:t>5. Build the grounded prompt: retrieved chunks + question + "answer only from the context, cite the source, say when you don't know."</a:t>
+            </a:r>
+          </a:p>
+          <a:p>
+            <a:r>
+              <a:t>6. Run it. The payoff: the right answer, with the regulation document cited by name.</a:t>
+            </a:r>
+          </a:p>
+          <a:p>
+            <a:r>
+              <a:t>7. Show the citation check. Parse the ids out of the answer, compare against what was retrieved, print a loud failure on a mismatch. Run the unanswerable question a couple of times until the model appends an invented chunk id to its own refusal, which it does often enough to count on.</a:t>
+            </a:r>
+          </a:p>
+          <a:p>
+            <a:r>
+              <a:t>8. Ask it something the docs don't cover ("Can I bring a drone?" if absent) and get an honest "the provided documents don't say," not a guess.</a:t>
+            </a:r>
+          </a:p>
+          <a:p>
+            <a:r>
+              <a:t>8b. Ask "Is the Avalanche Lake Trail open right now?" and show the date sitting in the prompt. Explain why it is there: without it the same question got refused in 10 runs out of 18, not because retrieval missed but because "effective June 20, 2026, until further notice" is unanswerable without a calendar. Worth 60 seconds; it is the most transferable thing in the feature.</a:t>
+            </a:r>
+          </a:p>
+          <a:p>
+            <a:r>
+              <a:t>9. Swap generation from the local model to gpt-4.1 on Foundry with the one-line Microsoft.Extensions.AI client change, re-run a multi-document question, and compare answer quality side by side.</a:t>
             </a:r>
           </a:p>
         </p:txBody>
@@ -4312,7 +4596,7 @@
           <a:lstStyle/>
           <a:p>
             <a:r>
-              <a:t>05 · Chunking Is a Correctness Decision</a:t>
+              <a:t>05 · RAG: The User Problem</a:t>
             </a:r>
           </a:p>
         </p:txBody>
@@ -4330,7 +4614,7 @@
         <p:spPr>
           <a:xfrm>
             <a:off x="612648" y="1600200"/>
-            <a:ext cx="10966399" cy="4800600"/>
+            <a:ext cx="10966399" cy="4892040"/>
           </a:xfrm>
         </p:spPr>
         <p:txBody>
@@ -4340,28 +4624,28 @@
             <a:pPr/>
             <a:r>
               <a:rPr sz="2000"/>
-              <a:t>One chunk per numbered section put a conditional fire rule and the absolute exception that overrides it in the same 256-word chunk</a:t>
+              <a:t>"Can I have a campfire at Sperry Chalet in September?"</a:t>
             </a:r>
           </a:p>
           <a:p>
             <a:pPr/>
             <a:r>
               <a:rPr sz="2000"/>
-              <a:t>Retrieval ranked that chunk first every time. The model read the conditional, stopped, and said a campfire was fine: 4 runs in 20.</a:t>
+              <a:t>The answer exists, in paragraph four of a 12-page regulations document nobody will read</a:t>
             </a:r>
           </a:p>
           <a:p>
             <a:pPr/>
             <a:r>
               <a:rPr sz="2000"/>
-              <a:t>Split oversized sections at their own subsection boundaries: 0 in 60. Retrieval scores barely moved.</a:t>
+              <a:t>Search returns the document, not the answer. A plain chatbot answers fluently and makes it up.</a:t>
             </a:r>
           </a:p>
           <a:p>
             <a:pPr/>
             <a:r>
               <a:rPr sz="2000"/>
-              <a:t>Every retrieval metric said the system was working</a:t>
+              <a:t>A confidently wrong answer about fire regulations is worse than no answer</a:t>
             </a:r>
           </a:p>
         </p:txBody>
@@ -4405,7 +4689,7 @@
           <a:lstStyle/>
           <a:p>
             <a:r>
-              <a:t>05 · Demo: What to Watch</a:t>
+              <a:t>05 · The Concept</a:t>
             </a:r>
           </a:p>
         </p:txBody>
@@ -4423,7 +4707,7 @@
         <p:spPr>
           <a:xfrm>
             <a:off x="612648" y="1600200"/>
-            <a:ext cx="10966399" cy="4800600"/>
+            <a:ext cx="10966399" cy="4892040"/>
           </a:xfrm>
         </p:spPr>
         <p:txBody>
@@ -4433,56 +4717,21 @@
             <a:pPr/>
             <a:r>
               <a:rPr sz="2000"/>
-              <a:t>No context: a confident wrong answer. Open the regulation and let it sit.</a:t>
+              <a:t>Feature 04's retrieval bolted onto generation: "Answer using only this context. If it doesn't cover the question, say so. Cite the source."</a:t>
             </a:r>
           </a:p>
           <a:p>
             <a:pPr/>
             <a:r>
               <a:rPr sz="2000"/>
-              <a:t>Pure embedding retrieval, top 8: five of eight chunks from the wrong park (Acadia, Yosemite)</a:t>
+              <a:t>Three mechanics: chunking, retrieval (embeddings plus a lexical signal it turns out to need), grounded prompting</a:t>
             </a:r>
           </a:p>
           <a:p>
             <a:pPr/>
             <a:r>
               <a:rPr sz="2000"/>
-              <a:t>Hybrid retrieval: cosine plus a rarity-weighted keyword score. "Sperry" starts to count. Wrong-park chunks gone.</a:t>
-            </a:r>
-          </a:p>
-          <a:p>
-            <a:pPr/>
-            <a:r>
-              <a:rPr sz="2000"/>
-              <a:t>Grounded prompt: the right answer, with the regulation cited</a:t>
-            </a:r>
-          </a:p>
-          <a:p>
-            <a:pPr/>
-            <a:r>
-              <a:rPr sz="2000"/>
-              <a:t>Citation check: a citation is only a string the model typed. Validate ids against what was retrieved; small models invent chunk ids that look right and point nowhere.</a:t>
-            </a:r>
-          </a:p>
-          <a:p>
-            <a:pPr/>
-            <a:r>
-              <a:rPr sz="2000"/>
-              <a:t>Unanswerable question ("drone?") gets "The provided documents don't say."</a:t>
-            </a:r>
-          </a:p>
-          <a:p>
-            <a:pPr/>
-            <a:r>
-              <a:rPr sz="2000"/>
-              <a:t>"Is Avalanche Lake Trail open right now?" works because the date is in the prompt</a:t>
-            </a:r>
-          </a:p>
-          <a:p>
-            <a:pPr/>
-            <a:r>
-              <a:rPr sz="2000"/>
-              <a:t>Swap generation to gpt-4.1 on Foundry with the one-line client change; compare a multi-document answer</a:t>
+              <a:t>A fourth that's easy to leave out: tell the model what "now" is</a:t>
             </a:r>
           </a:p>
         </p:txBody>
@@ -4526,7 +4775,7 @@
           <a:lstStyle/>
           <a:p>
             <a:r>
-              <a:t>05 · Where the Money Goes</a:t>
+              <a:t>05 · Chunking Is a Correctness Decision</a:t>
             </a:r>
           </a:p>
         </p:txBody>
@@ -4544,7 +4793,7 @@
         <p:spPr>
           <a:xfrm>
             <a:off x="612648" y="1600200"/>
-            <a:ext cx="10966399" cy="4800600"/>
+            <a:ext cx="10966399" cy="4892040"/>
           </a:xfrm>
         </p:spPr>
         <p:txBody>
@@ -4554,28 +4803,28 @@
             <a:pPr/>
             <a:r>
               <a:rPr sz="2000"/>
-              <a:t>Swapping the 3B local model for a 32B one closes every remaining defect</a:t>
+              <a:t>One chunk per numbered section put a conditional fire rule and the absolute exception that overrides it in the same 256-word chunk</a:t>
             </a:r>
           </a:p>
           <a:p>
             <a:pPr/>
             <a:r>
               <a:rPr sz="2000"/>
-              <a:t>Cost: about 20x the latency per answer, 0.9 s to 16.6 s</a:t>
+              <a:t>Retrieval ranked that chunk first every time. The model read the conditional, stopped, and said a campfire was fine: 4 runs in 20.</a:t>
             </a:r>
           </a:p>
           <a:p>
             <a:pPr/>
             <a:r>
               <a:rPr sz="2000"/>
-              <a:t>Swapping the model before fixing the chunk boundary buys a smarter model reading the wrong context</a:t>
+              <a:t>Split oversized sections at their own subsection boundaries: 0 in 60. Retrieval scores barely moved.</a:t>
             </a:r>
           </a:p>
           <a:p>
             <a:pPr/>
             <a:r>
               <a:rPr sz="2000"/>
-              <a:t>Chunking is upstream of model choice</a:t>
+              <a:t>Every retrieval metric said the system was working</a:t>
             </a:r>
           </a:p>
         </p:txBody>
@@ -4619,7 +4868,7 @@
           <a:lstStyle/>
           <a:p>
             <a:r>
-              <a:t>05 · Leadership Card</a:t>
+              <a:t>05 · How It Works</a:t>
             </a:r>
           </a:p>
         </p:txBody>
@@ -4636,8 +4885,8 @@
         </p:nvSpPr>
         <p:spPr>
           <a:xfrm>
-            <a:off x="612648" y="1600200"/>
-            <a:ext cx="10966399" cy="4800600"/>
+            <a:off x="612648" y="5385816"/>
+            <a:ext cx="10966399" cy="1106424"/>
           </a:xfrm>
         </p:spPr>
         <p:txBody>
@@ -4646,29 +4895,952 @@
           <a:p>
             <a:pPr/>
             <a:r>
-              <a:rPr sz="2000"/>
-              <a:t>When: internal knowledge bases, support and policy docs, product documentation. Anywhere the org already wrote the answer down and people still ask humans.</a:t>
+              <a:rPr sz="1400"/>
+              <a:t>Retrieval is feature 04. Generation is feature 01 with the reading material supplied.</a:t>
             </a:r>
           </a:p>
           <a:p>
             <a:pPr/>
             <a:r>
-              <a:rPr sz="2000"/>
-              <a:t>Cost: weeks to production quality. The demo takes a day; the work is chunking, retrieval evaluation, keeping documents current.</a:t>
+              <a:rPr sz="1400"/>
+              <a:t>The model reads instead of remembers, which is why the answer can be current and can be cited</a:t>
             </a:r>
           </a:p>
           <a:p>
             <a:pPr/>
             <a:r>
-              <a:rPr sz="2000"/>
-              <a:t>The uncomfortable one: the worst bug was a text-splitting rule, not a model or a prompt. Ask what your evaluation would have caught.</a:t>
-            </a:r>
-          </a:p>
-          <a:p>
-            <a:pPr/>
-            <a:r>
-              <a:rPr sz="2000"/>
-              <a:t>"Our documents already answer these questions. This makes them answer directly, with receipts."</a:t>
+              <a:rPr sz="1400"/>
+              <a:t>Two places to be wrong: retrieval brings the wrong chunk, or the chunk splits a rule from its exception</a:t>
+            </a:r>
+          </a:p>
+        </p:txBody>
+      </p:sp>
+      <p:sp>
+        <p:nvSpPr>
+          <p:cNvPr id="4" name="TextBox 3"/>
+          <p:cNvSpPr txBox="1"/>
+          <p:nvPr/>
+        </p:nvSpPr>
+        <p:spPr>
+          <a:xfrm>
+            <a:off x="612648" y="1554480"/>
+            <a:ext cx="1371600" cy="822960"/>
+          </a:xfrm>
+          <a:prstGeom prst="rect">
+            <a:avLst/>
+          </a:prstGeom>
+          <a:noFill/>
+        </p:spPr>
+        <p:txBody>
+          <a:bodyPr wrap="square" anchor="ctr">
+            <a:spAutoFit/>
+          </a:bodyPr>
+          <a:lstStyle/>
+          <a:p>
+            <a:r>
+              <a:rPr sz="1400" i="1"/>
+              <a:t>Index, once</a:t>
+            </a:r>
+          </a:p>
+        </p:txBody>
+      </p:sp>
+      <p:sp>
+        <p:nvSpPr>
+          <p:cNvPr id="5" name="Rounded Rectangle 4"/>
+          <p:cNvSpPr/>
+          <p:nvPr/>
+        </p:nvSpPr>
+        <p:spPr>
+          <a:xfrm>
+            <a:off x="2075688" y="1554480"/>
+            <a:ext cx="2067229" cy="822960"/>
+          </a:xfrm>
+          <a:prstGeom prst="roundRect">
+            <a:avLst/>
+          </a:prstGeom>
+          <a:noFill/>
+          <a:ln w="19050">
+            <a:solidFill>
+              <a:srgbClr val="000000"/>
+            </a:solidFill>
+          </a:ln>
+          <a:effectLst/>
+        </p:spPr>
+        <p:style>
+          <a:lnRef idx="1">
+            <a:schemeClr val="accent1"/>
+          </a:lnRef>
+          <a:fillRef idx="3">
+            <a:schemeClr val="accent1"/>
+          </a:fillRef>
+          <a:effectRef idx="2">
+            <a:schemeClr val="accent1"/>
+          </a:effectRef>
+          <a:fontRef idx="minor">
+            <a:schemeClr val="lt1"/>
+          </a:fontRef>
+        </p:style>
+        <p:txBody>
+          <a:bodyPr rtlCol="0" anchor="ctr" wrap="square" lIns="73152" rIns="73152"/>
+          <a:lstStyle/>
+          <a:p>
+            <a:pPr algn="ctr"/>
+            <a:r>
+              <a:rPr sz="1500">
+                <a:solidFill>
+                  <a:srgbClr val="000000"/>
+                </a:solidFill>
+              </a:rPr>
+              <a:t>Park docs</a:t>
+            </a:r>
+          </a:p>
+        </p:txBody>
+      </p:sp>
+      <p:sp>
+        <p:nvSpPr>
+          <p:cNvPr id="6" name="Right Arrow 5"/>
+          <p:cNvSpPr/>
+          <p:nvPr/>
+        </p:nvSpPr>
+        <p:spPr>
+          <a:xfrm>
+            <a:off x="4197781" y="1819656"/>
+            <a:ext cx="301752" cy="292608"/>
+          </a:xfrm>
+          <a:prstGeom prst="rightArrow">
+            <a:avLst/>
+          </a:prstGeom>
+          <a:solidFill>
+            <a:srgbClr val="000000"/>
+          </a:solidFill>
+          <a:ln>
+            <a:noFill/>
+          </a:ln>
+          <a:effectLst/>
+        </p:spPr>
+        <p:style>
+          <a:lnRef idx="1">
+            <a:schemeClr val="accent1"/>
+          </a:lnRef>
+          <a:fillRef idx="3">
+            <a:schemeClr val="accent1"/>
+          </a:fillRef>
+          <a:effectRef idx="2">
+            <a:schemeClr val="accent1"/>
+          </a:effectRef>
+          <a:fontRef idx="minor">
+            <a:schemeClr val="lt1"/>
+          </a:fontRef>
+        </p:style>
+        <p:txBody>
+          <a:bodyPr rtlCol="0" anchor="ctr"/>
+          <a:lstStyle/>
+          <a:p>
+            <a:pPr algn="ctr"/>
+          </a:p>
+        </p:txBody>
+      </p:sp>
+      <p:sp>
+        <p:nvSpPr>
+          <p:cNvPr id="7" name="Rounded Rectangle 6"/>
+          <p:cNvSpPr/>
+          <p:nvPr/>
+        </p:nvSpPr>
+        <p:spPr>
+          <a:xfrm>
+            <a:off x="4554397" y="1554480"/>
+            <a:ext cx="2067229" cy="822960"/>
+          </a:xfrm>
+          <a:prstGeom prst="roundRect">
+            <a:avLst/>
+          </a:prstGeom>
+          <a:noFill/>
+          <a:ln w="19050">
+            <a:solidFill>
+              <a:srgbClr val="000000"/>
+            </a:solidFill>
+          </a:ln>
+          <a:effectLst/>
+        </p:spPr>
+        <p:style>
+          <a:lnRef idx="1">
+            <a:schemeClr val="accent1"/>
+          </a:lnRef>
+          <a:fillRef idx="3">
+            <a:schemeClr val="accent1"/>
+          </a:fillRef>
+          <a:effectRef idx="2">
+            <a:schemeClr val="accent1"/>
+          </a:effectRef>
+          <a:fontRef idx="minor">
+            <a:schemeClr val="lt1"/>
+          </a:fontRef>
+        </p:style>
+        <p:txBody>
+          <a:bodyPr rtlCol="0" anchor="ctr" wrap="square" lIns="73152" rIns="73152"/>
+          <a:lstStyle/>
+          <a:p>
+            <a:pPr algn="ctr"/>
+            <a:r>
+              <a:rPr sz="1500">
+                <a:solidFill>
+                  <a:srgbClr val="000000"/>
+                </a:solidFill>
+              </a:rPr>
+              <a:t>Split into chunks</a:t>
+            </a:r>
+          </a:p>
+        </p:txBody>
+      </p:sp>
+      <p:sp>
+        <p:nvSpPr>
+          <p:cNvPr id="8" name="Right Arrow 7"/>
+          <p:cNvSpPr/>
+          <p:nvPr/>
+        </p:nvSpPr>
+        <p:spPr>
+          <a:xfrm>
+            <a:off x="6676491" y="1819656"/>
+            <a:ext cx="301752" cy="292608"/>
+          </a:xfrm>
+          <a:prstGeom prst="rightArrow">
+            <a:avLst/>
+          </a:prstGeom>
+          <a:solidFill>
+            <a:srgbClr val="000000"/>
+          </a:solidFill>
+          <a:ln>
+            <a:noFill/>
+          </a:ln>
+          <a:effectLst/>
+        </p:spPr>
+        <p:style>
+          <a:lnRef idx="1">
+            <a:schemeClr val="accent1"/>
+          </a:lnRef>
+          <a:fillRef idx="3">
+            <a:schemeClr val="accent1"/>
+          </a:fillRef>
+          <a:effectRef idx="2">
+            <a:schemeClr val="accent1"/>
+          </a:effectRef>
+          <a:fontRef idx="minor">
+            <a:schemeClr val="lt1"/>
+          </a:fontRef>
+        </p:style>
+        <p:txBody>
+          <a:bodyPr rtlCol="0" anchor="ctr"/>
+          <a:lstStyle/>
+          <a:p>
+            <a:pPr algn="ctr"/>
+          </a:p>
+        </p:txBody>
+      </p:sp>
+      <p:sp>
+        <p:nvSpPr>
+          <p:cNvPr id="9" name="Rounded Rectangle 8"/>
+          <p:cNvSpPr/>
+          <p:nvPr/>
+        </p:nvSpPr>
+        <p:spPr>
+          <a:xfrm>
+            <a:off x="7033107" y="1554480"/>
+            <a:ext cx="2067229" cy="822960"/>
+          </a:xfrm>
+          <a:prstGeom prst="roundRect">
+            <a:avLst/>
+          </a:prstGeom>
+          <a:noFill/>
+          <a:ln w="19050">
+            <a:solidFill>
+              <a:srgbClr val="000000"/>
+            </a:solidFill>
+          </a:ln>
+          <a:effectLst/>
+        </p:spPr>
+        <p:style>
+          <a:lnRef idx="1">
+            <a:schemeClr val="accent1"/>
+          </a:lnRef>
+          <a:fillRef idx="3">
+            <a:schemeClr val="accent1"/>
+          </a:fillRef>
+          <a:effectRef idx="2">
+            <a:schemeClr val="accent1"/>
+          </a:effectRef>
+          <a:fontRef idx="minor">
+            <a:schemeClr val="lt1"/>
+          </a:fontRef>
+        </p:style>
+        <p:txBody>
+          <a:bodyPr rtlCol="0" anchor="ctr" wrap="square" lIns="73152" rIns="73152"/>
+          <a:lstStyle/>
+          <a:p>
+            <a:pPr algn="ctr"/>
+            <a:r>
+              <a:rPr sz="1500">
+                <a:solidFill>
+                  <a:srgbClr val="000000"/>
+                </a:solidFill>
+              </a:rPr>
+              <a:t>Embed each chunk</a:t>
+            </a:r>
+          </a:p>
+        </p:txBody>
+      </p:sp>
+      <p:sp>
+        <p:nvSpPr>
+          <p:cNvPr id="10" name="Right Arrow 9"/>
+          <p:cNvSpPr/>
+          <p:nvPr/>
+        </p:nvSpPr>
+        <p:spPr>
+          <a:xfrm>
+            <a:off x="9155201" y="1819656"/>
+            <a:ext cx="301752" cy="292608"/>
+          </a:xfrm>
+          <a:prstGeom prst="rightArrow">
+            <a:avLst/>
+          </a:prstGeom>
+          <a:solidFill>
+            <a:srgbClr val="000000"/>
+          </a:solidFill>
+          <a:ln>
+            <a:noFill/>
+          </a:ln>
+          <a:effectLst/>
+        </p:spPr>
+        <p:style>
+          <a:lnRef idx="1">
+            <a:schemeClr val="accent1"/>
+          </a:lnRef>
+          <a:fillRef idx="3">
+            <a:schemeClr val="accent1"/>
+          </a:fillRef>
+          <a:effectRef idx="2">
+            <a:schemeClr val="accent1"/>
+          </a:effectRef>
+          <a:fontRef idx="minor">
+            <a:schemeClr val="lt1"/>
+          </a:fontRef>
+        </p:style>
+        <p:txBody>
+          <a:bodyPr rtlCol="0" anchor="ctr"/>
+          <a:lstStyle/>
+          <a:p>
+            <a:pPr algn="ctr"/>
+          </a:p>
+        </p:txBody>
+      </p:sp>
+      <p:sp>
+        <p:nvSpPr>
+          <p:cNvPr id="11" name="Rounded Rectangle 10"/>
+          <p:cNvSpPr/>
+          <p:nvPr/>
+        </p:nvSpPr>
+        <p:spPr>
+          <a:xfrm>
+            <a:off x="9511817" y="1554480"/>
+            <a:ext cx="2067229" cy="822960"/>
+          </a:xfrm>
+          <a:prstGeom prst="roundRect">
+            <a:avLst/>
+          </a:prstGeom>
+          <a:noFill/>
+          <a:ln w="19050">
+            <a:solidFill>
+              <a:srgbClr val="000000"/>
+            </a:solidFill>
+          </a:ln>
+          <a:effectLst/>
+        </p:spPr>
+        <p:style>
+          <a:lnRef idx="1">
+            <a:schemeClr val="accent1"/>
+          </a:lnRef>
+          <a:fillRef idx="3">
+            <a:schemeClr val="accent1"/>
+          </a:fillRef>
+          <a:effectRef idx="2">
+            <a:schemeClr val="accent1"/>
+          </a:effectRef>
+          <a:fontRef idx="minor">
+            <a:schemeClr val="lt1"/>
+          </a:fontRef>
+        </p:style>
+        <p:txBody>
+          <a:bodyPr rtlCol="0" anchor="ctr" wrap="square" lIns="73152" rIns="73152"/>
+          <a:lstStyle/>
+          <a:p>
+            <a:pPr algn="ctr"/>
+            <a:r>
+              <a:rPr sz="1500">
+                <a:solidFill>
+                  <a:srgbClr val="000000"/>
+                </a:solidFill>
+              </a:rPr>
+              <a:t>Store vector + text + source id</a:t>
+            </a:r>
+          </a:p>
+        </p:txBody>
+      </p:sp>
+      <p:sp>
+        <p:nvSpPr>
+          <p:cNvPr id="12" name="TextBox 11"/>
+          <p:cNvSpPr txBox="1"/>
+          <p:nvPr/>
+        </p:nvSpPr>
+        <p:spPr>
+          <a:xfrm>
+            <a:off x="612648" y="2651760"/>
+            <a:ext cx="1371600" cy="2459736"/>
+          </a:xfrm>
+          <a:prstGeom prst="rect">
+            <a:avLst/>
+          </a:prstGeom>
+          <a:noFill/>
+        </p:spPr>
+        <p:txBody>
+          <a:bodyPr wrap="square" anchor="ctr">
+            <a:spAutoFit/>
+          </a:bodyPr>
+          <a:lstStyle/>
+          <a:p>
+            <a:r>
+              <a:rPr sz="1400" i="1"/>
+              <a:t>Answer, each question</a:t>
+            </a:r>
+          </a:p>
+        </p:txBody>
+      </p:sp>
+      <p:sp>
+        <p:nvSpPr>
+          <p:cNvPr id="13" name="Rounded Rectangle 12"/>
+          <p:cNvSpPr/>
+          <p:nvPr/>
+        </p:nvSpPr>
+        <p:spPr>
+          <a:xfrm>
+            <a:off x="2075688" y="2651760"/>
+            <a:ext cx="1240993" cy="2459736"/>
+          </a:xfrm>
+          <a:prstGeom prst="roundRect">
+            <a:avLst/>
+          </a:prstGeom>
+          <a:noFill/>
+          <a:ln w="19050">
+            <a:solidFill>
+              <a:srgbClr val="000000"/>
+            </a:solidFill>
+          </a:ln>
+          <a:effectLst/>
+        </p:spPr>
+        <p:style>
+          <a:lnRef idx="1">
+            <a:schemeClr val="accent1"/>
+          </a:lnRef>
+          <a:fillRef idx="3">
+            <a:schemeClr val="accent1"/>
+          </a:fillRef>
+          <a:effectRef idx="2">
+            <a:schemeClr val="accent1"/>
+          </a:effectRef>
+          <a:fontRef idx="minor">
+            <a:schemeClr val="lt1"/>
+          </a:fontRef>
+        </p:style>
+        <p:txBody>
+          <a:bodyPr rtlCol="0" anchor="ctr" wrap="square" lIns="73152" rIns="73152"/>
+          <a:lstStyle/>
+          <a:p>
+            <a:pPr algn="ctr"/>
+            <a:r>
+              <a:rPr sz="1300">
+                <a:solidFill>
+                  <a:srgbClr val="000000"/>
+                </a:solidFill>
+              </a:rPr>
+              <a:t>Question</a:t>
+            </a:r>
+          </a:p>
+        </p:txBody>
+      </p:sp>
+      <p:sp>
+        <p:nvSpPr>
+          <p:cNvPr id="14" name="Right Arrow 13"/>
+          <p:cNvSpPr/>
+          <p:nvPr/>
+        </p:nvSpPr>
+        <p:spPr>
+          <a:xfrm>
+            <a:off x="3371545" y="3735324"/>
+            <a:ext cx="301752" cy="292608"/>
+          </a:xfrm>
+          <a:prstGeom prst="rightArrow">
+            <a:avLst/>
+          </a:prstGeom>
+          <a:solidFill>
+            <a:srgbClr val="000000"/>
+          </a:solidFill>
+          <a:ln>
+            <a:noFill/>
+          </a:ln>
+          <a:effectLst/>
+        </p:spPr>
+        <p:style>
+          <a:lnRef idx="1">
+            <a:schemeClr val="accent1"/>
+          </a:lnRef>
+          <a:fillRef idx="3">
+            <a:schemeClr val="accent1"/>
+          </a:fillRef>
+          <a:effectRef idx="2">
+            <a:schemeClr val="accent1"/>
+          </a:effectRef>
+          <a:fontRef idx="minor">
+            <a:schemeClr val="lt1"/>
+          </a:fontRef>
+        </p:style>
+        <p:txBody>
+          <a:bodyPr rtlCol="0" anchor="ctr"/>
+          <a:lstStyle/>
+          <a:p>
+            <a:pPr algn="ctr"/>
+          </a:p>
+        </p:txBody>
+      </p:sp>
+      <p:sp>
+        <p:nvSpPr>
+          <p:cNvPr id="15" name="Rounded Rectangle 14"/>
+          <p:cNvSpPr/>
+          <p:nvPr/>
+        </p:nvSpPr>
+        <p:spPr>
+          <a:xfrm>
+            <a:off x="3728161" y="2651760"/>
+            <a:ext cx="1240993" cy="2459736"/>
+          </a:xfrm>
+          <a:prstGeom prst="roundRect">
+            <a:avLst/>
+          </a:prstGeom>
+          <a:noFill/>
+          <a:ln w="19050">
+            <a:solidFill>
+              <a:srgbClr val="000000"/>
+            </a:solidFill>
+          </a:ln>
+          <a:effectLst/>
+        </p:spPr>
+        <p:style>
+          <a:lnRef idx="1">
+            <a:schemeClr val="accent1"/>
+          </a:lnRef>
+          <a:fillRef idx="3">
+            <a:schemeClr val="accent1"/>
+          </a:fillRef>
+          <a:effectRef idx="2">
+            <a:schemeClr val="accent1"/>
+          </a:effectRef>
+          <a:fontRef idx="minor">
+            <a:schemeClr val="lt1"/>
+          </a:fontRef>
+        </p:style>
+        <p:txBody>
+          <a:bodyPr rtlCol="0" anchor="ctr" wrap="square" lIns="73152" rIns="73152"/>
+          <a:lstStyle/>
+          <a:p>
+            <a:pPr algn="ctr"/>
+            <a:r>
+              <a:rPr sz="1300">
+                <a:solidFill>
+                  <a:srgbClr val="000000"/>
+                </a:solidFill>
+              </a:rPr>
+              <a:t>Embed</a:t>
+            </a:r>
+          </a:p>
+        </p:txBody>
+      </p:sp>
+      <p:sp>
+        <p:nvSpPr>
+          <p:cNvPr id="16" name="Right Arrow 15"/>
+          <p:cNvSpPr/>
+          <p:nvPr/>
+        </p:nvSpPr>
+        <p:spPr>
+          <a:xfrm>
+            <a:off x="5024018" y="3735324"/>
+            <a:ext cx="301752" cy="292608"/>
+          </a:xfrm>
+          <a:prstGeom prst="rightArrow">
+            <a:avLst/>
+          </a:prstGeom>
+          <a:solidFill>
+            <a:srgbClr val="000000"/>
+          </a:solidFill>
+          <a:ln>
+            <a:noFill/>
+          </a:ln>
+          <a:effectLst/>
+        </p:spPr>
+        <p:style>
+          <a:lnRef idx="1">
+            <a:schemeClr val="accent1"/>
+          </a:lnRef>
+          <a:fillRef idx="3">
+            <a:schemeClr val="accent1"/>
+          </a:fillRef>
+          <a:effectRef idx="2">
+            <a:schemeClr val="accent1"/>
+          </a:effectRef>
+          <a:fontRef idx="minor">
+            <a:schemeClr val="lt1"/>
+          </a:fontRef>
+        </p:style>
+        <p:txBody>
+          <a:bodyPr rtlCol="0" anchor="ctr"/>
+          <a:lstStyle/>
+          <a:p>
+            <a:pPr algn="ctr"/>
+          </a:p>
+        </p:txBody>
+      </p:sp>
+      <p:sp>
+        <p:nvSpPr>
+          <p:cNvPr id="17" name="Rounded Rectangle 16"/>
+          <p:cNvSpPr/>
+          <p:nvPr/>
+        </p:nvSpPr>
+        <p:spPr>
+          <a:xfrm>
+            <a:off x="5380634" y="2651760"/>
+            <a:ext cx="1240993" cy="2459736"/>
+          </a:xfrm>
+          <a:prstGeom prst="roundRect">
+            <a:avLst/>
+          </a:prstGeom>
+          <a:noFill/>
+          <a:ln w="19050">
+            <a:solidFill>
+              <a:srgbClr val="000000"/>
+            </a:solidFill>
+          </a:ln>
+          <a:effectLst/>
+        </p:spPr>
+        <p:style>
+          <a:lnRef idx="1">
+            <a:schemeClr val="accent1"/>
+          </a:lnRef>
+          <a:fillRef idx="3">
+            <a:schemeClr val="accent1"/>
+          </a:fillRef>
+          <a:effectRef idx="2">
+            <a:schemeClr val="accent1"/>
+          </a:effectRef>
+          <a:fontRef idx="minor">
+            <a:schemeClr val="lt1"/>
+          </a:fontRef>
+        </p:style>
+        <p:txBody>
+          <a:bodyPr rtlCol="0" anchor="ctr" wrap="square" lIns="73152" rIns="73152"/>
+          <a:lstStyle/>
+          <a:p>
+            <a:pPr algn="ctr"/>
+            <a:r>
+              <a:rPr sz="1300">
+                <a:solidFill>
+                  <a:srgbClr val="000000"/>
+                </a:solidFill>
+              </a:rPr>
+              <a:t>Retrieve top chunks (vector + keyword)</a:t>
+            </a:r>
+          </a:p>
+        </p:txBody>
+      </p:sp>
+      <p:sp>
+        <p:nvSpPr>
+          <p:cNvPr id="18" name="Right Arrow 17"/>
+          <p:cNvSpPr/>
+          <p:nvPr/>
+        </p:nvSpPr>
+        <p:spPr>
+          <a:xfrm>
+            <a:off x="6676491" y="3735324"/>
+            <a:ext cx="301752" cy="292608"/>
+          </a:xfrm>
+          <a:prstGeom prst="rightArrow">
+            <a:avLst/>
+          </a:prstGeom>
+          <a:solidFill>
+            <a:srgbClr val="000000"/>
+          </a:solidFill>
+          <a:ln>
+            <a:noFill/>
+          </a:ln>
+          <a:effectLst/>
+        </p:spPr>
+        <p:style>
+          <a:lnRef idx="1">
+            <a:schemeClr val="accent1"/>
+          </a:lnRef>
+          <a:fillRef idx="3">
+            <a:schemeClr val="accent1"/>
+          </a:fillRef>
+          <a:effectRef idx="2">
+            <a:schemeClr val="accent1"/>
+          </a:effectRef>
+          <a:fontRef idx="minor">
+            <a:schemeClr val="lt1"/>
+          </a:fontRef>
+        </p:style>
+        <p:txBody>
+          <a:bodyPr rtlCol="0" anchor="ctr"/>
+          <a:lstStyle/>
+          <a:p>
+            <a:pPr algn="ctr"/>
+          </a:p>
+        </p:txBody>
+      </p:sp>
+      <p:sp>
+        <p:nvSpPr>
+          <p:cNvPr id="19" name="Rounded Rectangle 18"/>
+          <p:cNvSpPr/>
+          <p:nvPr/>
+        </p:nvSpPr>
+        <p:spPr>
+          <a:xfrm>
+            <a:off x="7033107" y="2651760"/>
+            <a:ext cx="1240993" cy="2459736"/>
+          </a:xfrm>
+          <a:prstGeom prst="roundRect">
+            <a:avLst/>
+          </a:prstGeom>
+          <a:noFill/>
+          <a:ln w="19050">
+            <a:solidFill>
+              <a:srgbClr val="000000"/>
+            </a:solidFill>
+          </a:ln>
+          <a:effectLst/>
+        </p:spPr>
+        <p:style>
+          <a:lnRef idx="1">
+            <a:schemeClr val="accent1"/>
+          </a:lnRef>
+          <a:fillRef idx="3">
+            <a:schemeClr val="accent1"/>
+          </a:fillRef>
+          <a:effectRef idx="2">
+            <a:schemeClr val="accent1"/>
+          </a:effectRef>
+          <a:fontRef idx="minor">
+            <a:schemeClr val="lt1"/>
+          </a:fontRef>
+        </p:style>
+        <p:txBody>
+          <a:bodyPr rtlCol="0" anchor="ctr" wrap="square" lIns="73152" rIns="73152"/>
+          <a:lstStyle/>
+          <a:p>
+            <a:pPr algn="ctr"/>
+            <a:r>
+              <a:rPr sz="1300">
+                <a:solidFill>
+                  <a:srgbClr val="000000"/>
+                </a:solidFill>
+              </a:rPr>
+              <a:t>Prompt: chunks + question + "answer only from these, cite, or say you don't know"</a:t>
+            </a:r>
+          </a:p>
+        </p:txBody>
+      </p:sp>
+      <p:sp>
+        <p:nvSpPr>
+          <p:cNvPr id="20" name="Right Arrow 19"/>
+          <p:cNvSpPr/>
+          <p:nvPr/>
+        </p:nvSpPr>
+        <p:spPr>
+          <a:xfrm>
+            <a:off x="8328964" y="3735324"/>
+            <a:ext cx="301752" cy="292608"/>
+          </a:xfrm>
+          <a:prstGeom prst="rightArrow">
+            <a:avLst/>
+          </a:prstGeom>
+          <a:solidFill>
+            <a:srgbClr val="000000"/>
+          </a:solidFill>
+          <a:ln>
+            <a:noFill/>
+          </a:ln>
+          <a:effectLst/>
+        </p:spPr>
+        <p:style>
+          <a:lnRef idx="1">
+            <a:schemeClr val="accent1"/>
+          </a:lnRef>
+          <a:fillRef idx="3">
+            <a:schemeClr val="accent1"/>
+          </a:fillRef>
+          <a:effectRef idx="2">
+            <a:schemeClr val="accent1"/>
+          </a:effectRef>
+          <a:fontRef idx="minor">
+            <a:schemeClr val="lt1"/>
+          </a:fontRef>
+        </p:style>
+        <p:txBody>
+          <a:bodyPr rtlCol="0" anchor="ctr"/>
+          <a:lstStyle/>
+          <a:p>
+            <a:pPr algn="ctr"/>
+          </a:p>
+        </p:txBody>
+      </p:sp>
+      <p:sp>
+        <p:nvSpPr>
+          <p:cNvPr id="21" name="Rounded Rectangle 20"/>
+          <p:cNvSpPr/>
+          <p:nvPr/>
+        </p:nvSpPr>
+        <p:spPr>
+          <a:xfrm>
+            <a:off x="8685580" y="2651760"/>
+            <a:ext cx="1240993" cy="2459736"/>
+          </a:xfrm>
+          <a:prstGeom prst="roundRect">
+            <a:avLst/>
+          </a:prstGeom>
+          <a:noFill/>
+          <a:ln w="19050">
+            <a:solidFill>
+              <a:srgbClr val="000000"/>
+            </a:solidFill>
+          </a:ln>
+          <a:effectLst/>
+        </p:spPr>
+        <p:style>
+          <a:lnRef idx="1">
+            <a:schemeClr val="accent1"/>
+          </a:lnRef>
+          <a:fillRef idx="3">
+            <a:schemeClr val="accent1"/>
+          </a:fillRef>
+          <a:effectRef idx="2">
+            <a:schemeClr val="accent1"/>
+          </a:effectRef>
+          <a:fontRef idx="minor">
+            <a:schemeClr val="lt1"/>
+          </a:fontRef>
+        </p:style>
+        <p:txBody>
+          <a:bodyPr rtlCol="0" anchor="ctr" wrap="square" lIns="73152" rIns="73152"/>
+          <a:lstStyle/>
+          <a:p>
+            <a:pPr algn="ctr"/>
+            <a:r>
+              <a:rPr sz="1300">
+                <a:solidFill>
+                  <a:srgbClr val="000000"/>
+                </a:solidFill>
+              </a:rPr>
+              <a:t>gpt-4.1</a:t>
+            </a:r>
+          </a:p>
+        </p:txBody>
+      </p:sp>
+      <p:sp>
+        <p:nvSpPr>
+          <p:cNvPr id="22" name="Right Arrow 21"/>
+          <p:cNvSpPr/>
+          <p:nvPr/>
+        </p:nvSpPr>
+        <p:spPr>
+          <a:xfrm>
+            <a:off x="9981437" y="3735324"/>
+            <a:ext cx="301752" cy="292608"/>
+          </a:xfrm>
+          <a:prstGeom prst="rightArrow">
+            <a:avLst/>
+          </a:prstGeom>
+          <a:solidFill>
+            <a:srgbClr val="000000"/>
+          </a:solidFill>
+          <a:ln>
+            <a:noFill/>
+          </a:ln>
+          <a:effectLst/>
+        </p:spPr>
+        <p:style>
+          <a:lnRef idx="1">
+            <a:schemeClr val="accent1"/>
+          </a:lnRef>
+          <a:fillRef idx="3">
+            <a:schemeClr val="accent1"/>
+          </a:fillRef>
+          <a:effectRef idx="2">
+            <a:schemeClr val="accent1"/>
+          </a:effectRef>
+          <a:fontRef idx="minor">
+            <a:schemeClr val="lt1"/>
+          </a:fontRef>
+        </p:style>
+        <p:txBody>
+          <a:bodyPr rtlCol="0" anchor="ctr"/>
+          <a:lstStyle/>
+          <a:p>
+            <a:pPr algn="ctr"/>
+          </a:p>
+        </p:txBody>
+      </p:sp>
+      <p:sp>
+        <p:nvSpPr>
+          <p:cNvPr id="23" name="Rounded Rectangle 22"/>
+          <p:cNvSpPr/>
+          <p:nvPr/>
+        </p:nvSpPr>
+        <p:spPr>
+          <a:xfrm>
+            <a:off x="10338053" y="2651760"/>
+            <a:ext cx="1240993" cy="2459736"/>
+          </a:xfrm>
+          <a:prstGeom prst="roundRect">
+            <a:avLst/>
+          </a:prstGeom>
+          <a:noFill/>
+          <a:ln w="19050">
+            <a:solidFill>
+              <a:srgbClr val="000000"/>
+            </a:solidFill>
+          </a:ln>
+          <a:effectLst/>
+        </p:spPr>
+        <p:style>
+          <a:lnRef idx="1">
+            <a:schemeClr val="accent1"/>
+          </a:lnRef>
+          <a:fillRef idx="3">
+            <a:schemeClr val="accent1"/>
+          </a:fillRef>
+          <a:effectRef idx="2">
+            <a:schemeClr val="accent1"/>
+          </a:effectRef>
+          <a:fontRef idx="minor">
+            <a:schemeClr val="lt1"/>
+          </a:fontRef>
+        </p:style>
+        <p:txBody>
+          <a:bodyPr rtlCol="0" anchor="ctr" wrap="square" lIns="73152" rIns="73152"/>
+          <a:lstStyle/>
+          <a:p>
+            <a:pPr algn="ctr"/>
+            <a:r>
+              <a:rPr sz="1300">
+                <a:solidFill>
+                  <a:srgbClr val="000000"/>
+                </a:solidFill>
+              </a:rPr>
+              <a:t>Answer with citations your code checks</a:t>
             </a:r>
           </a:p>
         </p:txBody>
@@ -4712,7 +5884,7 @@
           <a:lstStyle/>
           <a:p>
             <a:r>
-              <a:t>06 · Recommendations: The User Problem</a:t>
+              <a:t>05 · Demo: What to Watch</a:t>
             </a:r>
           </a:p>
         </p:txBody>
@@ -4730,7 +5902,7 @@
         <p:spPr>
           <a:xfrm>
             <a:off x="612648" y="1600200"/>
-            <a:ext cx="10966399" cy="4800600"/>
+            <a:ext cx="10966399" cy="4892040"/>
           </a:xfrm>
         </p:spPr>
         <p:txBody>
@@ -4740,21 +5912,56 @@
             <a:pPr/>
             <a:r>
               <a:rPr sz="2000"/>
-              <a:t>A hiker just finished Avalanche Lake Trail and loved it. The app says nothing.</a:t>
+              <a:t>No context: a confident wrong answer. Open the regulation and let it sit.</a:t>
             </a:r>
           </a:p>
           <a:p>
             <a:pPr/>
             <a:r>
               <a:rPr sz="2000"/>
-              <a:t>"You'd probably like these three" never got built, because everyone assumes it needs a data-science team and six months</a:t>
+              <a:t>Pure embedding retrieval, top 8: five of eight chunks from the wrong park (Acadia, Yosemite)</a:t>
             </a:r>
           </a:p>
           <a:p>
             <a:pPr/>
             <a:r>
               <a:rPr sz="2000"/>
-              <a:t>Same gap in the gear store: buy the Cascade 65, get a random carousel</a:t>
+              <a:t>Hybrid retrieval: cosine plus a rarity-weighted keyword score. "Sperry" starts to count. Wrong-park chunks gone.</a:t>
+            </a:r>
+          </a:p>
+          <a:p>
+            <a:pPr/>
+            <a:r>
+              <a:rPr sz="2000"/>
+              <a:t>Grounded prompt: the right answer, with the regulation cited</a:t>
+            </a:r>
+          </a:p>
+          <a:p>
+            <a:pPr/>
+            <a:r>
+              <a:rPr sz="2000"/>
+              <a:t>Citation check: a citation is only a string the model typed. Validate ids against what was retrieved; small models invent chunk ids that look right and point nowhere.</a:t>
+            </a:r>
+          </a:p>
+          <a:p>
+            <a:pPr/>
+            <a:r>
+              <a:rPr sz="2000"/>
+              <a:t>Unanswerable question ("drone?") gets "The provided documents don't say."</a:t>
+            </a:r>
+          </a:p>
+          <a:p>
+            <a:pPr/>
+            <a:r>
+              <a:rPr sz="2000"/>
+              <a:t>"Is Avalanche Lake Trail open right now?" works because the date is in the prompt</a:t>
+            </a:r>
+          </a:p>
+          <a:p>
+            <a:pPr/>
+            <a:r>
+              <a:rPr sz="2000"/>
+              <a:t>Swap generation to gpt-4.1 on Foundry with the one-line client change; compare a multi-document answer</a:t>
             </a:r>
           </a:p>
         </p:txBody>
@@ -4798,7 +6005,7 @@
           <a:lstStyle/>
           <a:p>
             <a:r>
-              <a:t>06 · The Concept</a:t>
+              <a:t>05 · Where the Money Goes</a:t>
             </a:r>
           </a:p>
         </p:txBody>
@@ -4816,7 +6023,7 @@
         <p:spPr>
           <a:xfrm>
             <a:off x="612648" y="1600200"/>
-            <a:ext cx="10966399" cy="4800600"/>
+            <a:ext cx="10966399" cy="4892040"/>
           </a:xfrm>
         </p:spPr>
         <p:txBody>
@@ -4826,28 +6033,28 @@
             <a:pPr/>
             <a:r>
               <a:rPr sz="2000"/>
-              <a:t>Classical answer: collaborative filtering over behavior data. Real work, real cold-start problem.</a:t>
+              <a:t>Swapping the 3B local model for a 32B one closes every remaining defect</a:t>
             </a:r>
           </a:p>
           <a:p>
             <a:pPr/>
             <a:r>
               <a:rPr sz="2000"/>
-              <a:t>The shortcut: content-based recommendations from the vectors you already have. "More like this" is nearest neighbors of the item's vector.</a:t>
+              <a:t>Cost: about 20x the latency per answer, 0.9 s to 16.6 s</a:t>
             </a:r>
           </a:p>
           <a:p>
             <a:pPr/>
             <a:r>
               <a:rPr sz="2000"/>
-              <a:t>No training, no ratings matrix, no cold start, and the infrastructure exists</a:t>
+              <a:t>Swapping the model before fixing the chunk boundary buys a smarter model reading the wrong context</a:t>
             </a:r>
           </a:p>
           <a:p>
             <a:pPr/>
             <a:r>
               <a:rPr sz="2000"/>
-              <a:t>Honest caveat: similarity finds things that are alike. It will never discover that waterfall hikers buy headlamps.</a:t>
+              <a:t>Chunking is upstream of model choice</a:t>
             </a:r>
           </a:p>
         </p:txBody>
@@ -4891,7 +6098,7 @@
           <a:lstStyle/>
           <a:p>
             <a:r>
-              <a:t>06 · Demo: What to Watch</a:t>
+              <a:t>05 · Leadership Card</a:t>
             </a:r>
           </a:p>
         </p:txBody>
@@ -4909,7 +6116,7 @@
         <p:spPr>
           <a:xfrm>
             <a:off x="612648" y="1600200"/>
-            <a:ext cx="10966399" cy="4800600"/>
+            <a:ext cx="10966399" cy="4892040"/>
           </a:xfrm>
         </p:spPr>
         <p:txBody>
@@ -4919,35 +6126,28 @@
             <a:pPr/>
             <a:r>
               <a:rPr sz="2000"/>
-              <a:t>Same vectors from 04, still in memory; nothing new gets created</a:t>
+              <a:t>When: internal knowledge bases, support and policy docs, product documentation. Anywhere the org already wrote the answer down and people still ask humans.</a:t>
             </a:r>
           </a:p>
           <a:p>
             <a:pPr/>
             <a:r>
               <a:rPr sz="2000"/>
-              <a:t>"More like this": the search code with the query swapped for an item</a:t>
+              <a:t>Cost: weeks to production quality. The demo takes a day; the work is chunking, retrieval evaluation, keeping documents current.</a:t>
             </a:r>
           </a:p>
           <a:p>
             <a:pPr/>
             <a:r>
               <a:rPr sz="2000"/>
-              <a:t>Alpine lake hikes do cluster. They also come back mostly hard when you started from a moderate family walk, and one neighbor is a Smokies hike with no lake at all.</a:t>
+              <a:t>The uncomfortable one: the worst bug was a text-splitting rule, not a model or a prompt. Ask what your evaluation would have caught.</a:t>
             </a:r>
           </a:p>
           <a:p>
             <a:pPr/>
             <a:r>
               <a:rPr sz="2000"/>
-              <a:t>Difficulty and park are in the catalog, not in the description text, so the embedding can't see them</a:t>
-            </a:r>
-          </a:p>
-          <a:p>
-            <a:pPr/>
-            <a:r>
-              <a:rPr sz="2000"/>
-              <a:t>Gear: top result for the Cascade 65 Backpack is the Cascade 40 Daypack. Substitutes, not complements. Review co-mentions put the bear canister on top.</a:t>
+              <a:t>"Our documents already answer these questions. This makes them answer directly, with receipts."</a:t>
             </a:r>
           </a:p>
         </p:txBody>
@@ -4991,7 +6191,7 @@
           <a:lstStyle/>
           <a:p>
             <a:r>
-              <a:t>06 · Leadership Card</a:t>
+              <a:t>06 · Recommendations: The User Problem</a:t>
             </a:r>
           </a:p>
         </p:txBody>
@@ -5009,7 +6209,7 @@
         <p:spPr>
           <a:xfrm>
             <a:off x="612648" y="1600200"/>
-            <a:ext cx="10966399" cy="4800600"/>
+            <a:ext cx="10966399" cy="4892040"/>
           </a:xfrm>
         </p:spPr>
         <p:txBody>
@@ -5019,21 +6219,21 @@
             <a:pPr/>
             <a:r>
               <a:rPr sz="2000"/>
-              <a:t>When: any catalog or content library where users finish one thing and get no next step</a:t>
+              <a:t>A hiker just finished Avalanche Lake Trail and loved it. The app says nothing.</a:t>
             </a:r>
           </a:p>
           <a:p>
             <a:pPr/>
             <a:r>
               <a:rPr sz="2000"/>
-              <a:t>Cost: nearly free if you already built semantic search. Days from scratch. Collaborative filtering later, when behavior data exists.</a:t>
+              <a:t>"You'd probably like these three" never got built, because everyone assumes it needs a data-science team and six months</a:t>
             </a:r>
           </a:p>
           <a:p>
             <a:pPr/>
             <a:r>
               <a:rPr sz="2000"/>
-              <a:t>"The same vectors that power our search give us 'more like this' for free."</a:t>
+              <a:t>Same gap in the gear store: buy the Cascade 65, get a random carousel</a:t>
             </a:r>
           </a:p>
         </p:txBody>
@@ -5077,7 +6277,7 @@
           <a:lstStyle/>
           <a:p>
             <a:r>
-              <a:t>Hands-On: 60 Minutes</a:t>
+              <a:t>06 · The Concept</a:t>
             </a:r>
           </a:p>
         </p:txBody>
@@ -5095,7 +6295,7 @@
         <p:spPr>
           <a:xfrm>
             <a:off x="612648" y="1600200"/>
-            <a:ext cx="10966399" cy="4800600"/>
+            <a:ext cx="10966399" cy="4892040"/>
           </a:xfrm>
         </p:spPr>
         <p:txBody>
@@ -5105,21 +6305,28 @@
             <a:pPr/>
             <a:r>
               <a:rPr sz="2000"/>
-              <a:t>Start with 04 Semantic Search (Recommended): embed 30 trails, embed a query, rank by cosine. Keyword baseline provided.</a:t>
+              <a:t>Classical answer: collaborative filtering over behavior data. Real work, real cold-start problem.</a:t>
             </a:r>
           </a:p>
           <a:p>
             <a:pPr/>
             <a:r>
               <a:rPr sz="2000"/>
-              <a:t>Two honest routes. If RAG is why you came, go straight to 05 and come back to 04 after. 05 ships precomputed chunk vectors.</a:t>
+              <a:t>The shortcut: content-based recommendations from the vectors you already have. "More like this" is nearest neighbors of the item's vector.</a:t>
             </a:r>
           </a:p>
           <a:p>
             <a:pPr/>
             <a:r>
               <a:rPr sz="2000"/>
-              <a:t>06 Recommendations is the shortest if you've done 04: same code, query swapped for an item</a:t>
+              <a:t>No training, no ratings matrix, no cold start, and the infrastructure exists</a:t>
+            </a:r>
+          </a:p>
+          <a:p>
+            <a:pPr/>
+            <a:r>
+              <a:rPr sz="2000"/>
+              <a:t>Honest caveat: similarity finds things that are alike. It will never discover that waterfall hikers buy headlamps.</a:t>
             </a:r>
           </a:p>
         </p:txBody>
@@ -5163,7 +6370,7 @@
           <a:lstStyle/>
           <a:p>
             <a:r>
-              <a:t>Debrief</a:t>
+              <a:t>06 · How It Works</a:t>
             </a:r>
           </a:p>
         </p:txBody>
@@ -5180,8 +6387,8 @@
         </p:nvSpPr>
         <p:spPr>
           <a:xfrm>
-            <a:off x="612648" y="1600200"/>
-            <a:ext cx="10966399" cy="4800600"/>
+            <a:off x="612648" y="2862071"/>
+            <a:ext cx="10966399" cy="3630169"/>
           </a:xfrm>
         </p:spPr>
         <p:txBody>
@@ -5190,22 +6397,458 @@
           <a:p>
             <a:pPr/>
             <a:r>
-              <a:rPr sz="2000"/>
-              <a:t>Who got Taft Point for the kids query? Who got the Cascade 40?</a:t>
+              <a:rPr sz="1600"/>
+              <a:t>No query, no prompt, no model call while the user waits</a:t>
             </a:r>
           </a:p>
           <a:p>
             <a:pPr/>
             <a:r>
-              <a:rPr sz="2000"/>
-              <a:t>Rows 4 to 6 of the decision framework are done</a:t>
+              <a:rPr sz="1600"/>
+              <a:t>Same vectors, same similarity code as search. The only new line is "skip the item itself."</a:t>
             </a:r>
           </a:p>
           <a:p>
             <a:pPr/>
             <a:r>
-              <a:rPr sz="2000"/>
-              <a:t>Lunch, then Module 3.</a:t>
+              <a:rPr sz="1600"/>
+              <a:t>What it can't do: cross-category ("people who bought this pack also bought a stove") needs behavior data, not descriptions</a:t>
+            </a:r>
+          </a:p>
+        </p:txBody>
+      </p:sp>
+      <p:sp>
+        <p:nvSpPr>
+          <p:cNvPr id="4" name="Rounded Rectangle 3"/>
+          <p:cNvSpPr/>
+          <p:nvPr/>
+        </p:nvSpPr>
+        <p:spPr>
+          <a:xfrm>
+            <a:off x="612648" y="1554480"/>
+            <a:ext cx="1864095" cy="1033271"/>
+          </a:xfrm>
+          <a:prstGeom prst="roundRect">
+            <a:avLst/>
+          </a:prstGeom>
+          <a:noFill/>
+          <a:ln w="19050">
+            <a:solidFill>
+              <a:srgbClr val="000000"/>
+            </a:solidFill>
+          </a:ln>
+          <a:effectLst/>
+        </p:spPr>
+        <p:style>
+          <a:lnRef idx="1">
+            <a:schemeClr val="accent1"/>
+          </a:lnRef>
+          <a:fillRef idx="3">
+            <a:schemeClr val="accent1"/>
+          </a:fillRef>
+          <a:effectRef idx="2">
+            <a:schemeClr val="accent1"/>
+          </a:effectRef>
+          <a:fontRef idx="minor">
+            <a:schemeClr val="lt1"/>
+          </a:fontRef>
+        </p:style>
+        <p:txBody>
+          <a:bodyPr rtlCol="0" anchor="ctr" wrap="square" lIns="73152" rIns="73152"/>
+          <a:lstStyle/>
+          <a:p>
+            <a:pPr algn="ctr"/>
+            <a:r>
+              <a:rPr sz="1300">
+                <a:solidFill>
+                  <a:srgbClr val="000000"/>
+                </a:solidFill>
+              </a:rPr>
+              <a:t>The trail the user is viewing</a:t>
+            </a:r>
+          </a:p>
+        </p:txBody>
+      </p:sp>
+      <p:sp>
+        <p:nvSpPr>
+          <p:cNvPr id="5" name="Right Arrow 4"/>
+          <p:cNvSpPr/>
+          <p:nvPr/>
+        </p:nvSpPr>
+        <p:spPr>
+          <a:xfrm>
+            <a:off x="2531607" y="1924811"/>
+            <a:ext cx="301752" cy="292608"/>
+          </a:xfrm>
+          <a:prstGeom prst="rightArrow">
+            <a:avLst/>
+          </a:prstGeom>
+          <a:solidFill>
+            <a:srgbClr val="000000"/>
+          </a:solidFill>
+          <a:ln>
+            <a:noFill/>
+          </a:ln>
+          <a:effectLst/>
+        </p:spPr>
+        <p:style>
+          <a:lnRef idx="1">
+            <a:schemeClr val="accent1"/>
+          </a:lnRef>
+          <a:fillRef idx="3">
+            <a:schemeClr val="accent1"/>
+          </a:fillRef>
+          <a:effectRef idx="2">
+            <a:schemeClr val="accent1"/>
+          </a:effectRef>
+          <a:fontRef idx="minor">
+            <a:schemeClr val="lt1"/>
+          </a:fontRef>
+        </p:style>
+        <p:txBody>
+          <a:bodyPr rtlCol="0" anchor="ctr"/>
+          <a:lstStyle/>
+          <a:p>
+            <a:pPr algn="ctr"/>
+          </a:p>
+        </p:txBody>
+      </p:sp>
+      <p:sp>
+        <p:nvSpPr>
+          <p:cNvPr id="6" name="Rounded Rectangle 5"/>
+          <p:cNvSpPr/>
+          <p:nvPr/>
+        </p:nvSpPr>
+        <p:spPr>
+          <a:xfrm>
+            <a:off x="2888223" y="1554480"/>
+            <a:ext cx="1864095" cy="1033271"/>
+          </a:xfrm>
+          <a:prstGeom prst="roundRect">
+            <a:avLst/>
+          </a:prstGeom>
+          <a:noFill/>
+          <a:ln w="19050">
+            <a:solidFill>
+              <a:srgbClr val="000000"/>
+            </a:solidFill>
+          </a:ln>
+          <a:effectLst/>
+        </p:spPr>
+        <p:style>
+          <a:lnRef idx="1">
+            <a:schemeClr val="accent1"/>
+          </a:lnRef>
+          <a:fillRef idx="3">
+            <a:schemeClr val="accent1"/>
+          </a:fillRef>
+          <a:effectRef idx="2">
+            <a:schemeClr val="accent1"/>
+          </a:effectRef>
+          <a:fontRef idx="minor">
+            <a:schemeClr val="lt1"/>
+          </a:fontRef>
+        </p:style>
+        <p:txBody>
+          <a:bodyPr rtlCol="0" anchor="ctr" wrap="square" lIns="73152" rIns="73152"/>
+          <a:lstStyle/>
+          <a:p>
+            <a:pPr algn="ctr"/>
+            <a:r>
+              <a:rPr sz="1300">
+                <a:solidFill>
+                  <a:srgbClr val="000000"/>
+                </a:solidFill>
+              </a:rPr>
+              <a:t>Its vector, already computed by 04</a:t>
+            </a:r>
+          </a:p>
+        </p:txBody>
+      </p:sp>
+      <p:sp>
+        <p:nvSpPr>
+          <p:cNvPr id="7" name="Right Arrow 6"/>
+          <p:cNvSpPr/>
+          <p:nvPr/>
+        </p:nvSpPr>
+        <p:spPr>
+          <a:xfrm>
+            <a:off x="4807183" y="1924811"/>
+            <a:ext cx="301752" cy="292608"/>
+          </a:xfrm>
+          <a:prstGeom prst="rightArrow">
+            <a:avLst/>
+          </a:prstGeom>
+          <a:solidFill>
+            <a:srgbClr val="000000"/>
+          </a:solidFill>
+          <a:ln>
+            <a:noFill/>
+          </a:ln>
+          <a:effectLst/>
+        </p:spPr>
+        <p:style>
+          <a:lnRef idx="1">
+            <a:schemeClr val="accent1"/>
+          </a:lnRef>
+          <a:fillRef idx="3">
+            <a:schemeClr val="accent1"/>
+          </a:fillRef>
+          <a:effectRef idx="2">
+            <a:schemeClr val="accent1"/>
+          </a:effectRef>
+          <a:fontRef idx="minor">
+            <a:schemeClr val="lt1"/>
+          </a:fontRef>
+        </p:style>
+        <p:txBody>
+          <a:bodyPr rtlCol="0" anchor="ctr"/>
+          <a:lstStyle/>
+          <a:p>
+            <a:pPr algn="ctr"/>
+          </a:p>
+        </p:txBody>
+      </p:sp>
+      <p:sp>
+        <p:nvSpPr>
+          <p:cNvPr id="8" name="Rounded Rectangle 7"/>
+          <p:cNvSpPr/>
+          <p:nvPr/>
+        </p:nvSpPr>
+        <p:spPr>
+          <a:xfrm>
+            <a:off x="5163799" y="1554480"/>
+            <a:ext cx="1864095" cy="1033271"/>
+          </a:xfrm>
+          <a:prstGeom prst="roundRect">
+            <a:avLst/>
+          </a:prstGeom>
+          <a:noFill/>
+          <a:ln w="19050">
+            <a:solidFill>
+              <a:srgbClr val="000000"/>
+            </a:solidFill>
+          </a:ln>
+          <a:effectLst/>
+        </p:spPr>
+        <p:style>
+          <a:lnRef idx="1">
+            <a:schemeClr val="accent1"/>
+          </a:lnRef>
+          <a:fillRef idx="3">
+            <a:schemeClr val="accent1"/>
+          </a:fillRef>
+          <a:effectRef idx="2">
+            <a:schemeClr val="accent1"/>
+          </a:effectRef>
+          <a:fontRef idx="minor">
+            <a:schemeClr val="lt1"/>
+          </a:fontRef>
+        </p:style>
+        <p:txBody>
+          <a:bodyPr rtlCol="0" anchor="ctr" wrap="square" lIns="73152" rIns="73152"/>
+          <a:lstStyle/>
+          <a:p>
+            <a:pPr algn="ctr"/>
+            <a:r>
+              <a:rPr sz="1300">
+                <a:solidFill>
+                  <a:srgbClr val="000000"/>
+                </a:solidFill>
+              </a:rPr>
+              <a:t>Cosine against the rest of the catalog</a:t>
+            </a:r>
+          </a:p>
+        </p:txBody>
+      </p:sp>
+      <p:sp>
+        <p:nvSpPr>
+          <p:cNvPr id="9" name="Right Arrow 8"/>
+          <p:cNvSpPr/>
+          <p:nvPr/>
+        </p:nvSpPr>
+        <p:spPr>
+          <a:xfrm>
+            <a:off x="7082759" y="1924811"/>
+            <a:ext cx="301752" cy="292608"/>
+          </a:xfrm>
+          <a:prstGeom prst="rightArrow">
+            <a:avLst/>
+          </a:prstGeom>
+          <a:solidFill>
+            <a:srgbClr val="000000"/>
+          </a:solidFill>
+          <a:ln>
+            <a:noFill/>
+          </a:ln>
+          <a:effectLst/>
+        </p:spPr>
+        <p:style>
+          <a:lnRef idx="1">
+            <a:schemeClr val="accent1"/>
+          </a:lnRef>
+          <a:fillRef idx="3">
+            <a:schemeClr val="accent1"/>
+          </a:fillRef>
+          <a:effectRef idx="2">
+            <a:schemeClr val="accent1"/>
+          </a:effectRef>
+          <a:fontRef idx="minor">
+            <a:schemeClr val="lt1"/>
+          </a:fontRef>
+        </p:style>
+        <p:txBody>
+          <a:bodyPr rtlCol="0" anchor="ctr"/>
+          <a:lstStyle/>
+          <a:p>
+            <a:pPr algn="ctr"/>
+          </a:p>
+        </p:txBody>
+      </p:sp>
+      <p:sp>
+        <p:nvSpPr>
+          <p:cNvPr id="10" name="Rounded Rectangle 9"/>
+          <p:cNvSpPr/>
+          <p:nvPr/>
+        </p:nvSpPr>
+        <p:spPr>
+          <a:xfrm>
+            <a:off x="7439375" y="1554480"/>
+            <a:ext cx="1864095" cy="1033271"/>
+          </a:xfrm>
+          <a:prstGeom prst="roundRect">
+            <a:avLst/>
+          </a:prstGeom>
+          <a:noFill/>
+          <a:ln w="19050">
+            <a:solidFill>
+              <a:srgbClr val="000000"/>
+            </a:solidFill>
+          </a:ln>
+          <a:effectLst/>
+        </p:spPr>
+        <p:style>
+          <a:lnRef idx="1">
+            <a:schemeClr val="accent1"/>
+          </a:lnRef>
+          <a:fillRef idx="3">
+            <a:schemeClr val="accent1"/>
+          </a:fillRef>
+          <a:effectRef idx="2">
+            <a:schemeClr val="accent1"/>
+          </a:effectRef>
+          <a:fontRef idx="minor">
+            <a:schemeClr val="lt1"/>
+          </a:fontRef>
+        </p:style>
+        <p:txBody>
+          <a:bodyPr rtlCol="0" anchor="ctr" wrap="square" lIns="73152" rIns="73152"/>
+          <a:lstStyle/>
+          <a:p>
+            <a:pPr algn="ctr"/>
+            <a:r>
+              <a:rPr sz="1300">
+                <a:solidFill>
+                  <a:srgbClr val="000000"/>
+                </a:solidFill>
+              </a:rPr>
+              <a:t>Drop itself, take five</a:t>
+            </a:r>
+          </a:p>
+        </p:txBody>
+      </p:sp>
+      <p:sp>
+        <p:nvSpPr>
+          <p:cNvPr id="11" name="Right Arrow 10"/>
+          <p:cNvSpPr/>
+          <p:nvPr/>
+        </p:nvSpPr>
+        <p:spPr>
+          <a:xfrm>
+            <a:off x="9358335" y="1924811"/>
+            <a:ext cx="301752" cy="292608"/>
+          </a:xfrm>
+          <a:prstGeom prst="rightArrow">
+            <a:avLst/>
+          </a:prstGeom>
+          <a:solidFill>
+            <a:srgbClr val="000000"/>
+          </a:solidFill>
+          <a:ln>
+            <a:noFill/>
+          </a:ln>
+          <a:effectLst/>
+        </p:spPr>
+        <p:style>
+          <a:lnRef idx="1">
+            <a:schemeClr val="accent1"/>
+          </a:lnRef>
+          <a:fillRef idx="3">
+            <a:schemeClr val="accent1"/>
+          </a:fillRef>
+          <a:effectRef idx="2">
+            <a:schemeClr val="accent1"/>
+          </a:effectRef>
+          <a:fontRef idx="minor">
+            <a:schemeClr val="lt1"/>
+          </a:fontRef>
+        </p:style>
+        <p:txBody>
+          <a:bodyPr rtlCol="0" anchor="ctr"/>
+          <a:lstStyle/>
+          <a:p>
+            <a:pPr algn="ctr"/>
+          </a:p>
+        </p:txBody>
+      </p:sp>
+      <p:sp>
+        <p:nvSpPr>
+          <p:cNvPr id="12" name="Rounded Rectangle 11"/>
+          <p:cNvSpPr/>
+          <p:nvPr/>
+        </p:nvSpPr>
+        <p:spPr>
+          <a:xfrm>
+            <a:off x="9714951" y="1554480"/>
+            <a:ext cx="1864095" cy="1033271"/>
+          </a:xfrm>
+          <a:prstGeom prst="roundRect">
+            <a:avLst/>
+          </a:prstGeom>
+          <a:noFill/>
+          <a:ln w="19050">
+            <a:solidFill>
+              <a:srgbClr val="000000"/>
+            </a:solidFill>
+          </a:ln>
+          <a:effectLst/>
+        </p:spPr>
+        <p:style>
+          <a:lnRef idx="1">
+            <a:schemeClr val="accent1"/>
+          </a:lnRef>
+          <a:fillRef idx="3">
+            <a:schemeClr val="accent1"/>
+          </a:fillRef>
+          <a:effectRef idx="2">
+            <a:schemeClr val="accent1"/>
+          </a:effectRef>
+          <a:fontRef idx="minor">
+            <a:schemeClr val="lt1"/>
+          </a:fontRef>
+        </p:style>
+        <p:txBody>
+          <a:bodyPr rtlCol="0" anchor="ctr" wrap="square" lIns="73152" rIns="73152"/>
+          <a:lstStyle/>
+          <a:p>
+            <a:pPr algn="ctr"/>
+            <a:r>
+              <a:rPr sz="1300">
+                <a:solidFill>
+                  <a:srgbClr val="000000"/>
+                </a:solidFill>
+              </a:rPr>
+              <a:t>"More like this"</a:t>
             </a:r>
           </a:p>
         </p:txBody>
@@ -5267,7 +6910,7 @@
         <p:spPr>
           <a:xfrm>
             <a:off x="612648" y="1600200"/>
-            <a:ext cx="10966399" cy="4800600"/>
+            <a:ext cx="10966399" cy="4892040"/>
           </a:xfrm>
         </p:spPr>
         <p:txBody>
@@ -5299,6 +6942,364 @@
             <a:r>
               <a:rPr sz="2000"/>
               <a:t>Recommendations: rank a catalog against an item instead of a query</a:t>
+            </a:r>
+          </a:p>
+        </p:txBody>
+      </p:sp>
+    </p:spTree>
+  </p:cSld>
+  <p:clrMapOvr>
+    <a:masterClrMapping/>
+  </p:clrMapOvr>
+</p:sld>
+</file>
+
+<file path=ppt/slides/slide20.xml><?xml version="1.0" encoding="utf-8"?>
+<p:sld xmlns:a="http://schemas.openxmlformats.org/drawingml/2006/main" xmlns:p="http://schemas.openxmlformats.org/presentationml/2006/main" xmlns:r="http://schemas.openxmlformats.org/officeDocument/2006/relationships">
+  <p:cSld>
+    <p:spTree>
+      <p:nvGrpSpPr>
+        <p:cNvPr id="1" name=""/>
+        <p:cNvGrpSpPr/>
+        <p:nvPr/>
+      </p:nvGrpSpPr>
+      <p:grpSpPr/>
+      <p:sp>
+        <p:nvSpPr>
+          <p:cNvPr id="2" name="Title 1"/>
+          <p:cNvSpPr>
+            <a:spLocks noGrp="1"/>
+          </p:cNvSpPr>
+          <p:nvPr>
+            <p:ph type="title"/>
+          </p:nvPr>
+        </p:nvSpPr>
+        <p:spPr>
+          <a:xfrm>
+            <a:off x="612648" y="365760"/>
+            <a:ext cx="10966399" cy="1097280"/>
+          </a:xfrm>
+        </p:spPr>
+        <p:txBody>
+          <a:bodyPr/>
+          <a:lstStyle/>
+          <a:p>
+            <a:r>
+              <a:t>06 · Demo: What to Watch</a:t>
+            </a:r>
+          </a:p>
+        </p:txBody>
+      </p:sp>
+      <p:sp>
+        <p:nvSpPr>
+          <p:cNvPr id="3" name="Content Placeholder 2"/>
+          <p:cNvSpPr>
+            <a:spLocks noGrp="1"/>
+          </p:cNvSpPr>
+          <p:nvPr>
+            <p:ph idx="1"/>
+          </p:nvPr>
+        </p:nvSpPr>
+        <p:spPr>
+          <a:xfrm>
+            <a:off x="612648" y="1600200"/>
+            <a:ext cx="10966399" cy="4892040"/>
+          </a:xfrm>
+        </p:spPr>
+        <p:txBody>
+          <a:bodyPr wrap="square"/>
+          <a:lstStyle/>
+          <a:p>
+            <a:pPr/>
+            <a:r>
+              <a:rPr sz="2000"/>
+              <a:t>Same vectors from 04, still in memory; nothing new gets created</a:t>
+            </a:r>
+          </a:p>
+          <a:p>
+            <a:pPr/>
+            <a:r>
+              <a:rPr sz="2000"/>
+              <a:t>"More like this": the search code with the query swapped for an item</a:t>
+            </a:r>
+          </a:p>
+          <a:p>
+            <a:pPr/>
+            <a:r>
+              <a:rPr sz="2000"/>
+              <a:t>Alpine lake hikes do cluster. They also come back mostly hard when you started from a moderate family walk, and one neighbor is a Smokies hike with no lake at all.</a:t>
+            </a:r>
+          </a:p>
+          <a:p>
+            <a:pPr/>
+            <a:r>
+              <a:rPr sz="2000"/>
+              <a:t>Difficulty and park are in the catalog, not in the description text, so the embedding can't see them</a:t>
+            </a:r>
+          </a:p>
+          <a:p>
+            <a:pPr/>
+            <a:r>
+              <a:rPr sz="2000"/>
+              <a:t>Gear: top result for the Cascade 65 Backpack is the Cascade 40 Daypack. Substitutes, not complements. Review co-mentions put the bear canister on top.</a:t>
+            </a:r>
+          </a:p>
+        </p:txBody>
+      </p:sp>
+    </p:spTree>
+  </p:cSld>
+  <p:clrMapOvr>
+    <a:masterClrMapping/>
+  </p:clrMapOvr>
+</p:sld>
+</file>
+
+<file path=ppt/slides/slide21.xml><?xml version="1.0" encoding="utf-8"?>
+<p:sld xmlns:a="http://schemas.openxmlformats.org/drawingml/2006/main" xmlns:p="http://schemas.openxmlformats.org/presentationml/2006/main" xmlns:r="http://schemas.openxmlformats.org/officeDocument/2006/relationships">
+  <p:cSld>
+    <p:spTree>
+      <p:nvGrpSpPr>
+        <p:cNvPr id="1" name=""/>
+        <p:cNvGrpSpPr/>
+        <p:nvPr/>
+      </p:nvGrpSpPr>
+      <p:grpSpPr/>
+      <p:sp>
+        <p:nvSpPr>
+          <p:cNvPr id="2" name="Title 1"/>
+          <p:cNvSpPr>
+            <a:spLocks noGrp="1"/>
+          </p:cNvSpPr>
+          <p:nvPr>
+            <p:ph type="title"/>
+          </p:nvPr>
+        </p:nvSpPr>
+        <p:spPr>
+          <a:xfrm>
+            <a:off x="612648" y="365760"/>
+            <a:ext cx="10966399" cy="1097280"/>
+          </a:xfrm>
+        </p:spPr>
+        <p:txBody>
+          <a:bodyPr/>
+          <a:lstStyle/>
+          <a:p>
+            <a:r>
+              <a:t>06 · Leadership Card</a:t>
+            </a:r>
+          </a:p>
+        </p:txBody>
+      </p:sp>
+      <p:sp>
+        <p:nvSpPr>
+          <p:cNvPr id="3" name="Content Placeholder 2"/>
+          <p:cNvSpPr>
+            <a:spLocks noGrp="1"/>
+          </p:cNvSpPr>
+          <p:nvPr>
+            <p:ph idx="1"/>
+          </p:nvPr>
+        </p:nvSpPr>
+        <p:spPr>
+          <a:xfrm>
+            <a:off x="612648" y="1600200"/>
+            <a:ext cx="10966399" cy="4892040"/>
+          </a:xfrm>
+        </p:spPr>
+        <p:txBody>
+          <a:bodyPr wrap="square"/>
+          <a:lstStyle/>
+          <a:p>
+            <a:pPr/>
+            <a:r>
+              <a:rPr sz="2000"/>
+              <a:t>When: any catalog or content library where users finish one thing and get no next step</a:t>
+            </a:r>
+          </a:p>
+          <a:p>
+            <a:pPr/>
+            <a:r>
+              <a:rPr sz="2000"/>
+              <a:t>Cost: nearly free if you already built semantic search. Days from scratch. Collaborative filtering later, when behavior data exists.</a:t>
+            </a:r>
+          </a:p>
+          <a:p>
+            <a:pPr/>
+            <a:r>
+              <a:rPr sz="2000"/>
+              <a:t>"The same vectors that power our search give us 'more like this' for free."</a:t>
+            </a:r>
+          </a:p>
+        </p:txBody>
+      </p:sp>
+    </p:spTree>
+  </p:cSld>
+  <p:clrMapOvr>
+    <a:masterClrMapping/>
+  </p:clrMapOvr>
+</p:sld>
+</file>
+
+<file path=ppt/slides/slide22.xml><?xml version="1.0" encoding="utf-8"?>
+<p:sld xmlns:a="http://schemas.openxmlformats.org/drawingml/2006/main" xmlns:p="http://schemas.openxmlformats.org/presentationml/2006/main" xmlns:r="http://schemas.openxmlformats.org/officeDocument/2006/relationships">
+  <p:cSld>
+    <p:spTree>
+      <p:nvGrpSpPr>
+        <p:cNvPr id="1" name=""/>
+        <p:cNvGrpSpPr/>
+        <p:nvPr/>
+      </p:nvGrpSpPr>
+      <p:grpSpPr/>
+      <p:sp>
+        <p:nvSpPr>
+          <p:cNvPr id="2" name="Title 1"/>
+          <p:cNvSpPr>
+            <a:spLocks noGrp="1"/>
+          </p:cNvSpPr>
+          <p:nvPr>
+            <p:ph type="title"/>
+          </p:nvPr>
+        </p:nvSpPr>
+        <p:spPr>
+          <a:xfrm>
+            <a:off x="612648" y="365760"/>
+            <a:ext cx="10966399" cy="1097280"/>
+          </a:xfrm>
+        </p:spPr>
+        <p:txBody>
+          <a:bodyPr/>
+          <a:lstStyle/>
+          <a:p>
+            <a:r>
+              <a:t>Hands-On: 60 Minutes</a:t>
+            </a:r>
+          </a:p>
+        </p:txBody>
+      </p:sp>
+      <p:sp>
+        <p:nvSpPr>
+          <p:cNvPr id="3" name="Content Placeholder 2"/>
+          <p:cNvSpPr>
+            <a:spLocks noGrp="1"/>
+          </p:cNvSpPr>
+          <p:nvPr>
+            <p:ph idx="1"/>
+          </p:nvPr>
+        </p:nvSpPr>
+        <p:spPr>
+          <a:xfrm>
+            <a:off x="612648" y="1600200"/>
+            <a:ext cx="10966399" cy="4892040"/>
+          </a:xfrm>
+        </p:spPr>
+        <p:txBody>
+          <a:bodyPr wrap="square"/>
+          <a:lstStyle/>
+          <a:p>
+            <a:pPr/>
+            <a:r>
+              <a:rPr sz="2000"/>
+              <a:t>Start with 04 Semantic Search (Recommended): embed 30 trails, embed a query, rank by cosine. Keyword baseline provided.</a:t>
+            </a:r>
+          </a:p>
+          <a:p>
+            <a:pPr/>
+            <a:r>
+              <a:rPr sz="2000"/>
+              <a:t>Two honest routes. If RAG is why you came, go straight to 05 and come back to 04 after. 05 ships precomputed chunk vectors.</a:t>
+            </a:r>
+          </a:p>
+          <a:p>
+            <a:pPr/>
+            <a:r>
+              <a:rPr sz="2000"/>
+              <a:t>06 Recommendations is the shortest if you've done 04: same code, query swapped for an item</a:t>
+            </a:r>
+          </a:p>
+        </p:txBody>
+      </p:sp>
+    </p:spTree>
+  </p:cSld>
+  <p:clrMapOvr>
+    <a:masterClrMapping/>
+  </p:clrMapOvr>
+</p:sld>
+</file>
+
+<file path=ppt/slides/slide23.xml><?xml version="1.0" encoding="utf-8"?>
+<p:sld xmlns:a="http://schemas.openxmlformats.org/drawingml/2006/main" xmlns:p="http://schemas.openxmlformats.org/presentationml/2006/main" xmlns:r="http://schemas.openxmlformats.org/officeDocument/2006/relationships">
+  <p:cSld>
+    <p:spTree>
+      <p:nvGrpSpPr>
+        <p:cNvPr id="1" name=""/>
+        <p:cNvGrpSpPr/>
+        <p:nvPr/>
+      </p:nvGrpSpPr>
+      <p:grpSpPr/>
+      <p:sp>
+        <p:nvSpPr>
+          <p:cNvPr id="2" name="Title 1"/>
+          <p:cNvSpPr>
+            <a:spLocks noGrp="1"/>
+          </p:cNvSpPr>
+          <p:nvPr>
+            <p:ph type="title"/>
+          </p:nvPr>
+        </p:nvSpPr>
+        <p:spPr>
+          <a:xfrm>
+            <a:off x="612648" y="365760"/>
+            <a:ext cx="10966399" cy="1097280"/>
+          </a:xfrm>
+        </p:spPr>
+        <p:txBody>
+          <a:bodyPr/>
+          <a:lstStyle/>
+          <a:p>
+            <a:r>
+              <a:t>Debrief</a:t>
+            </a:r>
+          </a:p>
+        </p:txBody>
+      </p:sp>
+      <p:sp>
+        <p:nvSpPr>
+          <p:cNvPr id="3" name="Content Placeholder 2"/>
+          <p:cNvSpPr>
+            <a:spLocks noGrp="1"/>
+          </p:cNvSpPr>
+          <p:nvPr>
+            <p:ph idx="1"/>
+          </p:nvPr>
+        </p:nvSpPr>
+        <p:spPr>
+          <a:xfrm>
+            <a:off x="612648" y="1600200"/>
+            <a:ext cx="10966399" cy="4892040"/>
+          </a:xfrm>
+        </p:spPr>
+        <p:txBody>
+          <a:bodyPr wrap="square"/>
+          <a:lstStyle/>
+          <a:p>
+            <a:pPr/>
+            <a:r>
+              <a:rPr sz="2000"/>
+              <a:t>Who got Taft Point for the kids query? Who got the Cascade 40?</a:t>
+            </a:r>
+          </a:p>
+          <a:p>
+            <a:pPr/>
+            <a:r>
+              <a:rPr sz="2000"/>
+              <a:t>Rows 4 to 6 of the decision framework are done</a:t>
+            </a:r>
+          </a:p>
+          <a:p>
+            <a:pPr/>
+            <a:r>
+              <a:rPr sz="2000"/>
+              <a:t>Lunch, then Module 3.</a:t>
             </a:r>
           </a:p>
         </p:txBody>
@@ -5360,7 +7361,7 @@
         <p:spPr>
           <a:xfrm>
             <a:off x="612648" y="1600200"/>
-            <a:ext cx="10966399" cy="4800600"/>
+            <a:ext cx="10966399" cy="4892040"/>
           </a:xfrm>
         </p:spPr>
         <p:txBody>
@@ -5442,7 +7443,7 @@
           <a:lstStyle/>
           <a:p>
             <a:r>
-              <a:t>04 · Semantic Search: The User Problem</a:t>
+              <a:t>Search, RAG, Recommendations: Same First Half</a:t>
             </a:r>
           </a:p>
         </p:txBody>
@@ -5459,8 +7460,8 @@
         </p:nvSpPr>
         <p:spPr>
           <a:xfrm>
-            <a:off x="612648" y="1600200"/>
-            <a:ext cx="10966399" cy="4800600"/>
+            <a:off x="612648" y="5056631"/>
+            <a:ext cx="10966399" cy="1435609"/>
           </a:xfrm>
         </p:spPr>
         <p:txBody>
@@ -5469,22 +7470,1232 @@
           <a:p>
             <a:pPr/>
             <a:r>
-              <a:rPr sz="2000"/>
-              <a:t>"dog-friendly waterfall hike, not too steep"</a:t>
+              <a:rPr sz="1400"/>
+              <a:t>All three start with "turn text into a vector and find the nearest ones"</a:t>
             </a:r>
           </a:p>
           <a:p>
             <a:pPr/>
             <a:r>
-              <a:rPr sz="2000"/>
-              <a:t>The catalog has a dozen matches. Keyword search returns almost nothing: no description says "not too steep." One says "a gentle grade shaded by cedars."</a:t>
+              <a:rPr sz="1400"/>
+              <a:t>RAG adds a model at the end that reads the results instead of showing them</a:t>
             </a:r>
           </a:p>
           <a:p>
             <a:pPr/>
             <a:r>
-              <a:rPr sz="2000"/>
-              <a:t>Three bad results, and the user goes back to asking strangers on Reddit</a:t>
+              <a:rPr sz="1400"/>
+              <a:t>Recommendations swap the query for an item the user is already looking at, so there is no model call at request time</a:t>
+            </a:r>
+          </a:p>
+          <a:p>
+            <a:pPr/>
+            <a:r>
+              <a:rPr sz="1400"/>
+              <a:t>This is why the demos reuse code: 05 and 06 import 04's search</a:t>
+            </a:r>
+          </a:p>
+        </p:txBody>
+      </p:sp>
+      <p:sp>
+        <p:nvSpPr>
+          <p:cNvPr id="4" name="TextBox 3"/>
+          <p:cNvSpPr txBox="1"/>
+          <p:nvPr/>
+        </p:nvSpPr>
+        <p:spPr>
+          <a:xfrm>
+            <a:off x="612648" y="1554480"/>
+            <a:ext cx="1371600" cy="822960"/>
+          </a:xfrm>
+          <a:prstGeom prst="rect">
+            <a:avLst/>
+          </a:prstGeom>
+          <a:noFill/>
+        </p:spPr>
+        <p:txBody>
+          <a:bodyPr wrap="square" anchor="ctr">
+            <a:spAutoFit/>
+          </a:bodyPr>
+          <a:lstStyle/>
+          <a:p>
+            <a:r>
+              <a:rPr sz="1400" i="1"/>
+              <a:t>04 Search</a:t>
+            </a:r>
+          </a:p>
+        </p:txBody>
+      </p:sp>
+      <p:sp>
+        <p:nvSpPr>
+          <p:cNvPr id="5" name="Rounded Rectangle 4"/>
+          <p:cNvSpPr/>
+          <p:nvPr/>
+        </p:nvSpPr>
+        <p:spPr>
+          <a:xfrm>
+            <a:off x="2075688" y="1554480"/>
+            <a:ext cx="2067229" cy="822960"/>
+          </a:xfrm>
+          <a:prstGeom prst="roundRect">
+            <a:avLst/>
+          </a:prstGeom>
+          <a:noFill/>
+          <a:ln w="19050">
+            <a:solidFill>
+              <a:srgbClr val="000000"/>
+            </a:solidFill>
+          </a:ln>
+          <a:effectLst/>
+        </p:spPr>
+        <p:style>
+          <a:lnRef idx="1">
+            <a:schemeClr val="accent1"/>
+          </a:lnRef>
+          <a:fillRef idx="3">
+            <a:schemeClr val="accent1"/>
+          </a:fillRef>
+          <a:effectRef idx="2">
+            <a:schemeClr val="accent1"/>
+          </a:effectRef>
+          <a:fontRef idx="minor">
+            <a:schemeClr val="lt1"/>
+          </a:fontRef>
+        </p:style>
+        <p:txBody>
+          <a:bodyPr rtlCol="0" anchor="ctr" wrap="square" lIns="73152" rIns="73152"/>
+          <a:lstStyle/>
+          <a:p>
+            <a:pPr algn="ctr"/>
+            <a:r>
+              <a:rPr sz="1500">
+                <a:solidFill>
+                  <a:srgbClr val="000000"/>
+                </a:solidFill>
+              </a:rPr>
+              <a:t>Query text</a:t>
+            </a:r>
+          </a:p>
+        </p:txBody>
+      </p:sp>
+      <p:sp>
+        <p:nvSpPr>
+          <p:cNvPr id="6" name="Right Arrow 5"/>
+          <p:cNvSpPr/>
+          <p:nvPr/>
+        </p:nvSpPr>
+        <p:spPr>
+          <a:xfrm>
+            <a:off x="4197781" y="1819656"/>
+            <a:ext cx="301752" cy="292608"/>
+          </a:xfrm>
+          <a:prstGeom prst="rightArrow">
+            <a:avLst/>
+          </a:prstGeom>
+          <a:solidFill>
+            <a:srgbClr val="000000"/>
+          </a:solidFill>
+          <a:ln>
+            <a:noFill/>
+          </a:ln>
+          <a:effectLst/>
+        </p:spPr>
+        <p:style>
+          <a:lnRef idx="1">
+            <a:schemeClr val="accent1"/>
+          </a:lnRef>
+          <a:fillRef idx="3">
+            <a:schemeClr val="accent1"/>
+          </a:fillRef>
+          <a:effectRef idx="2">
+            <a:schemeClr val="accent1"/>
+          </a:effectRef>
+          <a:fontRef idx="minor">
+            <a:schemeClr val="lt1"/>
+          </a:fontRef>
+        </p:style>
+        <p:txBody>
+          <a:bodyPr rtlCol="0" anchor="ctr"/>
+          <a:lstStyle/>
+          <a:p>
+            <a:pPr algn="ctr"/>
+          </a:p>
+        </p:txBody>
+      </p:sp>
+      <p:sp>
+        <p:nvSpPr>
+          <p:cNvPr id="7" name="Rounded Rectangle 6"/>
+          <p:cNvSpPr/>
+          <p:nvPr/>
+        </p:nvSpPr>
+        <p:spPr>
+          <a:xfrm>
+            <a:off x="4554397" y="1554480"/>
+            <a:ext cx="2067229" cy="822960"/>
+          </a:xfrm>
+          <a:prstGeom prst="roundRect">
+            <a:avLst/>
+          </a:prstGeom>
+          <a:noFill/>
+          <a:ln w="19050">
+            <a:solidFill>
+              <a:srgbClr val="000000"/>
+            </a:solidFill>
+          </a:ln>
+          <a:effectLst/>
+        </p:spPr>
+        <p:style>
+          <a:lnRef idx="1">
+            <a:schemeClr val="accent1"/>
+          </a:lnRef>
+          <a:fillRef idx="3">
+            <a:schemeClr val="accent1"/>
+          </a:fillRef>
+          <a:effectRef idx="2">
+            <a:schemeClr val="accent1"/>
+          </a:effectRef>
+          <a:fontRef idx="minor">
+            <a:schemeClr val="lt1"/>
+          </a:fontRef>
+        </p:style>
+        <p:txBody>
+          <a:bodyPr rtlCol="0" anchor="ctr" wrap="square" lIns="73152" rIns="73152"/>
+          <a:lstStyle/>
+          <a:p>
+            <a:pPr algn="ctr"/>
+            <a:r>
+              <a:rPr sz="1500">
+                <a:solidFill>
+                  <a:srgbClr val="000000"/>
+                </a:solidFill>
+              </a:rPr>
+              <a:t>Embed</a:t>
+            </a:r>
+          </a:p>
+        </p:txBody>
+      </p:sp>
+      <p:sp>
+        <p:nvSpPr>
+          <p:cNvPr id="8" name="Right Arrow 7"/>
+          <p:cNvSpPr/>
+          <p:nvPr/>
+        </p:nvSpPr>
+        <p:spPr>
+          <a:xfrm>
+            <a:off x="6676491" y="1819656"/>
+            <a:ext cx="301752" cy="292608"/>
+          </a:xfrm>
+          <a:prstGeom prst="rightArrow">
+            <a:avLst/>
+          </a:prstGeom>
+          <a:solidFill>
+            <a:srgbClr val="000000"/>
+          </a:solidFill>
+          <a:ln>
+            <a:noFill/>
+          </a:ln>
+          <a:effectLst/>
+        </p:spPr>
+        <p:style>
+          <a:lnRef idx="1">
+            <a:schemeClr val="accent1"/>
+          </a:lnRef>
+          <a:fillRef idx="3">
+            <a:schemeClr val="accent1"/>
+          </a:fillRef>
+          <a:effectRef idx="2">
+            <a:schemeClr val="accent1"/>
+          </a:effectRef>
+          <a:fontRef idx="minor">
+            <a:schemeClr val="lt1"/>
+          </a:fontRef>
+        </p:style>
+        <p:txBody>
+          <a:bodyPr rtlCol="0" anchor="ctr"/>
+          <a:lstStyle/>
+          <a:p>
+            <a:pPr algn="ctr"/>
+          </a:p>
+        </p:txBody>
+      </p:sp>
+      <p:sp>
+        <p:nvSpPr>
+          <p:cNvPr id="9" name="Rounded Rectangle 8"/>
+          <p:cNvSpPr/>
+          <p:nvPr/>
+        </p:nvSpPr>
+        <p:spPr>
+          <a:xfrm>
+            <a:off x="7033107" y="1554480"/>
+            <a:ext cx="2067229" cy="822960"/>
+          </a:xfrm>
+          <a:prstGeom prst="roundRect">
+            <a:avLst/>
+          </a:prstGeom>
+          <a:noFill/>
+          <a:ln w="19050">
+            <a:solidFill>
+              <a:srgbClr val="000000"/>
+            </a:solidFill>
+          </a:ln>
+          <a:effectLst/>
+        </p:spPr>
+        <p:style>
+          <a:lnRef idx="1">
+            <a:schemeClr val="accent1"/>
+          </a:lnRef>
+          <a:fillRef idx="3">
+            <a:schemeClr val="accent1"/>
+          </a:fillRef>
+          <a:effectRef idx="2">
+            <a:schemeClr val="accent1"/>
+          </a:effectRef>
+          <a:fontRef idx="minor">
+            <a:schemeClr val="lt1"/>
+          </a:fontRef>
+        </p:style>
+        <p:txBody>
+          <a:bodyPr rtlCol="0" anchor="ctr" wrap="square" lIns="73152" rIns="73152"/>
+          <a:lstStyle/>
+          <a:p>
+            <a:pPr algn="ctr"/>
+            <a:r>
+              <a:rPr sz="1500">
+                <a:solidFill>
+                  <a:srgbClr val="000000"/>
+                </a:solidFill>
+              </a:rPr>
+              <a:t>Nearest stored vectors</a:t>
+            </a:r>
+          </a:p>
+        </p:txBody>
+      </p:sp>
+      <p:sp>
+        <p:nvSpPr>
+          <p:cNvPr id="10" name="Right Arrow 9"/>
+          <p:cNvSpPr/>
+          <p:nvPr/>
+        </p:nvSpPr>
+        <p:spPr>
+          <a:xfrm>
+            <a:off x="9155201" y="1819656"/>
+            <a:ext cx="301752" cy="292608"/>
+          </a:xfrm>
+          <a:prstGeom prst="rightArrow">
+            <a:avLst/>
+          </a:prstGeom>
+          <a:solidFill>
+            <a:srgbClr val="000000"/>
+          </a:solidFill>
+          <a:ln>
+            <a:noFill/>
+          </a:ln>
+          <a:effectLst/>
+        </p:spPr>
+        <p:style>
+          <a:lnRef idx="1">
+            <a:schemeClr val="accent1"/>
+          </a:lnRef>
+          <a:fillRef idx="3">
+            <a:schemeClr val="accent1"/>
+          </a:fillRef>
+          <a:effectRef idx="2">
+            <a:schemeClr val="accent1"/>
+          </a:effectRef>
+          <a:fontRef idx="minor">
+            <a:schemeClr val="lt1"/>
+          </a:fontRef>
+        </p:style>
+        <p:txBody>
+          <a:bodyPr rtlCol="0" anchor="ctr"/>
+          <a:lstStyle/>
+          <a:p>
+            <a:pPr algn="ctr"/>
+          </a:p>
+        </p:txBody>
+      </p:sp>
+      <p:sp>
+        <p:nvSpPr>
+          <p:cNvPr id="11" name="Rounded Rectangle 10"/>
+          <p:cNvSpPr/>
+          <p:nvPr/>
+        </p:nvSpPr>
+        <p:spPr>
+          <a:xfrm>
+            <a:off x="9511817" y="1554480"/>
+            <a:ext cx="2067229" cy="822960"/>
+          </a:xfrm>
+          <a:prstGeom prst="roundRect">
+            <a:avLst/>
+          </a:prstGeom>
+          <a:noFill/>
+          <a:ln w="19050">
+            <a:solidFill>
+              <a:srgbClr val="000000"/>
+            </a:solidFill>
+          </a:ln>
+          <a:effectLst/>
+        </p:spPr>
+        <p:style>
+          <a:lnRef idx="1">
+            <a:schemeClr val="accent1"/>
+          </a:lnRef>
+          <a:fillRef idx="3">
+            <a:schemeClr val="accent1"/>
+          </a:fillRef>
+          <a:effectRef idx="2">
+            <a:schemeClr val="accent1"/>
+          </a:effectRef>
+          <a:fontRef idx="minor">
+            <a:schemeClr val="lt1"/>
+          </a:fontRef>
+        </p:style>
+        <p:txBody>
+          <a:bodyPr rtlCol="0" anchor="ctr" wrap="square" lIns="73152" rIns="73152"/>
+          <a:lstStyle/>
+          <a:p>
+            <a:pPr algn="ctr"/>
+            <a:r>
+              <a:rPr sz="1500">
+                <a:solidFill>
+                  <a:srgbClr val="000000"/>
+                </a:solidFill>
+              </a:rPr>
+              <a:t>Show the list</a:t>
+            </a:r>
+          </a:p>
+        </p:txBody>
+      </p:sp>
+      <p:sp>
+        <p:nvSpPr>
+          <p:cNvPr id="12" name="TextBox 11"/>
+          <p:cNvSpPr txBox="1"/>
+          <p:nvPr/>
+        </p:nvSpPr>
+        <p:spPr>
+          <a:xfrm>
+            <a:off x="612648" y="2651760"/>
+            <a:ext cx="1371600" cy="1033271"/>
+          </a:xfrm>
+          <a:prstGeom prst="rect">
+            <a:avLst/>
+          </a:prstGeom>
+          <a:noFill/>
+        </p:spPr>
+        <p:txBody>
+          <a:bodyPr wrap="square" anchor="ctr">
+            <a:spAutoFit/>
+          </a:bodyPr>
+          <a:lstStyle/>
+          <a:p>
+            <a:r>
+              <a:rPr sz="1400" i="1"/>
+              <a:t>05 RAG</a:t>
+            </a:r>
+          </a:p>
+        </p:txBody>
+      </p:sp>
+      <p:sp>
+        <p:nvSpPr>
+          <p:cNvPr id="13" name="Rounded Rectangle 12"/>
+          <p:cNvSpPr/>
+          <p:nvPr/>
+        </p:nvSpPr>
+        <p:spPr>
+          <a:xfrm>
+            <a:off x="2075688" y="2651760"/>
+            <a:ext cx="1571487" cy="1033271"/>
+          </a:xfrm>
+          <a:prstGeom prst="roundRect">
+            <a:avLst/>
+          </a:prstGeom>
+          <a:noFill/>
+          <a:ln w="19050">
+            <a:solidFill>
+              <a:srgbClr val="000000"/>
+            </a:solidFill>
+          </a:ln>
+          <a:effectLst/>
+        </p:spPr>
+        <p:style>
+          <a:lnRef idx="1">
+            <a:schemeClr val="accent1"/>
+          </a:lnRef>
+          <a:fillRef idx="3">
+            <a:schemeClr val="accent1"/>
+          </a:fillRef>
+          <a:effectRef idx="2">
+            <a:schemeClr val="accent1"/>
+          </a:effectRef>
+          <a:fontRef idx="minor">
+            <a:schemeClr val="lt1"/>
+          </a:fontRef>
+        </p:style>
+        <p:txBody>
+          <a:bodyPr rtlCol="0" anchor="ctr" wrap="square" lIns="73152" rIns="73152"/>
+          <a:lstStyle/>
+          <a:p>
+            <a:pPr algn="ctr"/>
+            <a:r>
+              <a:rPr sz="1300">
+                <a:solidFill>
+                  <a:srgbClr val="000000"/>
+                </a:solidFill>
+              </a:rPr>
+              <a:t>Question</a:t>
+            </a:r>
+          </a:p>
+        </p:txBody>
+      </p:sp>
+      <p:sp>
+        <p:nvSpPr>
+          <p:cNvPr id="14" name="Right Arrow 13"/>
+          <p:cNvSpPr/>
+          <p:nvPr/>
+        </p:nvSpPr>
+        <p:spPr>
+          <a:xfrm>
+            <a:off x="3702039" y="3022091"/>
+            <a:ext cx="301752" cy="292608"/>
+          </a:xfrm>
+          <a:prstGeom prst="rightArrow">
+            <a:avLst/>
+          </a:prstGeom>
+          <a:solidFill>
+            <a:srgbClr val="000000"/>
+          </a:solidFill>
+          <a:ln>
+            <a:noFill/>
+          </a:ln>
+          <a:effectLst/>
+        </p:spPr>
+        <p:style>
+          <a:lnRef idx="1">
+            <a:schemeClr val="accent1"/>
+          </a:lnRef>
+          <a:fillRef idx="3">
+            <a:schemeClr val="accent1"/>
+          </a:fillRef>
+          <a:effectRef idx="2">
+            <a:schemeClr val="accent1"/>
+          </a:effectRef>
+          <a:fontRef idx="minor">
+            <a:schemeClr val="lt1"/>
+          </a:fontRef>
+        </p:style>
+        <p:txBody>
+          <a:bodyPr rtlCol="0" anchor="ctr"/>
+          <a:lstStyle/>
+          <a:p>
+            <a:pPr algn="ctr"/>
+          </a:p>
+        </p:txBody>
+      </p:sp>
+      <p:sp>
+        <p:nvSpPr>
+          <p:cNvPr id="15" name="Rounded Rectangle 14"/>
+          <p:cNvSpPr/>
+          <p:nvPr/>
+        </p:nvSpPr>
+        <p:spPr>
+          <a:xfrm>
+            <a:off x="4058655" y="2651760"/>
+            <a:ext cx="1571487" cy="1033271"/>
+          </a:xfrm>
+          <a:prstGeom prst="roundRect">
+            <a:avLst/>
+          </a:prstGeom>
+          <a:noFill/>
+          <a:ln w="19050">
+            <a:solidFill>
+              <a:srgbClr val="000000"/>
+            </a:solidFill>
+          </a:ln>
+          <a:effectLst/>
+        </p:spPr>
+        <p:style>
+          <a:lnRef idx="1">
+            <a:schemeClr val="accent1"/>
+          </a:lnRef>
+          <a:fillRef idx="3">
+            <a:schemeClr val="accent1"/>
+          </a:fillRef>
+          <a:effectRef idx="2">
+            <a:schemeClr val="accent1"/>
+          </a:effectRef>
+          <a:fontRef idx="minor">
+            <a:schemeClr val="lt1"/>
+          </a:fontRef>
+        </p:style>
+        <p:txBody>
+          <a:bodyPr rtlCol="0" anchor="ctr" wrap="square" lIns="73152" rIns="73152"/>
+          <a:lstStyle/>
+          <a:p>
+            <a:pPr algn="ctr"/>
+            <a:r>
+              <a:rPr sz="1300">
+                <a:solidFill>
+                  <a:srgbClr val="000000"/>
+                </a:solidFill>
+              </a:rPr>
+              <a:t>Embed</a:t>
+            </a:r>
+          </a:p>
+        </p:txBody>
+      </p:sp>
+      <p:sp>
+        <p:nvSpPr>
+          <p:cNvPr id="16" name="Right Arrow 15"/>
+          <p:cNvSpPr/>
+          <p:nvPr/>
+        </p:nvSpPr>
+        <p:spPr>
+          <a:xfrm>
+            <a:off x="5685007" y="3022091"/>
+            <a:ext cx="301752" cy="292608"/>
+          </a:xfrm>
+          <a:prstGeom prst="rightArrow">
+            <a:avLst/>
+          </a:prstGeom>
+          <a:solidFill>
+            <a:srgbClr val="000000"/>
+          </a:solidFill>
+          <a:ln>
+            <a:noFill/>
+          </a:ln>
+          <a:effectLst/>
+        </p:spPr>
+        <p:style>
+          <a:lnRef idx="1">
+            <a:schemeClr val="accent1"/>
+          </a:lnRef>
+          <a:fillRef idx="3">
+            <a:schemeClr val="accent1"/>
+          </a:fillRef>
+          <a:effectRef idx="2">
+            <a:schemeClr val="accent1"/>
+          </a:effectRef>
+          <a:fontRef idx="minor">
+            <a:schemeClr val="lt1"/>
+          </a:fontRef>
+        </p:style>
+        <p:txBody>
+          <a:bodyPr rtlCol="0" anchor="ctr"/>
+          <a:lstStyle/>
+          <a:p>
+            <a:pPr algn="ctr"/>
+          </a:p>
+        </p:txBody>
+      </p:sp>
+      <p:sp>
+        <p:nvSpPr>
+          <p:cNvPr id="17" name="Rounded Rectangle 16"/>
+          <p:cNvSpPr/>
+          <p:nvPr/>
+        </p:nvSpPr>
+        <p:spPr>
+          <a:xfrm>
+            <a:off x="6041623" y="2651760"/>
+            <a:ext cx="1571487" cy="1033271"/>
+          </a:xfrm>
+          <a:prstGeom prst="roundRect">
+            <a:avLst/>
+          </a:prstGeom>
+          <a:noFill/>
+          <a:ln w="19050">
+            <a:solidFill>
+              <a:srgbClr val="000000"/>
+            </a:solidFill>
+          </a:ln>
+          <a:effectLst/>
+        </p:spPr>
+        <p:style>
+          <a:lnRef idx="1">
+            <a:schemeClr val="accent1"/>
+          </a:lnRef>
+          <a:fillRef idx="3">
+            <a:schemeClr val="accent1"/>
+          </a:fillRef>
+          <a:effectRef idx="2">
+            <a:schemeClr val="accent1"/>
+          </a:effectRef>
+          <a:fontRef idx="minor">
+            <a:schemeClr val="lt1"/>
+          </a:fontRef>
+        </p:style>
+        <p:txBody>
+          <a:bodyPr rtlCol="0" anchor="ctr" wrap="square" lIns="73152" rIns="73152"/>
+          <a:lstStyle/>
+          <a:p>
+            <a:pPr algn="ctr"/>
+            <a:r>
+              <a:rPr sz="1300">
+                <a:solidFill>
+                  <a:srgbClr val="000000"/>
+                </a:solidFill>
+              </a:rPr>
+              <a:t>Nearest chunks</a:t>
+            </a:r>
+          </a:p>
+        </p:txBody>
+      </p:sp>
+      <p:sp>
+        <p:nvSpPr>
+          <p:cNvPr id="18" name="Right Arrow 17"/>
+          <p:cNvSpPr/>
+          <p:nvPr/>
+        </p:nvSpPr>
+        <p:spPr>
+          <a:xfrm>
+            <a:off x="7667975" y="3022091"/>
+            <a:ext cx="301752" cy="292608"/>
+          </a:xfrm>
+          <a:prstGeom prst="rightArrow">
+            <a:avLst/>
+          </a:prstGeom>
+          <a:solidFill>
+            <a:srgbClr val="000000"/>
+          </a:solidFill>
+          <a:ln>
+            <a:noFill/>
+          </a:ln>
+          <a:effectLst/>
+        </p:spPr>
+        <p:style>
+          <a:lnRef idx="1">
+            <a:schemeClr val="accent1"/>
+          </a:lnRef>
+          <a:fillRef idx="3">
+            <a:schemeClr val="accent1"/>
+          </a:fillRef>
+          <a:effectRef idx="2">
+            <a:schemeClr val="accent1"/>
+          </a:effectRef>
+          <a:fontRef idx="minor">
+            <a:schemeClr val="lt1"/>
+          </a:fontRef>
+        </p:style>
+        <p:txBody>
+          <a:bodyPr rtlCol="0" anchor="ctr"/>
+          <a:lstStyle/>
+          <a:p>
+            <a:pPr algn="ctr"/>
+          </a:p>
+        </p:txBody>
+      </p:sp>
+      <p:sp>
+        <p:nvSpPr>
+          <p:cNvPr id="19" name="Rounded Rectangle 18"/>
+          <p:cNvSpPr/>
+          <p:nvPr/>
+        </p:nvSpPr>
+        <p:spPr>
+          <a:xfrm>
+            <a:off x="8024591" y="2651760"/>
+            <a:ext cx="1571487" cy="1033271"/>
+          </a:xfrm>
+          <a:prstGeom prst="roundRect">
+            <a:avLst/>
+          </a:prstGeom>
+          <a:noFill/>
+          <a:ln w="19050">
+            <a:solidFill>
+              <a:srgbClr val="000000"/>
+            </a:solidFill>
+          </a:ln>
+          <a:effectLst/>
+        </p:spPr>
+        <p:style>
+          <a:lnRef idx="1">
+            <a:schemeClr val="accent1"/>
+          </a:lnRef>
+          <a:fillRef idx="3">
+            <a:schemeClr val="accent1"/>
+          </a:fillRef>
+          <a:effectRef idx="2">
+            <a:schemeClr val="accent1"/>
+          </a:effectRef>
+          <a:fontRef idx="minor">
+            <a:schemeClr val="lt1"/>
+          </a:fontRef>
+        </p:style>
+        <p:txBody>
+          <a:bodyPr rtlCol="0" anchor="ctr" wrap="square" lIns="73152" rIns="73152"/>
+          <a:lstStyle/>
+          <a:p>
+            <a:pPr algn="ctr"/>
+            <a:r>
+              <a:rPr sz="1300">
+                <a:solidFill>
+                  <a:srgbClr val="000000"/>
+                </a:solidFill>
+              </a:rPr>
+              <a:t>Model writes an answer from them</a:t>
+            </a:r>
+          </a:p>
+        </p:txBody>
+      </p:sp>
+      <p:sp>
+        <p:nvSpPr>
+          <p:cNvPr id="20" name="Right Arrow 19"/>
+          <p:cNvSpPr/>
+          <p:nvPr/>
+        </p:nvSpPr>
+        <p:spPr>
+          <a:xfrm>
+            <a:off x="9650943" y="3022091"/>
+            <a:ext cx="301752" cy="292608"/>
+          </a:xfrm>
+          <a:prstGeom prst="rightArrow">
+            <a:avLst/>
+          </a:prstGeom>
+          <a:solidFill>
+            <a:srgbClr val="000000"/>
+          </a:solidFill>
+          <a:ln>
+            <a:noFill/>
+          </a:ln>
+          <a:effectLst/>
+        </p:spPr>
+        <p:style>
+          <a:lnRef idx="1">
+            <a:schemeClr val="accent1"/>
+          </a:lnRef>
+          <a:fillRef idx="3">
+            <a:schemeClr val="accent1"/>
+          </a:fillRef>
+          <a:effectRef idx="2">
+            <a:schemeClr val="accent1"/>
+          </a:effectRef>
+          <a:fontRef idx="minor">
+            <a:schemeClr val="lt1"/>
+          </a:fontRef>
+        </p:style>
+        <p:txBody>
+          <a:bodyPr rtlCol="0" anchor="ctr"/>
+          <a:lstStyle/>
+          <a:p>
+            <a:pPr algn="ctr"/>
+          </a:p>
+        </p:txBody>
+      </p:sp>
+      <p:sp>
+        <p:nvSpPr>
+          <p:cNvPr id="21" name="Rounded Rectangle 20"/>
+          <p:cNvSpPr/>
+          <p:nvPr/>
+        </p:nvSpPr>
+        <p:spPr>
+          <a:xfrm>
+            <a:off x="10007559" y="2651760"/>
+            <a:ext cx="1571487" cy="1033271"/>
+          </a:xfrm>
+          <a:prstGeom prst="roundRect">
+            <a:avLst/>
+          </a:prstGeom>
+          <a:noFill/>
+          <a:ln w="19050">
+            <a:solidFill>
+              <a:srgbClr val="000000"/>
+            </a:solidFill>
+          </a:ln>
+          <a:effectLst/>
+        </p:spPr>
+        <p:style>
+          <a:lnRef idx="1">
+            <a:schemeClr val="accent1"/>
+          </a:lnRef>
+          <a:fillRef idx="3">
+            <a:schemeClr val="accent1"/>
+          </a:fillRef>
+          <a:effectRef idx="2">
+            <a:schemeClr val="accent1"/>
+          </a:effectRef>
+          <a:fontRef idx="minor">
+            <a:schemeClr val="lt1"/>
+          </a:fontRef>
+        </p:style>
+        <p:txBody>
+          <a:bodyPr rtlCol="0" anchor="ctr" wrap="square" lIns="73152" rIns="73152"/>
+          <a:lstStyle/>
+          <a:p>
+            <a:pPr algn="ctr"/>
+            <a:r>
+              <a:rPr sz="1300">
+                <a:solidFill>
+                  <a:srgbClr val="000000"/>
+                </a:solidFill>
+              </a:rPr>
+              <a:t>Show the answer, with citations</a:t>
+            </a:r>
+          </a:p>
+        </p:txBody>
+      </p:sp>
+      <p:sp>
+        <p:nvSpPr>
+          <p:cNvPr id="22" name="TextBox 21"/>
+          <p:cNvSpPr txBox="1"/>
+          <p:nvPr/>
+        </p:nvSpPr>
+        <p:spPr>
+          <a:xfrm>
+            <a:off x="612648" y="3959351"/>
+            <a:ext cx="1371600" cy="822960"/>
+          </a:xfrm>
+          <a:prstGeom prst="rect">
+            <a:avLst/>
+          </a:prstGeom>
+          <a:noFill/>
+        </p:spPr>
+        <p:txBody>
+          <a:bodyPr wrap="square" anchor="ctr">
+            <a:spAutoFit/>
+          </a:bodyPr>
+          <a:lstStyle/>
+          <a:p>
+            <a:r>
+              <a:rPr sz="1400" i="1"/>
+              <a:t>06 Recommend</a:t>
+            </a:r>
+          </a:p>
+        </p:txBody>
+      </p:sp>
+      <p:sp>
+        <p:nvSpPr>
+          <p:cNvPr id="23" name="Rounded Rectangle 22"/>
+          <p:cNvSpPr/>
+          <p:nvPr/>
+        </p:nvSpPr>
+        <p:spPr>
+          <a:xfrm>
+            <a:off x="2075688" y="3959351"/>
+            <a:ext cx="2067229" cy="822960"/>
+          </a:xfrm>
+          <a:prstGeom prst="roundRect">
+            <a:avLst/>
+          </a:prstGeom>
+          <a:noFill/>
+          <a:ln w="19050">
+            <a:solidFill>
+              <a:srgbClr val="000000"/>
+            </a:solidFill>
+          </a:ln>
+          <a:effectLst/>
+        </p:spPr>
+        <p:style>
+          <a:lnRef idx="1">
+            <a:schemeClr val="accent1"/>
+          </a:lnRef>
+          <a:fillRef idx="3">
+            <a:schemeClr val="accent1"/>
+          </a:fillRef>
+          <a:effectRef idx="2">
+            <a:schemeClr val="accent1"/>
+          </a:effectRef>
+          <a:fontRef idx="minor">
+            <a:schemeClr val="lt1"/>
+          </a:fontRef>
+        </p:style>
+        <p:txBody>
+          <a:bodyPr rtlCol="0" anchor="ctr" wrap="square" lIns="73152" rIns="73152"/>
+          <a:lstStyle/>
+          <a:p>
+            <a:pPr algn="ctr"/>
+            <a:r>
+              <a:rPr sz="1500">
+                <a:solidFill>
+                  <a:srgbClr val="000000"/>
+                </a:solidFill>
+              </a:rPr>
+              <a:t>The item on screen</a:t>
+            </a:r>
+          </a:p>
+        </p:txBody>
+      </p:sp>
+      <p:sp>
+        <p:nvSpPr>
+          <p:cNvPr id="24" name="Right Arrow 23"/>
+          <p:cNvSpPr/>
+          <p:nvPr/>
+        </p:nvSpPr>
+        <p:spPr>
+          <a:xfrm>
+            <a:off x="4197781" y="4224527"/>
+            <a:ext cx="301752" cy="292608"/>
+          </a:xfrm>
+          <a:prstGeom prst="rightArrow">
+            <a:avLst/>
+          </a:prstGeom>
+          <a:solidFill>
+            <a:srgbClr val="000000"/>
+          </a:solidFill>
+          <a:ln>
+            <a:noFill/>
+          </a:ln>
+          <a:effectLst/>
+        </p:spPr>
+        <p:style>
+          <a:lnRef idx="1">
+            <a:schemeClr val="accent1"/>
+          </a:lnRef>
+          <a:fillRef idx="3">
+            <a:schemeClr val="accent1"/>
+          </a:fillRef>
+          <a:effectRef idx="2">
+            <a:schemeClr val="accent1"/>
+          </a:effectRef>
+          <a:fontRef idx="minor">
+            <a:schemeClr val="lt1"/>
+          </a:fontRef>
+        </p:style>
+        <p:txBody>
+          <a:bodyPr rtlCol="0" anchor="ctr"/>
+          <a:lstStyle/>
+          <a:p>
+            <a:pPr algn="ctr"/>
+          </a:p>
+        </p:txBody>
+      </p:sp>
+      <p:sp>
+        <p:nvSpPr>
+          <p:cNvPr id="25" name="Rounded Rectangle 24"/>
+          <p:cNvSpPr/>
+          <p:nvPr/>
+        </p:nvSpPr>
+        <p:spPr>
+          <a:xfrm>
+            <a:off x="4554397" y="3959351"/>
+            <a:ext cx="2067229" cy="822960"/>
+          </a:xfrm>
+          <a:prstGeom prst="roundRect">
+            <a:avLst/>
+          </a:prstGeom>
+          <a:noFill/>
+          <a:ln w="19050">
+            <a:solidFill>
+              <a:srgbClr val="000000"/>
+            </a:solidFill>
+          </a:ln>
+          <a:effectLst/>
+        </p:spPr>
+        <p:style>
+          <a:lnRef idx="1">
+            <a:schemeClr val="accent1"/>
+          </a:lnRef>
+          <a:fillRef idx="3">
+            <a:schemeClr val="accent1"/>
+          </a:fillRef>
+          <a:effectRef idx="2">
+            <a:schemeClr val="accent1"/>
+          </a:effectRef>
+          <a:fontRef idx="minor">
+            <a:schemeClr val="lt1"/>
+          </a:fontRef>
+        </p:style>
+        <p:txBody>
+          <a:bodyPr rtlCol="0" anchor="ctr" wrap="square" lIns="73152" rIns="73152"/>
+          <a:lstStyle/>
+          <a:p>
+            <a:pPr algn="ctr"/>
+            <a:r>
+              <a:rPr sz="1500">
+                <a:solidFill>
+                  <a:srgbClr val="000000"/>
+                </a:solidFill>
+              </a:rPr>
+              <a:t>Its stored vector</a:t>
+            </a:r>
+          </a:p>
+        </p:txBody>
+      </p:sp>
+      <p:sp>
+        <p:nvSpPr>
+          <p:cNvPr id="26" name="Right Arrow 25"/>
+          <p:cNvSpPr/>
+          <p:nvPr/>
+        </p:nvSpPr>
+        <p:spPr>
+          <a:xfrm>
+            <a:off x="6676491" y="4224527"/>
+            <a:ext cx="301752" cy="292608"/>
+          </a:xfrm>
+          <a:prstGeom prst="rightArrow">
+            <a:avLst/>
+          </a:prstGeom>
+          <a:solidFill>
+            <a:srgbClr val="000000"/>
+          </a:solidFill>
+          <a:ln>
+            <a:noFill/>
+          </a:ln>
+          <a:effectLst/>
+        </p:spPr>
+        <p:style>
+          <a:lnRef idx="1">
+            <a:schemeClr val="accent1"/>
+          </a:lnRef>
+          <a:fillRef idx="3">
+            <a:schemeClr val="accent1"/>
+          </a:fillRef>
+          <a:effectRef idx="2">
+            <a:schemeClr val="accent1"/>
+          </a:effectRef>
+          <a:fontRef idx="minor">
+            <a:schemeClr val="lt1"/>
+          </a:fontRef>
+        </p:style>
+        <p:txBody>
+          <a:bodyPr rtlCol="0" anchor="ctr"/>
+          <a:lstStyle/>
+          <a:p>
+            <a:pPr algn="ctr"/>
+          </a:p>
+        </p:txBody>
+      </p:sp>
+      <p:sp>
+        <p:nvSpPr>
+          <p:cNvPr id="27" name="Rounded Rectangle 26"/>
+          <p:cNvSpPr/>
+          <p:nvPr/>
+        </p:nvSpPr>
+        <p:spPr>
+          <a:xfrm>
+            <a:off x="7033107" y="3959351"/>
+            <a:ext cx="2067229" cy="822960"/>
+          </a:xfrm>
+          <a:prstGeom prst="roundRect">
+            <a:avLst/>
+          </a:prstGeom>
+          <a:noFill/>
+          <a:ln w="19050">
+            <a:solidFill>
+              <a:srgbClr val="000000"/>
+            </a:solidFill>
+          </a:ln>
+          <a:effectLst/>
+        </p:spPr>
+        <p:style>
+          <a:lnRef idx="1">
+            <a:schemeClr val="accent1"/>
+          </a:lnRef>
+          <a:fillRef idx="3">
+            <a:schemeClr val="accent1"/>
+          </a:fillRef>
+          <a:effectRef idx="2">
+            <a:schemeClr val="accent1"/>
+          </a:effectRef>
+          <a:fontRef idx="minor">
+            <a:schemeClr val="lt1"/>
+          </a:fontRef>
+        </p:style>
+        <p:txBody>
+          <a:bodyPr rtlCol="0" anchor="ctr" wrap="square" lIns="73152" rIns="73152"/>
+          <a:lstStyle/>
+          <a:p>
+            <a:pPr algn="ctr"/>
+            <a:r>
+              <a:rPr sz="1500">
+                <a:solidFill>
+                  <a:srgbClr val="000000"/>
+                </a:solidFill>
+              </a:rPr>
+              <a:t>Nearest stored vectors</a:t>
+            </a:r>
+          </a:p>
+        </p:txBody>
+      </p:sp>
+      <p:sp>
+        <p:nvSpPr>
+          <p:cNvPr id="28" name="Right Arrow 27"/>
+          <p:cNvSpPr/>
+          <p:nvPr/>
+        </p:nvSpPr>
+        <p:spPr>
+          <a:xfrm>
+            <a:off x="9155201" y="4224527"/>
+            <a:ext cx="301752" cy="292608"/>
+          </a:xfrm>
+          <a:prstGeom prst="rightArrow">
+            <a:avLst/>
+          </a:prstGeom>
+          <a:solidFill>
+            <a:srgbClr val="000000"/>
+          </a:solidFill>
+          <a:ln>
+            <a:noFill/>
+          </a:ln>
+          <a:effectLst/>
+        </p:spPr>
+        <p:style>
+          <a:lnRef idx="1">
+            <a:schemeClr val="accent1"/>
+          </a:lnRef>
+          <a:fillRef idx="3">
+            <a:schemeClr val="accent1"/>
+          </a:fillRef>
+          <a:effectRef idx="2">
+            <a:schemeClr val="accent1"/>
+          </a:effectRef>
+          <a:fontRef idx="minor">
+            <a:schemeClr val="lt1"/>
+          </a:fontRef>
+        </p:style>
+        <p:txBody>
+          <a:bodyPr rtlCol="0" anchor="ctr"/>
+          <a:lstStyle/>
+          <a:p>
+            <a:pPr algn="ctr"/>
+          </a:p>
+        </p:txBody>
+      </p:sp>
+      <p:sp>
+        <p:nvSpPr>
+          <p:cNvPr id="29" name="Rounded Rectangle 28"/>
+          <p:cNvSpPr/>
+          <p:nvPr/>
+        </p:nvSpPr>
+        <p:spPr>
+          <a:xfrm>
+            <a:off x="9511817" y="3959351"/>
+            <a:ext cx="2067229" cy="822960"/>
+          </a:xfrm>
+          <a:prstGeom prst="roundRect">
+            <a:avLst/>
+          </a:prstGeom>
+          <a:noFill/>
+          <a:ln w="19050">
+            <a:solidFill>
+              <a:srgbClr val="000000"/>
+            </a:solidFill>
+          </a:ln>
+          <a:effectLst/>
+        </p:spPr>
+        <p:style>
+          <a:lnRef idx="1">
+            <a:schemeClr val="accent1"/>
+          </a:lnRef>
+          <a:fillRef idx="3">
+            <a:schemeClr val="accent1"/>
+          </a:fillRef>
+          <a:effectRef idx="2">
+            <a:schemeClr val="accent1"/>
+          </a:effectRef>
+          <a:fontRef idx="minor">
+            <a:schemeClr val="lt1"/>
+          </a:fontRef>
+        </p:style>
+        <p:txBody>
+          <a:bodyPr rtlCol="0" anchor="ctr" wrap="square" lIns="73152" rIns="73152"/>
+          <a:lstStyle/>
+          <a:p>
+            <a:pPr algn="ctr"/>
+            <a:r>
+              <a:rPr sz="1500">
+                <a:solidFill>
+                  <a:srgbClr val="000000"/>
+                </a:solidFill>
+              </a:rPr>
+              <a:t>Show the list</a:t>
             </a:r>
           </a:p>
         </p:txBody>
@@ -5528,7 +8739,7 @@
           <a:lstStyle/>
           <a:p>
             <a:r>
-              <a:t>04 · The Concept</a:t>
+              <a:t>04 · Semantic Search: The User Problem</a:t>
             </a:r>
           </a:p>
         </p:txBody>
@@ -5546,7 +8757,7 @@
         <p:spPr>
           <a:xfrm>
             <a:off x="612648" y="1600200"/>
-            <a:ext cx="10966399" cy="4800600"/>
+            <a:ext cx="10966399" cy="4892040"/>
           </a:xfrm>
         </p:spPr>
         <p:txBody>
@@ -5556,28 +8767,21 @@
             <a:pPr/>
             <a:r>
               <a:rPr sz="2000"/>
-              <a:t>Embed every trail description once; embed the query at search time; rank by cosine similarity</a:t>
+              <a:t>"dog-friendly waterfall hike, not too steep"</a:t>
             </a:r>
           </a:p>
           <a:p>
             <a:pPr/>
             <a:r>
               <a:rPr sz="2000"/>
-              <a:t>Cosine similarity is a few lines of code in any language</a:t>
+              <a:t>The catalog has a dozen matches. Keyword search returns almost nothing: no description says "not too steep." One says "a gentle grade shaded by cedars."</a:t>
             </a:r>
           </a:p>
           <a:p>
             <a:pPr/>
             <a:r>
               <a:rPr sz="2000"/>
-              <a:t>nomic-embed-text is small, free, local; 200 trails embed in seconds</a:t>
-            </a:r>
-          </a:p>
-          <a:p>
-            <a:pPr/>
-            <a:r>
-              <a:rPr sz="2000"/>
-              <a:t>The search box stays a search box. Users learn nothing new.</a:t>
+              <a:t>Three bad results, and the user goes back to asking strangers on Reddit</a:t>
             </a:r>
           </a:p>
         </p:txBody>
@@ -5621,7 +8825,7 @@
           <a:lstStyle/>
           <a:p>
             <a:r>
-              <a:t>04 · Demo: What to Watch</a:t>
+              <a:t>04 · The Concept</a:t>
             </a:r>
           </a:p>
         </p:txBody>
@@ -5639,7 +8843,7 @@
         <p:spPr>
           <a:xfrm>
             <a:off x="612648" y="1600200"/>
-            <a:ext cx="10966399" cy="4800600"/>
+            <a:ext cx="10966399" cy="4892040"/>
           </a:xfrm>
         </p:spPr>
         <p:txBody>
@@ -5649,42 +8853,28 @@
             <a:pPr/>
             <a:r>
               <a:rPr sz="2000"/>
-              <a:t>Keyword search over trails.json returns junk. That's the baseline.</a:t>
+              <a:t>Embed every trail description once; embed the query at search time; rank by cosine similarity</a:t>
             </a:r>
           </a:p>
           <a:p>
             <a:pPr/>
             <a:r>
               <a:rPr sz="2000"/>
-              <a:t>Embed one sentence and look at the raw float array. It's just numbers.</a:t>
+              <a:t>Cosine similarity is a few lines of code in any language</a:t>
             </a:r>
           </a:p>
           <a:p>
             <a:pPr/>
             <a:r>
               <a:rPr sz="2000"/>
-              <a:t>Embed the catalog and time it: under two seconds for the 30-trail slice</a:t>
+              <a:t>nomic-embed-text is small, free, local; 200 trails embed in seconds</a:t>
             </a:r>
           </a:p>
           <a:p>
             <a:pPr/>
             <a:r>
               <a:rPr sz="2000"/>
-              <a:t>Cosine similarity on screen: one visible method</a:t>
-            </a:r>
-          </a:p>
-          <a:p>
-            <a:pPr/>
-            <a:r>
-              <a:rPr sz="2000"/>
-              <a:t>Same query, semantic: the gentle shaded waterfall trails rise, scores visible</a:t>
-            </a:r>
-          </a:p>
-          <a:p>
-            <a:pPr/>
-            <a:r>
-              <a:rPr sz="2000"/>
-              <a:t>"somewhere quiet to take my kids": the top hit is Taft Point, beside a 3,000-foot drop</a:t>
+              <a:t>The search box stays a search box. Users learn nothing new.</a:t>
             </a:r>
           </a:p>
         </p:txBody>
@@ -5728,7 +8918,7 @@
           <a:lstStyle/>
           <a:p>
             <a:r>
-              <a:t>04 · Leadership Card</a:t>
+              <a:t>04 · How It Works</a:t>
             </a:r>
           </a:p>
         </p:txBody>
@@ -5745,8 +8935,8 @@
         </p:nvSpPr>
         <p:spPr>
           <a:xfrm>
-            <a:off x="612648" y="1600200"/>
-            <a:ext cx="10966399" cy="4800600"/>
+            <a:off x="612648" y="3959351"/>
+            <a:ext cx="10966399" cy="2532889"/>
           </a:xfrm>
         </p:spPr>
         <p:txBody>
@@ -5755,22 +8945,664 @@
           <a:p>
             <a:pPr/>
             <a:r>
-              <a:rPr sz="2000"/>
-              <a:t>When: any search box users complain about; any catalog where people describe what they want instead of naming it</a:t>
+              <a:rPr sz="1600"/>
+              <a:t>An embedding is a list of about 768 numbers. Text that means similar things lands close together.</a:t>
             </a:r>
           </a:p>
           <a:p>
             <a:pPr/>
             <a:r>
-              <a:rPr sz="2000"/>
-              <a:t>Cost: days to a prototype on an existing catalog. Embeddings cheap to free; the work is evaluation and tuning.</a:t>
+              <a:rPr sz="1600"/>
+              <a:t>No text is generated. The only model call turns text into numbers.</a:t>
             </a:r>
           </a:p>
           <a:p>
             <a:pPr/>
             <a:r>
-              <a:rPr sz="2000"/>
-              <a:t>"Our search finds what users mean, not just what they type."</a:t>
+              <a:rPr sz="1600"/>
+              <a:t>Cosine similarity is one method; a real store (pgvector, Azure AI Search) does the same math at scale</a:t>
+            </a:r>
+          </a:p>
+        </p:txBody>
+      </p:sp>
+      <p:sp>
+        <p:nvSpPr>
+          <p:cNvPr id="4" name="TextBox 3"/>
+          <p:cNvSpPr txBox="1"/>
+          <p:nvPr/>
+        </p:nvSpPr>
+        <p:spPr>
+          <a:xfrm>
+            <a:off x="612648" y="1554480"/>
+            <a:ext cx="1371600" cy="822960"/>
+          </a:xfrm>
+          <a:prstGeom prst="rect">
+            <a:avLst/>
+          </a:prstGeom>
+          <a:noFill/>
+        </p:spPr>
+        <p:txBody>
+          <a:bodyPr wrap="square" anchor="ctr">
+            <a:spAutoFit/>
+          </a:bodyPr>
+          <a:lstStyle/>
+          <a:p>
+            <a:r>
+              <a:rPr sz="1400" i="1"/>
+              <a:t>Index, once</a:t>
+            </a:r>
+          </a:p>
+        </p:txBody>
+      </p:sp>
+      <p:sp>
+        <p:nvSpPr>
+          <p:cNvPr id="5" name="Rounded Rectangle 4"/>
+          <p:cNvSpPr/>
+          <p:nvPr/>
+        </p:nvSpPr>
+        <p:spPr>
+          <a:xfrm>
+            <a:off x="2075688" y="1554480"/>
+            <a:ext cx="2893466" cy="822960"/>
+          </a:xfrm>
+          <a:prstGeom prst="roundRect">
+            <a:avLst/>
+          </a:prstGeom>
+          <a:noFill/>
+          <a:ln w="19050">
+            <a:solidFill>
+              <a:srgbClr val="000000"/>
+            </a:solidFill>
+          </a:ln>
+          <a:effectLst/>
+        </p:spPr>
+        <p:style>
+          <a:lnRef idx="1">
+            <a:schemeClr val="accent1"/>
+          </a:lnRef>
+          <a:fillRef idx="3">
+            <a:schemeClr val="accent1"/>
+          </a:fillRef>
+          <a:effectRef idx="2">
+            <a:schemeClr val="accent1"/>
+          </a:effectRef>
+          <a:fontRef idx="minor">
+            <a:schemeClr val="lt1"/>
+          </a:fontRef>
+        </p:style>
+        <p:txBody>
+          <a:bodyPr rtlCol="0" anchor="ctr" wrap="square" lIns="73152" rIns="73152"/>
+          <a:lstStyle/>
+          <a:p>
+            <a:pPr algn="ctr"/>
+            <a:r>
+              <a:rPr sz="1500">
+                <a:solidFill>
+                  <a:srgbClr val="000000"/>
+                </a:solidFill>
+              </a:rPr>
+              <a:t>30 trail descriptions</a:t>
+            </a:r>
+          </a:p>
+        </p:txBody>
+      </p:sp>
+      <p:sp>
+        <p:nvSpPr>
+          <p:cNvPr id="6" name="Right Arrow 5"/>
+          <p:cNvSpPr/>
+          <p:nvPr/>
+        </p:nvSpPr>
+        <p:spPr>
+          <a:xfrm>
+            <a:off x="5024018" y="1819656"/>
+            <a:ext cx="301752" cy="292608"/>
+          </a:xfrm>
+          <a:prstGeom prst="rightArrow">
+            <a:avLst/>
+          </a:prstGeom>
+          <a:solidFill>
+            <a:srgbClr val="000000"/>
+          </a:solidFill>
+          <a:ln>
+            <a:noFill/>
+          </a:ln>
+          <a:effectLst/>
+        </p:spPr>
+        <p:style>
+          <a:lnRef idx="1">
+            <a:schemeClr val="accent1"/>
+          </a:lnRef>
+          <a:fillRef idx="3">
+            <a:schemeClr val="accent1"/>
+          </a:fillRef>
+          <a:effectRef idx="2">
+            <a:schemeClr val="accent1"/>
+          </a:effectRef>
+          <a:fontRef idx="minor">
+            <a:schemeClr val="lt1"/>
+          </a:fontRef>
+        </p:style>
+        <p:txBody>
+          <a:bodyPr rtlCol="0" anchor="ctr"/>
+          <a:lstStyle/>
+          <a:p>
+            <a:pPr algn="ctr"/>
+          </a:p>
+        </p:txBody>
+      </p:sp>
+      <p:sp>
+        <p:nvSpPr>
+          <p:cNvPr id="7" name="Rounded Rectangle 6"/>
+          <p:cNvSpPr/>
+          <p:nvPr/>
+        </p:nvSpPr>
+        <p:spPr>
+          <a:xfrm>
+            <a:off x="5380634" y="1554480"/>
+            <a:ext cx="2893466" cy="822960"/>
+          </a:xfrm>
+          <a:prstGeom prst="roundRect">
+            <a:avLst/>
+          </a:prstGeom>
+          <a:noFill/>
+          <a:ln w="19050">
+            <a:solidFill>
+              <a:srgbClr val="000000"/>
+            </a:solidFill>
+          </a:ln>
+          <a:effectLst/>
+        </p:spPr>
+        <p:style>
+          <a:lnRef idx="1">
+            <a:schemeClr val="accent1"/>
+          </a:lnRef>
+          <a:fillRef idx="3">
+            <a:schemeClr val="accent1"/>
+          </a:fillRef>
+          <a:effectRef idx="2">
+            <a:schemeClr val="accent1"/>
+          </a:effectRef>
+          <a:fontRef idx="minor">
+            <a:schemeClr val="lt1"/>
+          </a:fontRef>
+        </p:style>
+        <p:txBody>
+          <a:bodyPr rtlCol="0" anchor="ctr" wrap="square" lIns="73152" rIns="73152"/>
+          <a:lstStyle/>
+          <a:p>
+            <a:pPr algn="ctr"/>
+            <a:r>
+              <a:rPr sz="1500">
+                <a:solidFill>
+                  <a:srgbClr val="000000"/>
+                </a:solidFill>
+              </a:rPr>
+              <a:t>nomic-embed-text</a:t>
+            </a:r>
+          </a:p>
+        </p:txBody>
+      </p:sp>
+      <p:sp>
+        <p:nvSpPr>
+          <p:cNvPr id="8" name="Right Arrow 7"/>
+          <p:cNvSpPr/>
+          <p:nvPr/>
+        </p:nvSpPr>
+        <p:spPr>
+          <a:xfrm>
+            <a:off x="8328964" y="1819656"/>
+            <a:ext cx="301752" cy="292608"/>
+          </a:xfrm>
+          <a:prstGeom prst="rightArrow">
+            <a:avLst/>
+          </a:prstGeom>
+          <a:solidFill>
+            <a:srgbClr val="000000"/>
+          </a:solidFill>
+          <a:ln>
+            <a:noFill/>
+          </a:ln>
+          <a:effectLst/>
+        </p:spPr>
+        <p:style>
+          <a:lnRef idx="1">
+            <a:schemeClr val="accent1"/>
+          </a:lnRef>
+          <a:fillRef idx="3">
+            <a:schemeClr val="accent1"/>
+          </a:fillRef>
+          <a:effectRef idx="2">
+            <a:schemeClr val="accent1"/>
+          </a:effectRef>
+          <a:fontRef idx="minor">
+            <a:schemeClr val="lt1"/>
+          </a:fontRef>
+        </p:style>
+        <p:txBody>
+          <a:bodyPr rtlCol="0" anchor="ctr"/>
+          <a:lstStyle/>
+          <a:p>
+            <a:pPr algn="ctr"/>
+          </a:p>
+        </p:txBody>
+      </p:sp>
+      <p:sp>
+        <p:nvSpPr>
+          <p:cNvPr id="9" name="Rounded Rectangle 8"/>
+          <p:cNvSpPr/>
+          <p:nvPr/>
+        </p:nvSpPr>
+        <p:spPr>
+          <a:xfrm>
+            <a:off x="8685580" y="1554480"/>
+            <a:ext cx="2893466" cy="822960"/>
+          </a:xfrm>
+          <a:prstGeom prst="roundRect">
+            <a:avLst/>
+          </a:prstGeom>
+          <a:noFill/>
+          <a:ln w="19050">
+            <a:solidFill>
+              <a:srgbClr val="000000"/>
+            </a:solidFill>
+          </a:ln>
+          <a:effectLst/>
+        </p:spPr>
+        <p:style>
+          <a:lnRef idx="1">
+            <a:schemeClr val="accent1"/>
+          </a:lnRef>
+          <a:fillRef idx="3">
+            <a:schemeClr val="accent1"/>
+          </a:fillRef>
+          <a:effectRef idx="2">
+            <a:schemeClr val="accent1"/>
+          </a:effectRef>
+          <a:fontRef idx="minor">
+            <a:schemeClr val="lt1"/>
+          </a:fontRef>
+        </p:style>
+        <p:txBody>
+          <a:bodyPr rtlCol="0" anchor="ctr" wrap="square" lIns="73152" rIns="73152"/>
+          <a:lstStyle/>
+          <a:p>
+            <a:pPr algn="ctr"/>
+            <a:r>
+              <a:rPr sz="1500">
+                <a:solidFill>
+                  <a:srgbClr val="000000"/>
+                </a:solidFill>
+              </a:rPr>
+              <a:t>One vector per trail, kept in memory</a:t>
+            </a:r>
+          </a:p>
+        </p:txBody>
+      </p:sp>
+      <p:sp>
+        <p:nvSpPr>
+          <p:cNvPr id="10" name="TextBox 9"/>
+          <p:cNvSpPr txBox="1"/>
+          <p:nvPr/>
+        </p:nvSpPr>
+        <p:spPr>
+          <a:xfrm>
+            <a:off x="612648" y="2651760"/>
+            <a:ext cx="1371600" cy="1033271"/>
+          </a:xfrm>
+          <a:prstGeom prst="rect">
+            <a:avLst/>
+          </a:prstGeom>
+          <a:noFill/>
+        </p:spPr>
+        <p:txBody>
+          <a:bodyPr wrap="square" anchor="ctr">
+            <a:spAutoFit/>
+          </a:bodyPr>
+          <a:lstStyle/>
+          <a:p>
+            <a:r>
+              <a:rPr sz="1400" i="1"/>
+              <a:t>Search, each query</a:t>
+            </a:r>
+          </a:p>
+        </p:txBody>
+      </p:sp>
+      <p:sp>
+        <p:nvSpPr>
+          <p:cNvPr id="11" name="Rounded Rectangle 10"/>
+          <p:cNvSpPr/>
+          <p:nvPr/>
+        </p:nvSpPr>
+        <p:spPr>
+          <a:xfrm>
+            <a:off x="2075688" y="2651760"/>
+            <a:ext cx="2067229" cy="1033271"/>
+          </a:xfrm>
+          <a:prstGeom prst="roundRect">
+            <a:avLst/>
+          </a:prstGeom>
+          <a:noFill/>
+          <a:ln w="19050">
+            <a:solidFill>
+              <a:srgbClr val="000000"/>
+            </a:solidFill>
+          </a:ln>
+          <a:effectLst/>
+        </p:spPr>
+        <p:style>
+          <a:lnRef idx="1">
+            <a:schemeClr val="accent1"/>
+          </a:lnRef>
+          <a:fillRef idx="3">
+            <a:schemeClr val="accent1"/>
+          </a:fillRef>
+          <a:effectRef idx="2">
+            <a:schemeClr val="accent1"/>
+          </a:effectRef>
+          <a:fontRef idx="minor">
+            <a:schemeClr val="lt1"/>
+          </a:fontRef>
+        </p:style>
+        <p:txBody>
+          <a:bodyPr rtlCol="0" anchor="ctr" wrap="square" lIns="73152" rIns="73152"/>
+          <a:lstStyle/>
+          <a:p>
+            <a:pPr algn="ctr"/>
+            <a:r>
+              <a:rPr sz="1500">
+                <a:solidFill>
+                  <a:srgbClr val="000000"/>
+                </a:solidFill>
+              </a:rPr>
+              <a:t>"quiet waterfall hike for kids"</a:t>
+            </a:r>
+          </a:p>
+        </p:txBody>
+      </p:sp>
+      <p:sp>
+        <p:nvSpPr>
+          <p:cNvPr id="12" name="Right Arrow 11"/>
+          <p:cNvSpPr/>
+          <p:nvPr/>
+        </p:nvSpPr>
+        <p:spPr>
+          <a:xfrm>
+            <a:off x="4197781" y="3022091"/>
+            <a:ext cx="301752" cy="292608"/>
+          </a:xfrm>
+          <a:prstGeom prst="rightArrow">
+            <a:avLst/>
+          </a:prstGeom>
+          <a:solidFill>
+            <a:srgbClr val="000000"/>
+          </a:solidFill>
+          <a:ln>
+            <a:noFill/>
+          </a:ln>
+          <a:effectLst/>
+        </p:spPr>
+        <p:style>
+          <a:lnRef idx="1">
+            <a:schemeClr val="accent1"/>
+          </a:lnRef>
+          <a:fillRef idx="3">
+            <a:schemeClr val="accent1"/>
+          </a:fillRef>
+          <a:effectRef idx="2">
+            <a:schemeClr val="accent1"/>
+          </a:effectRef>
+          <a:fontRef idx="minor">
+            <a:schemeClr val="lt1"/>
+          </a:fontRef>
+        </p:style>
+        <p:txBody>
+          <a:bodyPr rtlCol="0" anchor="ctr"/>
+          <a:lstStyle/>
+          <a:p>
+            <a:pPr algn="ctr"/>
+          </a:p>
+        </p:txBody>
+      </p:sp>
+      <p:sp>
+        <p:nvSpPr>
+          <p:cNvPr id="13" name="Rounded Rectangle 12"/>
+          <p:cNvSpPr/>
+          <p:nvPr/>
+        </p:nvSpPr>
+        <p:spPr>
+          <a:xfrm>
+            <a:off x="4554397" y="2651760"/>
+            <a:ext cx="2067229" cy="1033271"/>
+          </a:xfrm>
+          <a:prstGeom prst="roundRect">
+            <a:avLst/>
+          </a:prstGeom>
+          <a:noFill/>
+          <a:ln w="19050">
+            <a:solidFill>
+              <a:srgbClr val="000000"/>
+            </a:solidFill>
+          </a:ln>
+          <a:effectLst/>
+        </p:spPr>
+        <p:style>
+          <a:lnRef idx="1">
+            <a:schemeClr val="accent1"/>
+          </a:lnRef>
+          <a:fillRef idx="3">
+            <a:schemeClr val="accent1"/>
+          </a:fillRef>
+          <a:effectRef idx="2">
+            <a:schemeClr val="accent1"/>
+          </a:effectRef>
+          <a:fontRef idx="minor">
+            <a:schemeClr val="lt1"/>
+          </a:fontRef>
+        </p:style>
+        <p:txBody>
+          <a:bodyPr rtlCol="0" anchor="ctr" wrap="square" lIns="73152" rIns="73152"/>
+          <a:lstStyle/>
+          <a:p>
+            <a:pPr algn="ctr"/>
+            <a:r>
+              <a:rPr sz="1500">
+                <a:solidFill>
+                  <a:srgbClr val="000000"/>
+                </a:solidFill>
+              </a:rPr>
+              <a:t>nomic-embed-text</a:t>
+            </a:r>
+          </a:p>
+        </p:txBody>
+      </p:sp>
+      <p:sp>
+        <p:nvSpPr>
+          <p:cNvPr id="14" name="Right Arrow 13"/>
+          <p:cNvSpPr/>
+          <p:nvPr/>
+        </p:nvSpPr>
+        <p:spPr>
+          <a:xfrm>
+            <a:off x="6676491" y="3022091"/>
+            <a:ext cx="301752" cy="292608"/>
+          </a:xfrm>
+          <a:prstGeom prst="rightArrow">
+            <a:avLst/>
+          </a:prstGeom>
+          <a:solidFill>
+            <a:srgbClr val="000000"/>
+          </a:solidFill>
+          <a:ln>
+            <a:noFill/>
+          </a:ln>
+          <a:effectLst/>
+        </p:spPr>
+        <p:style>
+          <a:lnRef idx="1">
+            <a:schemeClr val="accent1"/>
+          </a:lnRef>
+          <a:fillRef idx="3">
+            <a:schemeClr val="accent1"/>
+          </a:fillRef>
+          <a:effectRef idx="2">
+            <a:schemeClr val="accent1"/>
+          </a:effectRef>
+          <a:fontRef idx="minor">
+            <a:schemeClr val="lt1"/>
+          </a:fontRef>
+        </p:style>
+        <p:txBody>
+          <a:bodyPr rtlCol="0" anchor="ctr"/>
+          <a:lstStyle/>
+          <a:p>
+            <a:pPr algn="ctr"/>
+          </a:p>
+        </p:txBody>
+      </p:sp>
+      <p:sp>
+        <p:nvSpPr>
+          <p:cNvPr id="15" name="Rounded Rectangle 14"/>
+          <p:cNvSpPr/>
+          <p:nvPr/>
+        </p:nvSpPr>
+        <p:spPr>
+          <a:xfrm>
+            <a:off x="7033107" y="2651760"/>
+            <a:ext cx="2067229" cy="1033271"/>
+          </a:xfrm>
+          <a:prstGeom prst="roundRect">
+            <a:avLst/>
+          </a:prstGeom>
+          <a:noFill/>
+          <a:ln w="19050">
+            <a:solidFill>
+              <a:srgbClr val="000000"/>
+            </a:solidFill>
+          </a:ln>
+          <a:effectLst/>
+        </p:spPr>
+        <p:style>
+          <a:lnRef idx="1">
+            <a:schemeClr val="accent1"/>
+          </a:lnRef>
+          <a:fillRef idx="3">
+            <a:schemeClr val="accent1"/>
+          </a:fillRef>
+          <a:effectRef idx="2">
+            <a:schemeClr val="accent1"/>
+          </a:effectRef>
+          <a:fontRef idx="minor">
+            <a:schemeClr val="lt1"/>
+          </a:fontRef>
+        </p:style>
+        <p:txBody>
+          <a:bodyPr rtlCol="0" anchor="ctr" wrap="square" lIns="73152" rIns="73152"/>
+          <a:lstStyle/>
+          <a:p>
+            <a:pPr algn="ctr"/>
+            <a:r>
+              <a:rPr sz="1500">
+                <a:solidFill>
+                  <a:srgbClr val="000000"/>
+                </a:solidFill>
+              </a:rPr>
+              <a:t>Cosine similarity against every stored vector</a:t>
+            </a:r>
+          </a:p>
+        </p:txBody>
+      </p:sp>
+      <p:sp>
+        <p:nvSpPr>
+          <p:cNvPr id="16" name="Right Arrow 15"/>
+          <p:cNvSpPr/>
+          <p:nvPr/>
+        </p:nvSpPr>
+        <p:spPr>
+          <a:xfrm>
+            <a:off x="9155201" y="3022091"/>
+            <a:ext cx="301752" cy="292608"/>
+          </a:xfrm>
+          <a:prstGeom prst="rightArrow">
+            <a:avLst/>
+          </a:prstGeom>
+          <a:solidFill>
+            <a:srgbClr val="000000"/>
+          </a:solidFill>
+          <a:ln>
+            <a:noFill/>
+          </a:ln>
+          <a:effectLst/>
+        </p:spPr>
+        <p:style>
+          <a:lnRef idx="1">
+            <a:schemeClr val="accent1"/>
+          </a:lnRef>
+          <a:fillRef idx="3">
+            <a:schemeClr val="accent1"/>
+          </a:fillRef>
+          <a:effectRef idx="2">
+            <a:schemeClr val="accent1"/>
+          </a:effectRef>
+          <a:fontRef idx="minor">
+            <a:schemeClr val="lt1"/>
+          </a:fontRef>
+        </p:style>
+        <p:txBody>
+          <a:bodyPr rtlCol="0" anchor="ctr"/>
+          <a:lstStyle/>
+          <a:p>
+            <a:pPr algn="ctr"/>
+          </a:p>
+        </p:txBody>
+      </p:sp>
+      <p:sp>
+        <p:nvSpPr>
+          <p:cNvPr id="17" name="Rounded Rectangle 16"/>
+          <p:cNvSpPr/>
+          <p:nvPr/>
+        </p:nvSpPr>
+        <p:spPr>
+          <a:xfrm>
+            <a:off x="9511817" y="2651760"/>
+            <a:ext cx="2067229" cy="1033271"/>
+          </a:xfrm>
+          <a:prstGeom prst="roundRect">
+            <a:avLst/>
+          </a:prstGeom>
+          <a:noFill/>
+          <a:ln w="19050">
+            <a:solidFill>
+              <a:srgbClr val="000000"/>
+            </a:solidFill>
+          </a:ln>
+          <a:effectLst/>
+        </p:spPr>
+        <p:style>
+          <a:lnRef idx="1">
+            <a:schemeClr val="accent1"/>
+          </a:lnRef>
+          <a:fillRef idx="3">
+            <a:schemeClr val="accent1"/>
+          </a:fillRef>
+          <a:effectRef idx="2">
+            <a:schemeClr val="accent1"/>
+          </a:effectRef>
+          <a:fontRef idx="minor">
+            <a:schemeClr val="lt1"/>
+          </a:fontRef>
+        </p:style>
+        <p:txBody>
+          <a:bodyPr rtlCol="0" anchor="ctr" wrap="square" lIns="73152" rIns="73152"/>
+          <a:lstStyle/>
+          <a:p>
+            <a:pPr algn="ctr"/>
+            <a:r>
+              <a:rPr sz="1500">
+                <a:solidFill>
+                  <a:srgbClr val="000000"/>
+                </a:solidFill>
+              </a:rPr>
+              <a:t>Top 5, with scores</a:t>
             </a:r>
           </a:p>
         </p:txBody>
@@ -5814,7 +9646,7 @@
           <a:lstStyle/>
           <a:p>
             <a:r>
-              <a:t>05 · RAG: The User Problem</a:t>
+              <a:t>04 · Demo: What to Watch</a:t>
             </a:r>
           </a:p>
         </p:txBody>
@@ -5832,7 +9664,7 @@
         <p:spPr>
           <a:xfrm>
             <a:off x="612648" y="1600200"/>
-            <a:ext cx="10966399" cy="4800600"/>
+            <a:ext cx="10966399" cy="4892040"/>
           </a:xfrm>
         </p:spPr>
         <p:txBody>
@@ -5842,28 +9674,42 @@
             <a:pPr/>
             <a:r>
               <a:rPr sz="2000"/>
-              <a:t>"Can I have a campfire at Sperry Chalet in September?"</a:t>
+              <a:t>Keyword search over trails.json returns junk. That's the baseline.</a:t>
             </a:r>
           </a:p>
           <a:p>
             <a:pPr/>
             <a:r>
               <a:rPr sz="2000"/>
-              <a:t>The answer exists, in paragraph four of a 12-page regulations document nobody will read</a:t>
+              <a:t>Embed one sentence and look at the raw float array. It's just numbers.</a:t>
             </a:r>
           </a:p>
           <a:p>
             <a:pPr/>
             <a:r>
               <a:rPr sz="2000"/>
-              <a:t>Search returns the document, not the answer. A plain chatbot answers fluently and makes it up.</a:t>
+              <a:t>Embed the catalog and time it: under two seconds for the 30-trail slice</a:t>
             </a:r>
           </a:p>
           <a:p>
             <a:pPr/>
             <a:r>
               <a:rPr sz="2000"/>
-              <a:t>A confidently wrong answer about fire regulations is worse than no answer</a:t>
+              <a:t>Cosine similarity on screen: one visible method</a:t>
+            </a:r>
+          </a:p>
+          <a:p>
+            <a:pPr/>
+            <a:r>
+              <a:rPr sz="2000"/>
+              <a:t>Same query, semantic: the gentle shaded waterfall trails rise, scores visible</a:t>
+            </a:r>
+          </a:p>
+          <a:p>
+            <a:pPr/>
+            <a:r>
+              <a:rPr sz="2000"/>
+              <a:t>"somewhere quiet to take my kids": the top hit is Taft Point, beside a 3,000-foot drop</a:t>
             </a:r>
           </a:p>
         </p:txBody>
@@ -5907,7 +9753,7 @@
           <a:lstStyle/>
           <a:p>
             <a:r>
-              <a:t>05 · The Concept</a:t>
+              <a:t>04 · Leadership Card</a:t>
             </a:r>
           </a:p>
         </p:txBody>
@@ -5925,7 +9771,7 @@
         <p:spPr>
           <a:xfrm>
             <a:off x="612648" y="1600200"/>
-            <a:ext cx="10966399" cy="4800600"/>
+            <a:ext cx="10966399" cy="4892040"/>
           </a:xfrm>
         </p:spPr>
         <p:txBody>
@@ -5935,21 +9781,21 @@
             <a:pPr/>
             <a:r>
               <a:rPr sz="2000"/>
-              <a:t>Feature 04's retrieval bolted onto generation: "Answer using only this context. If it doesn't cover the question, say so. Cite the source."</a:t>
+              <a:t>When: any search box users complain about; any catalog where people describe what they want instead of naming it</a:t>
             </a:r>
           </a:p>
           <a:p>
             <a:pPr/>
             <a:r>
               <a:rPr sz="2000"/>
-              <a:t>Three mechanics: chunking, retrieval (embeddings plus a lexical signal it turns out to need), grounded prompting</a:t>
+              <a:t>Cost: days to a prototype on an existing catalog. Embeddings cheap to free; the work is evaluation and tuning.</a:t>
             </a:r>
           </a:p>
           <a:p>
             <a:pPr/>
             <a:r>
               <a:rPr sz="2000"/>
-              <a:t>A fourth that's easy to leave out: tell the model what "now" is</a:t>
+              <a:t>"Our search finds what users mean, not just what they type."</a:t>
             </a:r>
           </a:p>
         </p:txBody>

--- a/docs/slides/pptx/M2-finding.pptx
+++ b/docs/slides/pptx/M2-finding.pptx
@@ -2313,7 +2313,7 @@
           <a:lstStyle/>
           <a:p>
             <a:r>
-              <a:t>Two minutes, one row per advance. This is the one slide most people photograph. Recommendations make no model call at request time, and 05 and 06 literally import 04's search code. If someone asks "is RAG just search," the honest answer is "search plus a model that reads the results," and this picture shows it.</a:t>
+              <a:t>Row two, RAG: the same first half, then a model writes an answer from the nearest chunks, with citations.</a:t>
             </a:r>
           </a:p>
         </p:txBody>
@@ -2383,7 +2383,7 @@
           <a:lstStyle/>
           <a:p>
             <a:r>
-              <a:t>Two minutes, one row per advance. This is the one slide most people photograph. Recommendations make no model call at request time, and 05 and 06 literally import 04's search code. If someone asks "is RAG just search," the honest answer is "search plus a model that reads the results," and this picture shows it.</a:t>
+              <a:t>Row three, recommendations: the item on screen already has a vector; find its neighbors. No model call at request time.</a:t>
             </a:r>
           </a:p>
         </p:txBody>
@@ -2453,7 +2453,7 @@
           <a:lstStyle/>
           <a:p>
             <a:r>
-              <a:t>Two minutes, one row per advance. This is the one slide most people photograph. Recommendations make no model call at request time, and 05 and 06 literally import 04's search code. If someone asks "is RAG just search," the honest answer is "search plus a model that reads the results," and this picture shows it.</a:t>
+              <a:t>All three: embed, then find the nearest. 05 and 06 literally import 04's search code.</a:t>
             </a:r>
           </a:p>
         </p:txBody>
@@ -2523,7 +2523,7 @@
           <a:lstStyle/>
           <a:p>
             <a:r>
-              <a:t>Two minutes, one row per advance. This is the one slide most people photograph. Recommendations make no model call at request time, and 05 and 06 literally import 04's search code. If someone asks "is RAG just search," the honest answer is "search plus a model that reads the results," and this picture shows it.</a:t>
+              <a:t>If someone asks "is RAG just search," the honest answer is "search plus a model that reads the results," and this picture shows it.</a:t>
             </a:r>
           </a:p>
         </p:txBody>
@@ -2593,7 +2593,7 @@
           <a:lstStyle/>
           <a:p>
             <a:r>
-              <a:t>Two minutes, one row per advance. This is the one slide most people photograph. Recommendations make no model call at request time, and 05 and 06 literally import 04's search code. If someone asks "is RAG just search," the honest answer is "search plus a model that reads the results," and this picture shows it.</a:t>
+              <a:t>Recommendations swap the query for an item, and nothing else changes.</a:t>
             </a:r>
           </a:p>
         </p:txBody>
@@ -2803,12 +2803,7 @@
           <a:lstStyle/>
           <a:p>
             <a:r>
-              <a:t>The only model call turns text into numbers; cosine similarity is a few lines of code, and the search box stays a search box. Show the raw float array once in the demo so the word "vector" stops being magic.</a:t>
-            </a:r>
-          </a:p>
-          <a:p>
-            <a:r>
-              <a:t>Foundation for the rest of the day: 05, 06, and 08 reuse the idea, and 06 and 08 reuse the actual vectors.</a:t>
+              <a:t>Index, once: thirty trail descriptions through nomic-embed-text, one vector per trail, kept in memory. That happens at startup, not per search.</a:t>
             </a:r>
           </a:p>
         </p:txBody>
@@ -2878,12 +2873,7 @@
           <a:lstStyle/>
           <a:p>
             <a:r>
-              <a:t>The only model call turns text into numbers; cosine similarity is a few lines of code, and the search box stays a search box. Show the raw float array once in the demo so the word "vector" stops being magic.</a:t>
-            </a:r>
-          </a:p>
-          <a:p>
-            <a:r>
-              <a:t>Foundation for the rest of the day: 05, 06, and 08 reuse the idea, and 06 and 08 reuse the actual vectors.</a:t>
+              <a:t>Search, each query: embed the query the same way, cosine similarity against every stored vector, top five with scores. The only model call turns text into numbers.</a:t>
             </a:r>
           </a:p>
         </p:txBody>
@@ -2953,12 +2943,7 @@
           <a:lstStyle/>
           <a:p>
             <a:r>
-              <a:t>The only model call turns text into numbers; cosine similarity is a few lines of code, and the search box stays a search box. Show the raw float array once in the demo so the word "vector" stops being magic.</a:t>
-            </a:r>
-          </a:p>
-          <a:p>
-            <a:r>
-              <a:t>Foundation for the rest of the day: 05, 06, and 08 reuse the idea, and 06 and 08 reuse the actual vectors.</a:t>
+              <a:t>About 768 numbers per text, and similar meaning lands close. Show the raw float array once in the demo so the word "vector" stops being magic.</a:t>
             </a:r>
           </a:p>
         </p:txBody>
@@ -3028,12 +3013,7 @@
           <a:lstStyle/>
           <a:p>
             <a:r>
-              <a:t>The only model call turns text into numbers; cosine similarity is a few lines of code, and the search box stays a search box. Show the raw float array once in the demo so the word "vector" stops being magic.</a:t>
-            </a:r>
-          </a:p>
-          <a:p>
-            <a:r>
-              <a:t>Foundation for the rest of the day: 05, 06, and 08 reuse the idea, and 06 and 08 reuse the actual vectors.</a:t>
+              <a:t>Nothing is generated. Cosine similarity is a few lines of code, and the search box stays a search box.</a:t>
             </a:r>
           </a:p>
         </p:txBody>
@@ -3103,12 +3083,7 @@
           <a:lstStyle/>
           <a:p>
             <a:r>
-              <a:t>The only model call turns text into numbers; cosine similarity is a few lines of code, and the search box stays a search box. Show the raw float array once in the demo so the word "vector" stops being magic.</a:t>
-            </a:r>
-          </a:p>
-          <a:p>
-            <a:r>
-              <a:t>Foundation for the rest of the day: 05, 06, and 08 reuse the idea, and 06 and 08 reuse the actual vectors.</a:t>
+              <a:t>pgvector or Azure AI Search is the same math at scale. Foundation for the rest of the day: 05, 06, and 08 reuse the idea, and 06 and 08 reuse the actual vectors.</a:t>
             </a:r>
           </a:p>
         </p:txBody>
@@ -3178,69 +3153,120 @@
           <a:lstStyle/>
           <a:p>
             <a:r>
-              <a:t>Taft Point is a perfect topical match and terrible advice, because embeddings capture what a text is about and not whether it suits the asker. Note the scores: this query tops out near 0.49 vs 0.77 for query one. That number is what a score floor keys on. The fix is metadata filters and a floor rather than a better model.</a:t>
-            </a:r>
-          </a:p>
-          <a:p>
-            <a:r>
-              <a:t>Demo script (~8 min; step 6 is the first cut):</a:t>
-            </a:r>
-          </a:p>
-          <a:p>
-            <a:r>
-              <a:t>1. Run the "dog-friendly waterfall hike, not too steep" query against naive keyword search over </a:t>
+              <a:t>~8 min · Terminal 2 · </a:t>
             </a:r>
             <a:r>
               <a:rPr>
                 <a:latin typeface="Consolas"/>
               </a:rPr>
-              <a:t>data/trails-slice.json</a:t>
-            </a:r>
-            <a:r>
-              <a:t> and get junk results. That's today's baseline.</a:t>
-            </a:r>
-          </a:p>
-          <a:p>
-            <a:r>
-              <a:t>2. Show what an embedding is: embed one sentence via Microsoft.Extensions.AI's </a:t>
+              <a:t>cd modules/M2-finding/F04-semantic-search/dotnet</a:t>
+            </a:r>
+          </a:p>
+          <a:p>
+            <a:r>
+              <a:t>Files: </a:t>
             </a:r>
             <a:r>
               <a:rPr>
                 <a:latin typeface="Consolas"/>
               </a:rPr>
-              <a:t>IEmbeddingGenerator</a:t>
-            </a:r>
-            <a:r>
-              <a:t> against Ollama and look at the raw float array on screen for a moment, because it is worth seeing that an embedding is nothing more than a list of numbers.</a:t>
-            </a:r>
-          </a:p>
-          <a:p>
-            <a:r>
-              <a:t>3. Embed the trail catalog in a loop and time it live. The checked-in demo embeds the 30-trail slice in </a:t>
+              <a:t>trails-slice.json</a:t>
+            </a:r>
+            <a:r>
+              <a:t> = 30 trails · </a:t>
             </a:r>
             <a:r>
               <a:rPr>
                 <a:latin typeface="Consolas"/>
               </a:rPr>
-              <a:t>data/trails-slice.json</a:t>
-            </a:r>
-            <a:r>
-              <a:t> in under two seconds. The point lands: seconds, not minutes, and it happens once at startup rather than per search.</a:t>
-            </a:r>
-          </a:p>
-          <a:p>
-            <a:r>
-              <a:t>4. Write cosine similarity on screen; it fits in one visible method, which surprises people.</a:t>
-            </a:r>
-          </a:p>
-          <a:p>
-            <a:r>
-              <a:t>5. Re-run the same query semantically. The payoff: the gentle shaded waterfall trails rise to the top, with the similarity scores visible next to each hit.</a:t>
-            </a:r>
-          </a:p>
-          <a:p>
-            <a:r>
-              <a:t>6. Show one more query with zero keyword overlap ("somewhere quiet to take my kids"), which proves it isn't a fluke and then hands you the feature's best moment. The top hit is Taft Point, whose own description warns that the ground gives no second chances beside a 3,000-foot drop. It is a perfect topical match and terrible advice. Say what that means: embeddings capture what text is about, not whether it's suitable, and the fix is metadata filters and a score floor, not a better model. Note that everything ran locally, and that the scores for this query top out near 0.49 against 0.77 for query one, which is the number a score floor would key on.</a:t>
+              <a:t>queries.json</a:t>
+            </a:r>
+            <a:r>
+              <a:t> = the three demo queries · </a:t>
+            </a:r>
+            <a:r>
+              <a:rPr>
+                <a:latin typeface="Consolas"/>
+              </a:rPr>
+              <a:t>embeddings.json</a:t>
+            </a:r>
+            <a:r>
+              <a:t> = cache, delete to embed live</a:t>
+            </a:r>
+          </a:p>
+          <a:p>
+            <a:r>
+              <a:t>Args: the query, in plain words; none = "dog-friendly waterfall hike, not too steep"</a:t>
+            </a:r>
+          </a:p>
+          <a:p>
+            <a:r>
+              <a:t>1. Before: </a:t>
+            </a:r>
+            <a:r>
+              <a:rPr>
+                <a:latin typeface="Consolas"/>
+              </a:rPr>
+              <a:t>cd starter &amp;&amp; dotnet run</a:t>
+            </a:r>
+            <a:r>
+              <a:t>. Keyword search. Junk.</a:t>
+            </a:r>
+          </a:p>
+          <a:p>
+            <a:r>
+              <a:t>2. After: </a:t>
+            </a:r>
+            <a:r>
+              <a:rPr>
+                <a:latin typeface="Consolas"/>
+              </a:rPr>
+              <a:t>cd ../complete &amp;&amp; rm -f embeddings.json &amp;&amp; dotnet run</a:t>
+            </a:r>
+            <a:r>
+              <a:t>. 30 trails embedded in under 2 s, same query. Right trails, scores beside them. Show </a:t>
+            </a:r>
+            <a:r>
+              <a:rPr>
+                <a:latin typeface="Consolas"/>
+              </a:rPr>
+              <a:t>queryVector</a:t>
+            </a:r>
+            <a:r>
+              <a:t> in </a:t>
+            </a:r>
+            <a:r>
+              <a:rPr>
+                <a:latin typeface="Consolas"/>
+              </a:rPr>
+              <a:t>Program.cs</a:t>
+            </a:r>
+            <a:r>
+              <a:t>: 768 floats.</a:t>
+            </a:r>
+          </a:p>
+          <a:p>
+            <a:r>
+              <a:t>3. Show the cosine method. One screen.</a:t>
+            </a:r>
+          </a:p>
+          <a:p>
+            <a:r>
+              <a:t>4. </a:t>
+            </a:r>
+            <a:r>
+              <a:rPr>
+                <a:latin typeface="Consolas"/>
+              </a:rPr>
+              <a:t>dotnet run -- somewhere quiet to take my kids</a:t>
+            </a:r>
+            <a:r>
+              <a:t>: Taft Point, a 3,000-foot drop. Scores top out near 0.49 vs 0.77. Filters and a floor, not a better model.</a:t>
+            </a:r>
+          </a:p>
+          <a:p>
+            <a:r>
+              <a:t>Cut: 4.</a:t>
             </a:r>
           </a:p>
         </p:txBody>
@@ -3310,12 +3336,7 @@
           <a:lstStyle/>
           <a:p>
             <a:r>
-              <a:t>Also: any catalog where people describe what they want instead of naming it. Row 4.</a:t>
-            </a:r>
-          </a:p>
-          <a:p>
-            <a:r>
-              <a:t>If asked about cost: days to a prototype on an existing catalog; embeddings cheap to free; the work is evaluation and tuning.</a:t>
+              <a:t>Also: any catalog where people describe what they want instead of naming it.</a:t>
             </a:r>
           </a:p>
         </p:txBody>
@@ -3385,12 +3406,7 @@
           <a:lstStyle/>
           <a:p>
             <a:r>
-              <a:t>Also: any catalog where people describe what they want instead of naming it. Row 4.</a:t>
-            </a:r>
-          </a:p>
-          <a:p>
-            <a:r>
-              <a:t>If asked about cost: days to a prototype on an existing catalog; embeddings cheap to free; the work is evaluation and tuning.</a:t>
+              <a:t>The line for your boss. Row 4.</a:t>
             </a:r>
           </a:p>
         </p:txBody>
@@ -3460,12 +3476,7 @@
           <a:lstStyle/>
           <a:p>
             <a:r>
-              <a:t>Also: any catalog where people describe what they want instead of naming it. Row 4.</a:t>
-            </a:r>
-          </a:p>
-          <a:p>
-            <a:r>
-              <a:t>If asked about cost: days to a prototype on an existing catalog; embeddings cheap to free; the work is evaluation and tuning.</a:t>
+              <a:t>Easy. If asked about cost: days to a prototype on an existing catalog; embeddings cheap to free; the work is evaluation and tuning.</a:t>
             </a:r>
           </a:p>
         </p:txBody>
@@ -3675,12 +3686,7 @@
           <a:lstStyle/>
           <a:p>
             <a:r>
-              <a:t>Reading instead of remembering is why the answer can be current and can be cited. Point at the second row and say "the top row happened before anyone asked."</a:t>
-            </a:r>
-          </a:p>
-          <a:p>
-            <a:r>
-              <a:t>The bad-split lesson gets its numbers in the demo: a chunk-per-section put a conditional fire rule and its overriding exception together and answered right; splitting them apart produced "campfires are fine" 4 runs in 20; re-splitting at subsection boundaries, 0 in 60 — while every retrieval metric said the system was working. Chunking is a correctness decision, upstream of model choice.</a:t>
+              <a:t>Index, once: split the park docs into chunks, embed each chunk, store the vector with its text and a source id. Say "the top row happened before anyone asked."</a:t>
             </a:r>
           </a:p>
         </p:txBody>
@@ -3750,12 +3756,7 @@
           <a:lstStyle/>
           <a:p>
             <a:r>
-              <a:t>Reading instead of remembering is why the answer can be current and can be cited. Point at the second row and say "the top row happened before anyone asked."</a:t>
-            </a:r>
-          </a:p>
-          <a:p>
-            <a:r>
-              <a:t>The bad-split lesson gets its numbers in the demo: a chunk-per-section put a conditional fire rule and its overriding exception together and answered right; splitting them apart produced "campfires are fine" 4 runs in 20; re-splitting at subsection boundaries, 0 in 60 — while every retrieval metric said the system was working. Chunking is a correctness decision, upstream of model choice.</a:t>
+              <a:t>Answer, each question: embed the question, retrieve the top chunks by vector and keyword, build a prompt that says "answer only from these, cite, or say you don't know," and check the citations in code.</a:t>
             </a:r>
           </a:p>
         </p:txBody>
@@ -3825,7 +3826,12 @@
           <a:lstStyle/>
           <a:p>
             <a:r>
-              <a:t>Two minutes, one row per advance. This is the one slide most people photograph. Recommendations make no model call at request time, and 05 and 06 literally import 04's search code. If someone asks "is RAG just search," the honest answer is "search plus a model that reads the results," and this picture shows it.</a:t>
+              <a:t>Two minutes, one row per advance. This is the one slide most people photograph.</a:t>
+            </a:r>
+          </a:p>
+          <a:p>
+            <a:r>
+              <a:t>Row one, search: embed the query, find the nearest stored vectors, show the list.</a:t>
             </a:r>
           </a:p>
         </p:txBody>
@@ -3895,12 +3901,7 @@
           <a:lstStyle/>
           <a:p>
             <a:r>
-              <a:t>Reading instead of remembering is why the answer can be current and can be cited. Point at the second row and say "the top row happened before anyone asked."</a:t>
-            </a:r>
-          </a:p>
-          <a:p>
-            <a:r>
-              <a:t>The bad-split lesson gets its numbers in the demo: a chunk-per-section put a conditional fire rule and its overriding exception together and answered right; splitting them apart produced "campfires are fine" 4 runs in 20; re-splitting at subsection boundaries, 0 in 60 — while every retrieval metric said the system was working. Chunking is a correctness decision, upstream of model choice.</a:t>
+              <a:t>Retrieval is 04; generation is 01 with reading material.</a:t>
             </a:r>
           </a:p>
         </p:txBody>
@@ -3970,12 +3971,7 @@
           <a:lstStyle/>
           <a:p>
             <a:r>
-              <a:t>Reading instead of remembering is why the answer can be current and can be cited. Point at the second row and say "the top row happened before anyone asked."</a:t>
-            </a:r>
-          </a:p>
-          <a:p>
-            <a:r>
-              <a:t>The bad-split lesson gets its numbers in the demo: a chunk-per-section put a conditional fire rule and its overriding exception together and answered right; splitting them apart produced "campfires are fine" 4 runs in 20; re-splitting at subsection boundaries, 0 in 60 — while every retrieval metric said the system was working. Chunking is a correctness decision, upstream of model choice.</a:t>
+              <a:t>The model reads instead of remembers. That is why the answer can be current and can be cited.</a:t>
             </a:r>
           </a:p>
         </p:txBody>
@@ -4045,12 +4041,7 @@
           <a:lstStyle/>
           <a:p>
             <a:r>
-              <a:t>Reading instead of remembering is why the answer can be current and can be cited. Point at the second row and say "the top row happened before anyone asked."</a:t>
-            </a:r>
-          </a:p>
-          <a:p>
-            <a:r>
-              <a:t>The bad-split lesson gets its numbers in the demo: a chunk-per-section put a conditional fire rule and its overriding exception together and answered right; splitting them apart produced "campfires are fine" 4 runs in 20; re-splitting at subsection boundaries, 0 in 60 — while every retrieval metric said the system was working. Chunking is a correctness decision, upstream of model choice.</a:t>
+              <a:t>Two failure spots: the wrong chunk, or a bad split. The bad-split lesson gets its numbers in the demo: a chunk-per-section put a conditional fire rule and its overriding exception together and answered right; splitting them apart produced "campfires are fine" 4 runs in 20; re-splitting at subsection boundaries, 0 in 60, while every retrieval metric said the system was working. Chunking is a correctness decision, upstream of model choice.</a:t>
             </a:r>
           </a:p>
         </p:txBody>
@@ -4120,64 +4111,142 @@
           <a:lstStyle/>
           <a:p>
             <a:r>
-              <a:t>The date beat: "CLOSED effective June 20, 2026, until further notice" is unanswerable without a calendar. Without the date the model refused this question 10 runs in 18; with it, 1 in 20. Almost every real knowledge base is a corpus of dated notices — most transferable thing in the feature. Small models invent chunk ids that look right and point nowhere.</a:t>
-            </a:r>
-          </a:p>
-          <a:p>
-            <a:r>
-              <a:t>Where the money goes, one sentence for the close: swapping the 3B local model for a 32B one closes every remaining defect at ~20x the latency (0.9 s to 16.6 s) — and swapping the model before fixing the chunk boundary buys a smarter model reading the wrong context.</a:t>
-            </a:r>
-          </a:p>
-          <a:p>
-            <a:r>
-              <a:t>Demo script (~12 min; steps 8 and 8b are the first cuts):</a:t>
-            </a:r>
-          </a:p>
-          <a:p>
-            <a:r>
-              <a:t>1. Ask the model the Sperry Chalet campfire question with no context. It answers confidently. Then open the actual regulation and show the answer is wrong. Let that sit for a beat; this is the whole reason RAG exists.</a:t>
-            </a:r>
-          </a:p>
-          <a:p>
-            <a:r>
-              <a:t>2. Show the chunked park docs, then open Section 4 of the Glacier backcountry guide in </a:t>
+              <a:t>~12 min · Terminal 1 (Azure) · </a:t>
             </a:r>
             <a:r>
               <a:rPr>
                 <a:latin typeface="Consolas"/>
               </a:rPr>
-              <a:t>data/park-docs/</a:t>
-            </a:r>
-            <a:r>
-              <a:t> and read 4.1 and 4.2 aloud in order. A conditional rule, then the absolute exception that cancels it. Ask the room which one a model answers from. This is the chunking beat and it is worth 90 seconds; the numbers are in </a:t>
+              <a:t>cd modules/M2-finding/F05-rag/dotnet</a:t>
+            </a:r>
+          </a:p>
+          <a:p>
+            <a:r>
+              <a:t>Files: </a:t>
             </a:r>
             <a:r>
               <a:rPr>
                 <a:latin typeface="Consolas"/>
               </a:rPr>
-              <a:t>expected-output.md</a:t>
-            </a:r>
-            <a:r>
-              <a:t> under "Chunking".</a:t>
-            </a:r>
-          </a:p>
-          <a:p>
-            <a:r>
-              <a:t>3. Reuse the embedding search from feature 04 against the chunks. Retrieval is literally the previous feature. Show the score table for the Sperry question, then run </a:t>
+              <a:t>park-docs/</a:t>
+            </a:r>
+            <a:r>
+              <a:t> = 25 regulation docs · </a:t>
             </a:r>
             <a:r>
               <a:rPr>
                 <a:latin typeface="Consolas"/>
               </a:rPr>
-              <a:t>dotnet run -- --top-k 8 --alpha 1.0 --retrieval-only</a:t>
-            </a:r>
-            <a:r>
-              <a:t> and point at ranks 4 through 8: Acadia and Yosemite campfire sections, five of eight chunks from the wrong park.</a:t>
-            </a:r>
-          </a:p>
-          <a:p>
-            <a:r>
-              <a:t>4. Turn on hybrid retrieval. Same cosine score, plus a keyword score weighted by word rarity, combined with a visible alpha. Re-run at the default alpha, </a:t>
+              <a:t>chunks.jsonl</a:t>
+            </a:r>
+            <a:r>
+              <a:t> = 250 chunks · </a:t>
+            </a:r>
+            <a:r>
+              <a:rPr>
+                <a:latin typeface="Consolas"/>
+              </a:rPr>
+              <a:t>chunk-embeddings.json</a:t>
+            </a:r>
+            <a:r>
+              <a:t> = their vectors, precomputed · </a:t>
+            </a:r>
+            <a:r>
+              <a:rPr>
+                <a:latin typeface="Consolas"/>
+              </a:rPr>
+              <a:t>questions.json</a:t>
+            </a:r>
+            <a:r>
+              <a:t> = the four lab questions</a:t>
+            </a:r>
+          </a:p>
+          <a:p>
+            <a:r>
+              <a:t>Flags: </a:t>
+            </a:r>
+            <a:r>
+              <a:rPr>
+                <a:latin typeface="Consolas"/>
+              </a:rPr>
+              <a:t>--retrieval-only</a:t>
+            </a:r>
+            <a:r>
+              <a:t> = no answer, just ranks · </a:t>
+            </a:r>
+            <a:r>
+              <a:rPr>
+                <a:latin typeface="Consolas"/>
+              </a:rPr>
+              <a:t>--top-k N</a:t>
+            </a:r>
+            <a:r>
+              <a:t> = chunks retrieved (default 3) · </a:t>
+            </a:r>
+            <a:r>
+              <a:rPr>
+                <a:latin typeface="Consolas"/>
+              </a:rPr>
+              <a:t>--alpha</a:t>
+            </a:r>
+            <a:r>
+              <a:t> = semantic weight, 1.0 = cosine only, default 0.6 · </a:t>
+            </a:r>
+            <a:r>
+              <a:rPr>
+                <a:latin typeface="Consolas"/>
+              </a:rPr>
+              <a:t>--no-context</a:t>
+            </a:r>
+            <a:r>
+              <a:t> = plain chatbot · a quoted question replaces the Sperry default</a:t>
+            </a:r>
+          </a:p>
+          <a:p>
+            <a:r>
+              <a:t>1. Before: </a:t>
+            </a:r>
+            <a:r>
+              <a:rPr>
+                <a:latin typeface="Consolas"/>
+              </a:rPr>
+              <a:t>cd starter &amp;&amp; dotnet run</a:t>
+            </a:r>
+            <a:r>
+              <a:t>. The Sperry campfire question, no context. Confident. Wrong.</a:t>
+            </a:r>
+          </a:p>
+          <a:p>
+            <a:r>
+              <a:t>2. Open </a:t>
+            </a:r>
+            <a:r>
+              <a:rPr>
+                <a:latin typeface="Consolas"/>
+              </a:rPr>
+              <a:t>data/park-docs/glacier-backcountry-camping-guide.md</a:t>
+            </a:r>
+            <a:r>
+              <a:t>, section 4. Read 4.1 then 4.2 aloud. Which one does a model answer from?</a:t>
+            </a:r>
+          </a:p>
+          <a:p>
+            <a:r>
+              <a:t>3. </a:t>
+            </a:r>
+            <a:r>
+              <a:rPr>
+                <a:latin typeface="Consolas"/>
+              </a:rPr>
+              <a:t>cd ../complete &amp;&amp; dotnet run -- --top-k 8 --alpha 1.0 --retrieval-only</a:t>
+            </a:r>
+            <a:r>
+              <a:t>: ranks 4 to 8 are Acadia and Yosemite.</a:t>
+            </a:r>
+          </a:p>
+          <a:p>
+            <a:r>
+              <a:t>4. </a:t>
             </a:r>
             <a:r>
               <a:rPr>
@@ -4186,46 +4255,59 @@
               <a:t>dotnet run -- --top-k 8 --retrieval-only</a:t>
             </a:r>
             <a:r>
-              <a:t>: Acadia is gone and the wrong-park chunks are replaced by Glacier documents that name Sperry. The printed table shows both component scores, so you can point at "sperry" doing the work.</a:t>
-            </a:r>
-          </a:p>
-          <a:p>
-            <a:r>
-              <a:t>5. Build the grounded prompt: retrieved chunks + question + "answer only from the context, cite the source, say when you don't know."</a:t>
-            </a:r>
-          </a:p>
-          <a:p>
-            <a:r>
-              <a:t>6. Run it. The payoff: the right answer, with the regulation document cited by name.</a:t>
-            </a:r>
-          </a:p>
-          <a:p>
-            <a:r>
-              <a:t>7. Show the citation check. Parse the ids out of the answer, compare against what was retrieved, print a loud failure on a mismatch. Run the unanswerable question a couple of times until the model appends an invented chunk id to its own refusal, which it does often enough to count on.</a:t>
-            </a:r>
-          </a:p>
-          <a:p>
-            <a:r>
-              <a:t>8. Ask it something the docs don't cover ("Can I bring a drone?" if absent) and get an honest "the provided documents don't say," not a guess.</a:t>
-            </a:r>
-          </a:p>
-          <a:p>
-            <a:r>
-              <a:t>8b. Ask "Is the Avalanche Lake Trail open right now?" and show the date sitting in the prompt. Explain why it is there: without it the same question got refused in 10 runs out of 18, not because retrieval missed but because "effective June 20, 2026, until further notice" is unanswerable without a calendar. Worth 60 seconds; it is the most transferable thing in the feature.</a:t>
-            </a:r>
-          </a:p>
-          <a:p>
-            <a:r>
-              <a:t>9. Swap generation from the local model to </a:t>
+              <a:t>: hybrid. Acadia gone, "sperry" doing the work.</a:t>
+            </a:r>
+          </a:p>
+          <a:p>
+            <a:r>
+              <a:t>5. After: </a:t>
             </a:r>
             <a:r>
               <a:rPr>
                 <a:latin typeface="Consolas"/>
               </a:rPr>
-              <a:t>gpt-4.1</a:t>
-            </a:r>
-            <a:r>
-              <a:t> on Foundry with the one-line Microsoft.Extensions.AI client change, re-run a multi-document question, and compare answer quality side by side.</a:t>
+              <a:t>dotnet run</a:t>
+            </a:r>
+            <a:r>
+              <a:t>. Right answer, cited by name. Point at the citation check line.</a:t>
+            </a:r>
+          </a:p>
+          <a:p>
+            <a:r>
+              <a:t>6. </a:t>
+            </a:r>
+            <a:r>
+              <a:rPr>
+                <a:latin typeface="Consolas"/>
+              </a:rPr>
+              <a:t>dotnet run -- "Are there EV charging stations in Glacier National Park?"</a:t>
+            </a:r>
+            <a:r>
+              <a:t>: "The documents don't say."</a:t>
+            </a:r>
+          </a:p>
+          <a:p>
+            <a:r>
+              <a:t>7. </a:t>
+            </a:r>
+            <a:r>
+              <a:rPr>
+                <a:latin typeface="Consolas"/>
+              </a:rPr>
+              <a:t>dotnet run -- "Is the Avalanche Lake Trail open right now?"</a:t>
+            </a:r>
+            <a:r>
+              <a:t>: the date in the prompt. Without it, refused 10 of 18.</a:t>
+            </a:r>
+          </a:p>
+          <a:p>
+            <a:r>
+              <a:t>8. Point at the DI line: this was gpt-4.1. Local would be one line.</a:t>
+            </a:r>
+          </a:p>
+          <a:p>
+            <a:r>
+              <a:t>Cut: 7, then 6.</a:t>
             </a:r>
           </a:p>
         </p:txBody>
@@ -4298,16 +4380,6 @@
               <a:t>Internal knowledge bases, support and policy docs, product documentation. The production work is chunking, retrieval evaluation, keeping documents current.</a:t>
             </a:r>
           </a:p>
-          <a:p>
-            <a:r>
-              <a:t>If asked about cost: a day to demo, weeks to production quality.</a:t>
-            </a:r>
-          </a:p>
-          <a:p>
-            <a:r>
-              <a:t>The uncomfortable line for leadership: the worst bug was a text-splitting rule, not a model or a prompt. Ask what your evaluation would have caught. Row 5.</a:t>
-            </a:r>
-          </a:p>
         </p:txBody>
       </p:sp>
       <p:sp>
@@ -4375,17 +4447,7 @@
           <a:lstStyle/>
           <a:p>
             <a:r>
-              <a:t>Internal knowledge bases, support and policy docs, product documentation. The production work is chunking, retrieval evaluation, keeping documents current.</a:t>
-            </a:r>
-          </a:p>
-          <a:p>
-            <a:r>
-              <a:t>If asked about cost: a day to demo, weeks to production quality.</a:t>
-            </a:r>
-          </a:p>
-          <a:p>
-            <a:r>
-              <a:t>The uncomfortable line for leadership: the worst bug was a text-splitting rule, not a model or a prompt. Ask what your evaluation would have caught. Row 5.</a:t>
+              <a:t>The line for your boss. The uncomfortable one underneath it: the worst bug was a text-splitting rule, not a model or a prompt. Ask what your evaluation would have caught. Row 5.</a:t>
             </a:r>
           </a:p>
         </p:txBody>
@@ -4455,17 +4517,7 @@
           <a:lstStyle/>
           <a:p>
             <a:r>
-              <a:t>Internal knowledge bases, support and policy docs, product documentation. The production work is chunking, retrieval evaluation, keeping documents current.</a:t>
-            </a:r>
-          </a:p>
-          <a:p>
-            <a:r>
-              <a:t>If asked about cost: a day to demo, weeks to production quality.</a:t>
-            </a:r>
-          </a:p>
-          <a:p>
-            <a:r>
-              <a:t>The uncomfortable line for leadership: the worst bug was a text-splitting rule, not a model or a prompt. Ask what your evaluation would have caught. Row 5.</a:t>
+              <a:t>Hard. If asked about cost: a day to demo, weeks to production quality.</a:t>
             </a:r>
           </a:p>
         </p:txBody>
@@ -4680,42 +4732,125 @@
           <a:lstStyle/>
           <a:p>
             <a:r>
-              <a:t>Similarity gets you candidates; metadata re-ranking gets you recommendations. Review co-mentions put the bear canister on top for the Cascade 65. One target trail in the slice has no real neighbors at all; a shipping product shows nothing rather than five weak guesses. And the honest caveat: description similarity will never discover that waterfall hikers buy headlamps — cross-category needs behavior data.</a:t>
-            </a:r>
-          </a:p>
-          <a:p>
-            <a:r>
-              <a:t>Demo script (~6 min; step 5 is the first cut):</a:t>
-            </a:r>
-          </a:p>
-          <a:p>
-            <a:r>
-              <a:t>1. Open the Avalanche Lake Trail page and ask the room what should be at the bottom of this screen. Everyone knows the answer, and almost nobody builds it.</a:t>
-            </a:r>
-          </a:p>
-          <a:p>
-            <a:r>
-              <a:t>2. Bring back the embedded trail catalog from feature 04, already sitting in memory; nothing new is created in this step, which is the point.</a:t>
-            </a:r>
-          </a:p>
-          <a:p>
-            <a:r>
-              <a:t>3. Write "more like this": take one trail's vector, rank every other trail by cosine similarity, skip itself, and take five. It's the search code with the query swapped for an item.</a:t>
-            </a:r>
-          </a:p>
-          <a:p>
-            <a:r>
-              <a:t>4. Run it for a few trails and let the room judge the results by reading the names, because they can. The alpine lake hikes do cluster, but they also come back mostly rated hard when the trail you started from is a moderate family walk, and one neighbor is a Smokies hike with no lake at all. Difficulty and park are right there in the catalog, but they are not in the description text, so the embedding cannot see them. One screen carries the lesson: similarity gets you candidates, and metadata re-ranking turns them into recommendations.</a:t>
-            </a:r>
-          </a:p>
-          <a:p>
-            <a:r>
-              <a:t>5. Do the same with gear and let it fail on purpose. The top result for the Cascade 65 Backpack is the Cascade 40 Daypack, the single product that buyer will never need. Content similarity finds substitutes; a store wants complements. Then show the review co-mention counts, where the Summit Bear Canister sits at the top, and name the difference: what a thing is like versus what people actually use with it.</a:t>
-            </a:r>
-          </a:p>
-          <a:p>
-            <a:r>
-              <a:t>6. Close on what this can't do. Cross-category discovery is out of reach for description similarity, one target trail in the slice has no real neighbors at all and a shipping product should show nothing rather than five weak guesses, and behavior data is what fixes both.</a:t>
+              <a:t>~6 min · Terminal 2 · </a:t>
+            </a:r>
+            <a:r>
+              <a:rPr>
+                <a:latin typeface="Consolas"/>
+              </a:rPr>
+              <a:t>cd modules/M2-finding/F06-recommendations/dotnet</a:t>
+            </a:r>
+          </a:p>
+          <a:p>
+            <a:r>
+              <a:t>Files: </a:t>
+            </a:r>
+            <a:r>
+              <a:rPr>
+                <a:latin typeface="Consolas"/>
+              </a:rPr>
+              <a:t>trails.json</a:t>
+            </a:r>
+            <a:r>
+              <a:t> = 30 trails · </a:t>
+            </a:r>
+            <a:r>
+              <a:rPr>
+                <a:latin typeface="Consolas"/>
+              </a:rPr>
+              <a:t>trail-embeddings.json</a:t>
+            </a:r>
+            <a:r>
+              <a:t> = 04's vectors, precomputed · </a:t>
+            </a:r>
+            <a:r>
+              <a:rPr>
+                <a:latin typeface="Consolas"/>
+              </a:rPr>
+              <a:t>gear-reviews.jsonl</a:t>
+            </a:r>
+            <a:r>
+              <a:t> = 300 reviews</a:t>
+            </a:r>
+          </a:p>
+          <a:p>
+            <a:r>
+              <a:t>Args: a trail id or name (default trail-0117, Avalanche Lake) · </a:t>
+            </a:r>
+            <a:r>
+              <a:rPr>
+                <a:latin typeface="Consolas"/>
+              </a:rPr>
+              <a:t>--gear &lt;product&gt;</a:t>
+            </a:r>
+            <a:r>
+              <a:t> = same trick over review text</a:t>
+            </a:r>
+          </a:p>
+          <a:p>
+            <a:r>
+              <a:t>1. Avalanche Lake Trail page. What belongs at the bottom of this screen?</a:t>
+            </a:r>
+          </a:p>
+          <a:p>
+            <a:r>
+              <a:t>2. Before: </a:t>
+            </a:r>
+            <a:r>
+              <a:rPr>
+                <a:latin typeface="Consolas"/>
+              </a:rPr>
+              <a:t>cd starter &amp;&amp; dotnet run</a:t>
+            </a:r>
+            <a:r>
+              <a:t>. Random picks. That is what most apps ship.</a:t>
+            </a:r>
+          </a:p>
+          <a:p>
+            <a:r>
+              <a:t>3. After: </a:t>
+            </a:r>
+            <a:r>
+              <a:rPr>
+                <a:latin typeface="Consolas"/>
+              </a:rPr>
+              <a:t>cd ../complete &amp;&amp; dotnet run</a:t>
+            </a:r>
+            <a:r>
+              <a:t>. Same vectors as 04, nothing new embedded. Lakes cluster, but mostly hard, and one has no lake.</a:t>
+            </a:r>
+          </a:p>
+          <a:p>
+            <a:r>
+              <a:t>4. Difficulty and park are in the catalog, not the text. Similarity gets candidates; metadata re-ranks.</a:t>
+            </a:r>
+          </a:p>
+          <a:p>
+            <a:r>
+              <a:t>5. </a:t>
+            </a:r>
+            <a:r>
+              <a:rPr>
+                <a:latin typeface="Consolas"/>
+              </a:rPr>
+              <a:t>dotnet run -- --gear Cascade 65</a:t>
+            </a:r>
+            <a:r>
+              <a:t>: the Cascade 40. Substitutes, not complements. What people use with it lives in the reviews: the bear canister, in </a:t>
+            </a:r>
+            <a:r>
+              <a:rPr>
+                <a:latin typeface="Consolas"/>
+              </a:rPr>
+              <a:t>expected-output.md</a:t>
+            </a:r>
+            <a:r>
+              <a:t>.</a:t>
+            </a:r>
+          </a:p>
+          <a:p>
+            <a:r>
+              <a:t>Cut: 5.</a:t>
             </a:r>
           </a:p>
         </p:txBody>
@@ -4785,17 +4920,12 @@
           <a:lstStyle/>
           <a:p>
             <a:r>
-              <a:t>One piece of infrastructure — embeddings — and the rhythm again: three demos, then your lab hour.</a:t>
-            </a:r>
-          </a:p>
-          <a:p>
-            <a:r>
-              <a:t>Embeddings turn text into vectors; distance between vectors means similarity of meaning. Same math, three products.</a:t>
-            </a:r>
-          </a:p>
-          <a:p>
-            <a:r>
-              <a:t>The thread to watch: embeddings capture what text is about — nothing about whether it's suitable, safe, or current. Search hands a cliff edge to "quiet, for kids"; recommendations answer the 65-litre pack with the 40-litre pack. The fix is metadata, filters, thresholds, and how you split documents — not a bigger model.</a:t>
+              <a:t>06: the same vectors, with the query swapped for an item. Same math, three products.</a:t>
+            </a:r>
+          </a:p>
+          <a:p>
+            <a:r>
+              <a:t>The thread to watch: embeddings capture what text is about, and nothing about whether it's suitable, safe, or current. Search hands a cliff edge to "quiet, for kids"; recommendations answer the 65-litre pack with the 40-litre pack. The fix is metadata, filters, thresholds, and how you split documents, not a bigger model.</a:t>
             </a:r>
           </a:p>
         </p:txBody>
@@ -4865,12 +4995,7 @@
           <a:lstStyle/>
           <a:p>
             <a:r>
-              <a:t>Any catalog or content library. Collaborative filtering comes later, when behavior data exists. Row 6.</a:t>
-            </a:r>
-          </a:p>
-          <a:p>
-            <a:r>
-              <a:t>If asked about cost: nearly free once search exists; days from scratch.</a:t>
+              <a:t>Any catalog or content library. Collaborative filtering comes later, when behavior data exists.</a:t>
             </a:r>
           </a:p>
         </p:txBody>
@@ -4940,12 +5065,7 @@
           <a:lstStyle/>
           <a:p>
             <a:r>
-              <a:t>Any catalog or content library. Collaborative filtering comes later, when behavior data exists. Row 6.</a:t>
-            </a:r>
-          </a:p>
-          <a:p>
-            <a:r>
-              <a:t>If asked about cost: nearly free once search exists; days from scratch.</a:t>
+              <a:t>The line for your boss. Row 6.</a:t>
             </a:r>
           </a:p>
         </p:txBody>
@@ -5015,12 +5135,7 @@
           <a:lstStyle/>
           <a:p>
             <a:r>
-              <a:t>Any catalog or content library. Collaborative filtering comes later, when behavior data exists. Row 6.</a:t>
-            </a:r>
-          </a:p>
-          <a:p>
-            <a:r>
-              <a:t>If asked about cost: nearly free once search exists; days from scratch.</a:t>
+              <a:t>Easy. If asked about cost: nearly free once search exists; days from scratch.</a:t>
             </a:r>
           </a:p>
         </p:txBody>
@@ -5310,17 +5425,17 @@
           <a:lstStyle/>
           <a:p>
             <a:r>
-              <a:t>One piece of infrastructure — embeddings — and the rhythm again: three demos, then your lab hour.</a:t>
-            </a:r>
-          </a:p>
-          <a:p>
-            <a:r>
-              <a:t>Embeddings turn text into vectors; distance between vectors means similarity of meaning. Same math, three products.</a:t>
-            </a:r>
-          </a:p>
-          <a:p>
-            <a:r>
-              <a:t>The thread to watch: embeddings capture what text is about — nothing about whether it's suitable, safe, or current. Search hands a cliff edge to "quiet, for kids"; recommendations answer the 65-litre pack with the 40-litre pack. The fix is metadata, filters, thresholds, and how you split documents — not a bigger model.</a:t>
+              <a:t>One piece of infrastructure, embeddings, and the rhythm again: three demos, then your lab hour.</a:t>
+            </a:r>
+          </a:p>
+          <a:p>
+            <a:r>
+              <a:t>Embeddings turn text into vectors; distance between vectors means similarity of meaning.</a:t>
+            </a:r>
+          </a:p>
+          <a:p>
+            <a:r>
+              <a:t>04: a search box that finds what users mean.</a:t>
             </a:r>
           </a:p>
         </p:txBody>
@@ -5390,17 +5505,7 @@
           <a:lstStyle/>
           <a:p>
             <a:r>
-              <a:t>One piece of infrastructure — embeddings — and the rhythm again: three demos, then your lab hour.</a:t>
-            </a:r>
-          </a:p>
-          <a:p>
-            <a:r>
-              <a:t>Embeddings turn text into vectors; distance between vectors means similarity of meaning. Same math, three products.</a:t>
-            </a:r>
-          </a:p>
-          <a:p>
-            <a:r>
-              <a:t>The thread to watch: embeddings capture what text is about — nothing about whether it's suitable, safe, or current. Search hands a cliff edge to "quiet, for kids"; recommendations answer the 65-litre pack with the 40-litre pack. The fix is metadata, filters, thresholds, and how you split documents — not a bigger model.</a:t>
+              <a:t>05: the same retrieval, plus a model that reads what it found and cites it.</a:t>
             </a:r>
           </a:p>
         </p:txBody>

--- a/docs/slides/pptx/M2-finding.pptx
+++ b/docs/slides/pptx/M2-finding.pptx
@@ -3153,7 +3153,7 @@
           <a:lstStyle/>
           <a:p>
             <a:r>
-              <a:t>~8 min · Terminal 2 · </a:t>
+              <a:t>~8 min · </a:t>
             </a:r>
             <a:r>
               <a:rPr>
@@ -4111,7 +4111,7 @@
           <a:lstStyle/>
           <a:p>
             <a:r>
-              <a:t>~12 min · Terminal 1 (Azure) · </a:t>
+              <a:t>~12 min · </a:t>
             </a:r>
             <a:r>
               <a:rPr>
@@ -4732,7 +4732,7 @@
           <a:lstStyle/>
           <a:p>
             <a:r>
-              <a:t>~6 min · Terminal 2 · </a:t>
+              <a:t>~6 min · </a:t>
             </a:r>
             <a:r>
               <a:rPr>
